--- a/docs/Israel_Transit_Project_Presentation.pptx
+++ b/docs/Israel_Transit_Project_Presentation.pptx
@@ -3293,6 +3293,42 @@
           </a:p>
         </p:txBody>
       </p:sp>
+      <p:sp>
+        <p:nvSpPr>
+          <p:cNvPr id="6" name="TextBox 5"/>
+          <p:cNvSpPr txBox="1"/>
+          <p:nvPr/>
+        </p:nvSpPr>
+        <p:spPr>
+          <a:xfrm>
+            <a:off x="914400" y="5577840"/>
+            <a:ext cx="10058400" cy="457200"/>
+          </a:xfrm>
+          <a:prstGeom prst="rect">
+            <a:avLst/>
+          </a:prstGeom>
+          <a:noFill/>
+        </p:spPr>
+        <p:txBody>
+          <a:bodyPr wrap="square">
+            <a:spAutoFit/>
+          </a:bodyPr>
+          <a:lstStyle/>
+          <a:p>
+            <a:pPr algn="ctr">
+              <a:defRPr sz="1400" b="0">
+                <a:solidFill>
+                  <a:srgbClr val="FFFFFF"/>
+                </a:solidFill>
+                <a:latin typeface="Arial"/>
+              </a:defRPr>
+            </a:pPr>
+            <a:r>
+              <a:t>מגישות:  אורלי בר  •  איריס המבר  •  זיו ורסנו</a:t>
+            </a:r>
+          </a:p>
+        </p:txBody>
+      </p:sp>
     </p:spTree>
   </p:cSld>
   <p:clrMapOvr>
@@ -5086,7 +5122,7 @@
               </a:defRPr>
             </a:pPr>
             <a:r>
-              <a:t>מספרים מתוך ה-VM הפועל</a:t>
+              <a:t>מספרים מתוך Elastic Cloud (managed)</a:t>
             </a:r>
           </a:p>
         </p:txBody>
@@ -5203,7 +5239,7 @@
               </a:defRPr>
             </a:pPr>
             <a:r>
-              <a:t>268,771</a:t>
+              <a:t>2,917,758</a:t>
             </a:r>
           </a:p>
         </p:txBody>
@@ -5320,7 +5356,7 @@
               </a:defRPr>
             </a:pPr>
             <a:r>
-              <a:t>508,772</a:t>
+              <a:t>1,906,678</a:t>
             </a:r>
           </a:p>
         </p:txBody>
@@ -5437,7 +5473,7 @@
               </a:defRPr>
             </a:pPr>
             <a:r>
-              <a:t>67,423</a:t>
+              <a:t>591,661</a:t>
             </a:r>
           </a:p>
         </p:txBody>
@@ -5554,7 +5590,7 @@
               </a:defRPr>
             </a:pPr>
             <a:r>
-              <a:t>51,874</a:t>
+              <a:t>1,629,934</a:t>
             </a:r>
           </a:p>
         </p:txBody>
@@ -5590,7 +5626,7 @@
               </a:defRPr>
             </a:pPr>
             <a:r>
-              <a:t>עדכוני נסיעה</a:t>
+              <a:t>התראות שירות</a:t>
             </a:r>
           </a:p>
         </p:txBody>
@@ -5671,7 +5707,7 @@
               </a:defRPr>
             </a:pPr>
             <a:r>
-              <a:t>17,512</a:t>
+              <a:t>7,046,031</a:t>
             </a:r>
           </a:p>
         </p:txBody>
@@ -5707,7 +5743,7 @@
               </a:defRPr>
             </a:pPr>
             <a:r>
-              <a:t>התראות שירות</a:t>
+              <a:t>סה״כ בענן</a:t>
             </a:r>
           </a:p>
         </p:txBody>
@@ -7019,7 +7055,7 @@
             </a:r>
             <a:br/>
             <a:r>
-              <a:t>Elasticsearch 8.8</a:t>
+              <a:t>Elasticsearch (Elastic Cloud)</a:t>
             </a:r>
             <a:br/>
             <a:r>
@@ -9447,7 +9483,7 @@
               </a:defRPr>
             </a:pPr>
             <a:r>
-              <a:t>heap הורד ל-256-512MB, restart: no — נפתח רק למצגת</a:t>
+              <a:t>פתרון: הגירה ל-Elastic Cloud — 7M+ רשומות, אפס עומס על ה-VM</a:t>
             </a:r>
           </a:p>
         </p:txBody>
@@ -13583,7 +13619,7 @@
             </a:r>
             <a:br/>
             <a:r>
-              <a:t>Search Index</a:t>
+              <a:t>Elastic Cloud ☁️</a:t>
             </a:r>
           </a:p>
         </p:txBody>
@@ -13971,7 +14007,7 @@
             </a:r>
             <a:br/>
             <a:r>
-              <a:t>Dashboards</a:t>
+              <a:t>Cloud Dashboards</a:t>
             </a:r>
           </a:p>
         </p:txBody>
@@ -17534,7 +17570,7 @@
               </a:defRPr>
             </a:pPr>
             <a:r>
-              <a:t>Elasticsearch 8.8</a:t>
+              <a:t>Elasticsearch · Elastic Cloud ☁️</a:t>
             </a:r>
           </a:p>
         </p:txBody>
@@ -17570,33 +17606,39 @@
               </a:defRPr>
             </a:pPr>
             <a:r>
-              <a:t>Distributed Search Engine</a:t>
+              <a:t>Managed Service (Elastic Cloud)</a:t>
             </a:r>
             <a:br/>
+            <a:r>
+              <a:t>Region: eu-central-1 (AWS)</a:t>
+            </a:r>
             <a:br/>
             <a:r>
-              <a:t>transit-bus-positions: 268K docs</a:t>
+              <a:t/>
             </a:r>
             <a:br/>
             <a:r>
-              <a:t>transit-train-positions: 508K docs</a:t>
+              <a:t>transit-bus-positions: 2.9M</a:t>
             </a:r>
             <a:br/>
             <a:r>
-              <a:t>transit-traffic: 67K docs</a:t>
+              <a:t>transit-train-positions: 1.9M</a:t>
             </a:r>
             <a:br/>
             <a:r>
-              <a:t>transit-trip-updates: 51K docs</a:t>
+              <a:t>transit-traffic: 592K</a:t>
             </a:r>
             <a:br/>
             <a:r>
-              <a:t>transit-service-alerts: 17K docs</a:t>
+              <a:t>transit-service-alerts: 1.6M</a:t>
             </a:r>
             <a:br/>
+            <a:r>
+              <a:t/>
+            </a:r>
             <a:br/>
             <a:r>
-              <a:t>Heap: 256-512MB (מוטבל ל-VM)</a:t>
+              <a:t>סה״כ: 7M+ רשומות · אפס עומס VM</a:t>
             </a:r>
           </a:p>
         </p:txBody>

--- a/docs/Israel_Transit_Project_Presentation.pptx
+++ b/docs/Israel_Transit_Project_Presentation.pptx
@@ -17,6 +17,7 @@
     <p:sldId id="271" r:id="rId22"/>
     <p:sldId id="272" r:id="rId23"/>
     <p:sldId id="273" r:id="rId24"/>
+    <p:sldId id="274" r:id="rId25"/>
     <p:sldId id="265" r:id="rId16"/>
     <p:sldId id="266" r:id="rId17"/>
     <p:sldId id="267" r:id="rId18"/>
@@ -3623,30 +3624,6 @@
           </a:p>
         </p:txBody>
       </p:sp>
-      <p:pic>
-        <p:nvPicPr>
-          <p:cNvPr id="9" name="Picture 8" descr="transit_qr.png"/>
-          <p:cNvPicPr>
-            <a:picLocks noChangeAspect="1"/>
-          </p:cNvPicPr>
-          <p:nvPr/>
-        </p:nvPicPr>
-        <p:blipFill>
-          <a:blip r:embed="rId2"/>
-          <a:stretch>
-            <a:fillRect/>
-          </a:stretch>
-        </p:blipFill>
-        <p:spPr>
-          <a:xfrm>
-            <a:off x="960120" y="2331720"/>
-            <a:ext cx="1554480" cy="1554480"/>
-          </a:xfrm>
-          <a:prstGeom prst="rect">
-            <a:avLst/>
-          </a:prstGeom>
-        </p:spPr>
-      </p:pic>
       <p:sp>
         <p:nvSpPr>
           <p:cNvPr id="10" name="TextBox 9"/>
@@ -3678,7 +3655,7 @@
               </a:defRPr>
             </a:pPr>
             <a:r>
-              <a:t>192.168.1.110:5443/gushdan</a:t>
+              <a:t>192.168.1.110:5000/gushdan</a:t>
             </a:r>
           </a:p>
         </p:txBody>
@@ -3714,35 +3691,11 @@
               </a:defRPr>
             </a:pPr>
             <a:r>
-              <a:t>🌐 גישה מרחוק (ngrok)</a:t>
-            </a:r>
-          </a:p>
-        </p:txBody>
-      </p:sp>
-      <p:pic>
-        <p:nvPicPr>
-          <p:cNvPr id="12" name="Picture 11" descr="transit_qr_public.png"/>
-          <p:cNvPicPr>
-            <a:picLocks noChangeAspect="1"/>
-          </p:cNvPicPr>
-          <p:nvPr/>
-        </p:nvPicPr>
-        <p:blipFill>
-          <a:blip r:embed="rId3"/>
-          <a:stretch>
-            <a:fillRect/>
-          </a:stretch>
-        </p:blipFill>
-        <p:spPr>
-          <a:xfrm>
-            <a:off x="3520440" y="2331720"/>
-            <a:ext cx="1554480" cy="1554480"/>
-          </a:xfrm>
-          <a:prstGeom prst="rect">
-            <a:avLst/>
-          </a:prstGeom>
-        </p:spPr>
-      </p:pic>
+              <a:t>🏠 רשת מקומית (WiFi)</a:t>
+            </a:r>
+          </a:p>
+        </p:txBody>
+      </p:sp>
       <p:sp>
         <p:nvSpPr>
           <p:cNvPr id="13" name="TextBox 12"/>
@@ -3774,7 +3727,7 @@
               </a:defRPr>
             </a:pPr>
             <a:r>
-              <a:t>ngrok tunnel → HTTPS</a:t>
+              <a:t>192.168.1.110:5000/gushdan</a:t>
             </a:r>
           </a:p>
         </p:txBody>
@@ -4543,11 +4496,59 @@
               </a:defRPr>
             </a:pPr>
             <a:r>
-              <a:t>נגיש מכל מקום דרך ngrok + HTTPS</a:t>
-            </a:r>
-          </a:p>
-        </p:txBody>
-      </p:sp>
+              <a:t>נגיש ברשת המקומית — סריקת קוד QR</a:t>
+            </a:r>
+          </a:p>
+        </p:txBody>
+      </p:sp>
+      <p:pic>
+        <p:nvPicPr>
+          <p:cNvPr id="35" name="Picture 34" descr="app_qr.png"/>
+          <p:cNvPicPr>
+            <a:picLocks noChangeAspect="1"/>
+          </p:cNvPicPr>
+          <p:nvPr/>
+        </p:nvPicPr>
+        <p:blipFill>
+          <a:blip r:embed="rId4"/>
+          <a:stretch>
+            <a:fillRect/>
+          </a:stretch>
+        </p:blipFill>
+        <p:spPr>
+          <a:xfrm>
+            <a:off x="960120" y="2331720"/>
+            <a:ext cx="1554480" cy="1554480"/>
+          </a:xfrm>
+          <a:prstGeom prst="rect">
+            <a:avLst/>
+          </a:prstGeom>
+        </p:spPr>
+      </p:pic>
+      <p:pic>
+        <p:nvPicPr>
+          <p:cNvPr id="36" name="Picture 35" descr="app_qr.png"/>
+          <p:cNvPicPr>
+            <a:picLocks noChangeAspect="1"/>
+          </p:cNvPicPr>
+          <p:nvPr/>
+        </p:nvPicPr>
+        <p:blipFill>
+          <a:blip r:embed="rId4"/>
+          <a:stretch>
+            <a:fillRect/>
+          </a:stretch>
+        </p:blipFill>
+        <p:spPr>
+          <a:xfrm>
+            <a:off x="3520440" y="2331720"/>
+            <a:ext cx="1554480" cy="1554480"/>
+          </a:xfrm>
+          <a:prstGeom prst="rect">
+            <a:avLst/>
+          </a:prstGeom>
+        </p:spPr>
+      </p:pic>
     </p:spTree>
   </p:cSld>
   <p:clrMapOvr>
@@ -4648,7 +4649,7 @@
               </a:defRPr>
             </a:pPr>
             <a:r>
-              <a:t>📊 דשבורד — ניטור תחבורה בזמן אמת</a:t>
+              <a:t>📊 דשבורד אוטובוסים — Elastic Cloud</a:t>
             </a:r>
           </a:p>
         </p:txBody>
@@ -4684,7 +4685,7 @@
               </a:defRPr>
             </a:pPr>
             <a:r>
-              <a:t>Kibana Dashboard — Israel Transit Monitoring</a:t>
+              <a:t>Kibana on Elastic Cloud — Buses (operator breakdown)</a:t>
             </a:r>
           </a:p>
         </p:txBody>
@@ -4727,14 +4728,14 @@
       </p:sp>
       <p:pic>
         <p:nvPicPr>
-          <p:cNvPr id="6" name="Picture 5" descr="kibana_realtime.png"/>
+          <p:cNvPr id="6" name="Picture 5" descr="cloud_buses.png"/>
           <p:cNvPicPr>
             <a:picLocks noChangeAspect="1"/>
           </p:cNvPicPr>
           <p:nvPr/>
         </p:nvPicPr>
         <p:blipFill>
-          <a:blip r:embed="rId2"/>
+          <a:blip r:embed="rId3"/>
           <a:stretch>
             <a:fillRect/>
           </a:stretch>
@@ -4849,7 +4850,7 @@
               </a:defRPr>
             </a:pPr>
             <a:r>
-              <a:t>📉 דשבורד — ניתוח עיכובים ותנועה</a:t>
+              <a:t>🚆 דשבורד רכבות — Elastic Cloud</a:t>
             </a:r>
           </a:p>
         </p:txBody>
@@ -4885,7 +4886,7 @@
               </a:defRPr>
             </a:pPr>
             <a:r>
-              <a:t>Kibana Dashboard — Delay Analysis &amp; Traffic</a:t>
+              <a:t>Kibana on Elastic Cloud — Trains (avg velocity, top lines)</a:t>
             </a:r>
           </a:p>
         </p:txBody>
@@ -4926,16 +4927,52 @@
           </a:p>
         </p:txBody>
       </p:sp>
+      <p:sp>
+        <p:nvSpPr>
+          <p:cNvPr id="7" name="TextBox 6"/>
+          <p:cNvSpPr txBox="1"/>
+          <p:nvPr/>
+        </p:nvSpPr>
+        <p:spPr>
+          <a:xfrm>
+            <a:off x="274320" y="5943600"/>
+            <a:ext cx="11612880" cy="365760"/>
+          </a:xfrm>
+          <a:prstGeom prst="rect">
+            <a:avLst/>
+          </a:prstGeom>
+          <a:noFill/>
+        </p:spPr>
+        <p:txBody>
+          <a:bodyPr wrap="square">
+            <a:spAutoFit/>
+          </a:bodyPr>
+          <a:lstStyle/>
+          <a:p>
+            <a:pPr algn="r">
+              <a:defRPr sz="1000" b="0">
+                <a:solidFill>
+                  <a:srgbClr val="666666"/>
+                </a:solidFill>
+                <a:latin typeface="Arial"/>
+              </a:defRPr>
+            </a:pPr>
+            <a:r>
+              <a:t>* הדשבורד כולל ניתוח עיכובים, מהירויות ממוצעות, קווי רכבת פעילים, והתפלגות מהירות אוטובוסים — כל הנתונים בזמן אמת</a:t>
+            </a:r>
+          </a:p>
+        </p:txBody>
+      </p:sp>
       <p:pic>
         <p:nvPicPr>
-          <p:cNvPr id="6" name="Picture 5" descr="kibana_realtime.png"/>
+          <p:cNvPr id="8" name="Picture 7" descr="cloud_trains.png"/>
           <p:cNvPicPr>
             <a:picLocks noChangeAspect="1"/>
           </p:cNvPicPr>
           <p:nvPr/>
         </p:nvPicPr>
         <p:blipFill>
-          <a:blip r:embed="rId2"/>
+          <a:blip r:embed="rId3"/>
           <a:stretch>
             <a:fillRect/>
           </a:stretch>
@@ -4950,42 +4987,6 @@
           </a:prstGeom>
         </p:spPr>
       </p:pic>
-      <p:sp>
-        <p:nvSpPr>
-          <p:cNvPr id="7" name="TextBox 6"/>
-          <p:cNvSpPr txBox="1"/>
-          <p:nvPr/>
-        </p:nvSpPr>
-        <p:spPr>
-          <a:xfrm>
-            <a:off x="274320" y="5943600"/>
-            <a:ext cx="11612880" cy="365760"/>
-          </a:xfrm>
-          <a:prstGeom prst="rect">
-            <a:avLst/>
-          </a:prstGeom>
-          <a:noFill/>
-        </p:spPr>
-        <p:txBody>
-          <a:bodyPr wrap="square">
-            <a:spAutoFit/>
-          </a:bodyPr>
-          <a:lstStyle/>
-          <a:p>
-            <a:pPr algn="r">
-              <a:defRPr sz="1000" b="0">
-                <a:solidFill>
-                  <a:srgbClr val="666666"/>
-                </a:solidFill>
-                <a:latin typeface="Arial"/>
-              </a:defRPr>
-            </a:pPr>
-            <a:r>
-              <a:t>* הדשבורד כולל ניתוח עיכובים, מהירויות ממוצעות, קווי רכבת פעילים, והתפלגות מהירות אוטובוסים — כל הנתונים בזמן אמת</a:t>
-            </a:r>
-          </a:p>
-        </p:txBody>
-      </p:sp>
     </p:spTree>
   </p:cSld>
   <p:clrMapOvr>
@@ -4997,14 +4998,6 @@
 <file path=ppt/slides/slide13.xml><?xml version="1.0" encoding="utf-8"?>
 <p:sld xmlns:a="http://schemas.openxmlformats.org/drawingml/2006/main" xmlns:p="http://schemas.openxmlformats.org/presentationml/2006/main" xmlns:r="http://schemas.openxmlformats.org/officeDocument/2006/relationships">
   <p:cSld>
-    <p:bg>
-      <p:bgPr>
-        <a:solidFill>
-          <a:srgbClr val="FFFFFF"/>
-        </a:solidFill>
-        <a:effectLst/>
-      </p:bgPr>
-    </p:bg>
     <p:spTree>
       <p:nvGrpSpPr>
         <p:cNvPr id="1" name=""/>
@@ -5086,7 +5079,7 @@
               </a:defRPr>
             </a:pPr>
             <a:r>
-              <a:t>המערכת בזמן אמת  📈</a:t>
+              <a:t>⚠️ דשבורד עיכובים והתראות — Elastic Cloud</a:t>
             </a:r>
           </a:p>
         </p:txBody>
@@ -5122,7 +5115,7 @@
               </a:defRPr>
             </a:pPr>
             <a:r>
-              <a:t>מספרים מתוך Elastic Cloud (managed)</a:t>
+              <a:t>Kibana on Elastic Cloud — Delays &amp; Alerts (by hour of day)</a:t>
             </a:r>
           </a:p>
         </p:txBody>
@@ -5158,53 +5151,8 @@
               </a:defRPr>
             </a:pPr>
             <a:r>
-              <a:t>10 / 15</a:t>
-            </a:r>
-          </a:p>
-        </p:txBody>
-      </p:sp>
-      <p:sp>
-        <p:nvSpPr>
-          <p:cNvPr id="6" name="Rounded Rectangle 5"/>
-          <p:cNvSpPr/>
-          <p:nvPr/>
-        </p:nvSpPr>
-        <p:spPr>
-          <a:xfrm>
-            <a:off x="274320" y="1371600"/>
-            <a:ext cx="1645920" cy="1097280"/>
-          </a:xfrm>
-          <a:prstGeom prst="roundRect">
-            <a:avLst/>
-          </a:prstGeom>
-          <a:solidFill>
-            <a:srgbClr val="F5F5F5"/>
-          </a:solidFill>
-          <a:ln w="12700">
-            <a:solidFill>
-              <a:srgbClr val="4DD0E1"/>
-            </a:solidFill>
-          </a:ln>
-        </p:spPr>
-        <p:style>
-          <a:lnRef idx="1">
-            <a:schemeClr val="accent1"/>
-          </a:lnRef>
-          <a:fillRef idx="3">
-            <a:schemeClr val="accent1"/>
-          </a:fillRef>
-          <a:effectRef idx="2">
-            <a:schemeClr val="accent1"/>
-          </a:effectRef>
-          <a:fontRef idx="minor">
-            <a:schemeClr val="lt1"/>
-          </a:fontRef>
-        </p:style>
-        <p:txBody>
-          <a:bodyPr rtlCol="0" anchor="ctr"/>
-          <a:lstStyle/>
-          <a:p>
-            <a:pPr algn="ctr"/>
+              <a:t>13 / 18</a:t>
+            </a:r>
           </a:p>
         </p:txBody>
       </p:sp>
@@ -5216,57 +5164,21 @@
         </p:nvSpPr>
         <p:spPr>
           <a:xfrm>
-            <a:off x="274320" y="1463040"/>
-            <a:ext cx="1645920" cy="457200"/>
-          </a:xfrm>
-          <a:prstGeom prst="rect">
-            <a:avLst/>
-          </a:prstGeom>
-          <a:noFill/>
-        </p:spPr>
-        <p:txBody>
-          <a:bodyPr wrap="square">
-            <a:spAutoFit/>
-          </a:bodyPr>
-          <a:lstStyle/>
-          <a:p>
-            <a:pPr algn="ctr">
-              <a:defRPr sz="2600" b="1">
-                <a:solidFill>
-                  <a:srgbClr val="007B83"/>
-                </a:solidFill>
-                <a:latin typeface="Arial"/>
-              </a:defRPr>
-            </a:pPr>
-            <a:r>
-              <a:t>2,917,758</a:t>
-            </a:r>
-          </a:p>
-        </p:txBody>
-      </p:sp>
-      <p:sp>
-        <p:nvSpPr>
-          <p:cNvPr id="8" name="TextBox 7"/>
-          <p:cNvSpPr txBox="1"/>
-          <p:nvPr/>
-        </p:nvSpPr>
-        <p:spPr>
-          <a:xfrm>
-            <a:off x="274320" y="1965960"/>
-            <a:ext cx="1645920" cy="457200"/>
-          </a:xfrm>
-          <a:prstGeom prst="rect">
-            <a:avLst/>
-          </a:prstGeom>
-          <a:noFill/>
-        </p:spPr>
-        <p:txBody>
-          <a:bodyPr wrap="square">
-            <a:spAutoFit/>
-          </a:bodyPr>
-          <a:lstStyle/>
-          <a:p>
-            <a:pPr algn="ctr">
+            <a:off x="274320" y="5943600"/>
+            <a:ext cx="11612880" cy="365760"/>
+          </a:xfrm>
+          <a:prstGeom prst="rect">
+            <a:avLst/>
+          </a:prstGeom>
+          <a:noFill/>
+        </p:spPr>
+        <p:txBody>
+          <a:bodyPr wrap="square">
+            <a:spAutoFit/>
+          </a:bodyPr>
+          <a:lstStyle/>
+          <a:p>
+            <a:pPr algn="r">
               <a:defRPr sz="1000" b="0">
                 <a:solidFill>
                   <a:srgbClr val="666666"/>
@@ -5275,1352 +5187,35 @@
               </a:defRPr>
             </a:pPr>
             <a:r>
-              <a:t>רשומות אוטובוס</a:t>
-            </a:r>
-          </a:p>
-        </p:txBody>
-      </p:sp>
-      <p:sp>
-        <p:nvSpPr>
-          <p:cNvPr id="9" name="Rounded Rectangle 8"/>
-          <p:cNvSpPr/>
-          <p:nvPr/>
-        </p:nvSpPr>
-        <p:spPr>
-          <a:xfrm>
-            <a:off x="2194560" y="1371600"/>
-            <a:ext cx="1645920" cy="1097280"/>
-          </a:xfrm>
-          <a:prstGeom prst="roundRect">
-            <a:avLst/>
-          </a:prstGeom>
-          <a:solidFill>
-            <a:srgbClr val="F5F5F5"/>
-          </a:solidFill>
-          <a:ln w="12700">
-            <a:solidFill>
-              <a:srgbClr val="4DD0E1"/>
-            </a:solidFill>
-          </a:ln>
-        </p:spPr>
-        <p:style>
-          <a:lnRef idx="1">
-            <a:schemeClr val="accent1"/>
-          </a:lnRef>
-          <a:fillRef idx="3">
-            <a:schemeClr val="accent1"/>
-          </a:fillRef>
-          <a:effectRef idx="2">
-            <a:schemeClr val="accent1"/>
-          </a:effectRef>
-          <a:fontRef idx="minor">
-            <a:schemeClr val="lt1"/>
-          </a:fontRef>
-        </p:style>
-        <p:txBody>
-          <a:bodyPr rtlCol="0" anchor="ctr"/>
-          <a:lstStyle/>
-          <a:p>
-            <a:pPr algn="ctr"/>
-          </a:p>
-        </p:txBody>
-      </p:sp>
-      <p:sp>
-        <p:nvSpPr>
-          <p:cNvPr id="10" name="TextBox 9"/>
-          <p:cNvSpPr txBox="1"/>
-          <p:nvPr/>
-        </p:nvSpPr>
-        <p:spPr>
-          <a:xfrm>
-            <a:off x="2194560" y="1463040"/>
-            <a:ext cx="1645920" cy="457200"/>
-          </a:xfrm>
-          <a:prstGeom prst="rect">
-            <a:avLst/>
-          </a:prstGeom>
-          <a:noFill/>
-        </p:spPr>
-        <p:txBody>
-          <a:bodyPr wrap="square">
-            <a:spAutoFit/>
-          </a:bodyPr>
-          <a:lstStyle/>
-          <a:p>
-            <a:pPr algn="ctr">
-              <a:defRPr sz="2600" b="1">
-                <a:solidFill>
-                  <a:srgbClr val="007B83"/>
-                </a:solidFill>
-                <a:latin typeface="Arial"/>
-              </a:defRPr>
-            </a:pPr>
-            <a:r>
-              <a:t>1,906,678</a:t>
-            </a:r>
-          </a:p>
-        </p:txBody>
-      </p:sp>
-      <p:sp>
-        <p:nvSpPr>
-          <p:cNvPr id="11" name="TextBox 10"/>
-          <p:cNvSpPr txBox="1"/>
-          <p:nvPr/>
-        </p:nvSpPr>
-        <p:spPr>
-          <a:xfrm>
-            <a:off x="2194560" y="1965960"/>
-            <a:ext cx="1645920" cy="457200"/>
-          </a:xfrm>
-          <a:prstGeom prst="rect">
-            <a:avLst/>
-          </a:prstGeom>
-          <a:noFill/>
-        </p:spPr>
-        <p:txBody>
-          <a:bodyPr wrap="square">
-            <a:spAutoFit/>
-          </a:bodyPr>
-          <a:lstStyle/>
-          <a:p>
-            <a:pPr algn="ctr">
-              <a:defRPr sz="1000" b="0">
-                <a:solidFill>
-                  <a:srgbClr val="666666"/>
-                </a:solidFill>
-                <a:latin typeface="Arial"/>
-              </a:defRPr>
-            </a:pPr>
-            <a:r>
-              <a:t>רשומות רכבת</a:t>
-            </a:r>
-          </a:p>
-        </p:txBody>
-      </p:sp>
-      <p:sp>
-        <p:nvSpPr>
-          <p:cNvPr id="12" name="Rounded Rectangle 11"/>
-          <p:cNvSpPr/>
-          <p:nvPr/>
-        </p:nvSpPr>
-        <p:spPr>
-          <a:xfrm>
-            <a:off x="4114800" y="1371600"/>
-            <a:ext cx="1645920" cy="1097280"/>
-          </a:xfrm>
-          <a:prstGeom prst="roundRect">
-            <a:avLst/>
-          </a:prstGeom>
-          <a:solidFill>
-            <a:srgbClr val="F5F5F5"/>
-          </a:solidFill>
-          <a:ln w="12700">
-            <a:solidFill>
-              <a:srgbClr val="4DD0E1"/>
-            </a:solidFill>
-          </a:ln>
-        </p:spPr>
-        <p:style>
-          <a:lnRef idx="1">
-            <a:schemeClr val="accent1"/>
-          </a:lnRef>
-          <a:fillRef idx="3">
-            <a:schemeClr val="accent1"/>
-          </a:fillRef>
-          <a:effectRef idx="2">
-            <a:schemeClr val="accent1"/>
-          </a:effectRef>
-          <a:fontRef idx="minor">
-            <a:schemeClr val="lt1"/>
-          </a:fontRef>
-        </p:style>
-        <p:txBody>
-          <a:bodyPr rtlCol="0" anchor="ctr"/>
-          <a:lstStyle/>
-          <a:p>
-            <a:pPr algn="ctr"/>
-          </a:p>
-        </p:txBody>
-      </p:sp>
-      <p:sp>
-        <p:nvSpPr>
-          <p:cNvPr id="13" name="TextBox 12"/>
-          <p:cNvSpPr txBox="1"/>
-          <p:nvPr/>
-        </p:nvSpPr>
-        <p:spPr>
-          <a:xfrm>
-            <a:off x="4114800" y="1463040"/>
-            <a:ext cx="1645920" cy="457200"/>
-          </a:xfrm>
-          <a:prstGeom prst="rect">
-            <a:avLst/>
-          </a:prstGeom>
-          <a:noFill/>
-        </p:spPr>
-        <p:txBody>
-          <a:bodyPr wrap="square">
-            <a:spAutoFit/>
-          </a:bodyPr>
-          <a:lstStyle/>
-          <a:p>
-            <a:pPr algn="ctr">
-              <a:defRPr sz="2600" b="1">
-                <a:solidFill>
-                  <a:srgbClr val="007B83"/>
-                </a:solidFill>
-                <a:latin typeface="Arial"/>
-              </a:defRPr>
-            </a:pPr>
-            <a:r>
-              <a:t>591,661</a:t>
-            </a:r>
-          </a:p>
-        </p:txBody>
-      </p:sp>
-      <p:sp>
-        <p:nvSpPr>
-          <p:cNvPr id="14" name="TextBox 13"/>
-          <p:cNvSpPr txBox="1"/>
-          <p:nvPr/>
-        </p:nvSpPr>
-        <p:spPr>
-          <a:xfrm>
-            <a:off x="4114800" y="1965960"/>
-            <a:ext cx="1645920" cy="457200"/>
-          </a:xfrm>
-          <a:prstGeom prst="rect">
-            <a:avLst/>
-          </a:prstGeom>
-          <a:noFill/>
-        </p:spPr>
-        <p:txBody>
-          <a:bodyPr wrap="square">
-            <a:spAutoFit/>
-          </a:bodyPr>
-          <a:lstStyle/>
-          <a:p>
-            <a:pPr algn="ctr">
-              <a:defRPr sz="1000" b="0">
-                <a:solidFill>
-                  <a:srgbClr val="666666"/>
-                </a:solidFill>
-                <a:latin typeface="Arial"/>
-              </a:defRPr>
-            </a:pPr>
-            <a:r>
-              <a:t>מקטעי תנועה</a:t>
-            </a:r>
-          </a:p>
-        </p:txBody>
-      </p:sp>
-      <p:sp>
-        <p:nvSpPr>
-          <p:cNvPr id="15" name="Rounded Rectangle 14"/>
-          <p:cNvSpPr/>
-          <p:nvPr/>
-        </p:nvSpPr>
-        <p:spPr>
-          <a:xfrm>
-            <a:off x="6035040" y="1371600"/>
-            <a:ext cx="1645920" cy="1097280"/>
-          </a:xfrm>
-          <a:prstGeom prst="roundRect">
-            <a:avLst/>
-          </a:prstGeom>
-          <a:solidFill>
-            <a:srgbClr val="F5F5F5"/>
-          </a:solidFill>
-          <a:ln w="12700">
-            <a:solidFill>
-              <a:srgbClr val="4DD0E1"/>
-            </a:solidFill>
-          </a:ln>
-        </p:spPr>
-        <p:style>
-          <a:lnRef idx="1">
-            <a:schemeClr val="accent1"/>
-          </a:lnRef>
-          <a:fillRef idx="3">
-            <a:schemeClr val="accent1"/>
-          </a:fillRef>
-          <a:effectRef idx="2">
-            <a:schemeClr val="accent1"/>
-          </a:effectRef>
-          <a:fontRef idx="minor">
-            <a:schemeClr val="lt1"/>
-          </a:fontRef>
-        </p:style>
-        <p:txBody>
-          <a:bodyPr rtlCol="0" anchor="ctr"/>
-          <a:lstStyle/>
-          <a:p>
-            <a:pPr algn="ctr"/>
-          </a:p>
-        </p:txBody>
-      </p:sp>
-      <p:sp>
-        <p:nvSpPr>
-          <p:cNvPr id="16" name="TextBox 15"/>
-          <p:cNvSpPr txBox="1"/>
-          <p:nvPr/>
-        </p:nvSpPr>
-        <p:spPr>
-          <a:xfrm>
-            <a:off x="6035040" y="1463040"/>
-            <a:ext cx="1645920" cy="457200"/>
-          </a:xfrm>
-          <a:prstGeom prst="rect">
-            <a:avLst/>
-          </a:prstGeom>
-          <a:noFill/>
-        </p:spPr>
-        <p:txBody>
-          <a:bodyPr wrap="square">
-            <a:spAutoFit/>
-          </a:bodyPr>
-          <a:lstStyle/>
-          <a:p>
-            <a:pPr algn="ctr">
-              <a:defRPr sz="2600" b="1">
-                <a:solidFill>
-                  <a:srgbClr val="007B83"/>
-                </a:solidFill>
-                <a:latin typeface="Arial"/>
-              </a:defRPr>
-            </a:pPr>
-            <a:r>
-              <a:t>1,629,934</a:t>
-            </a:r>
-          </a:p>
-        </p:txBody>
-      </p:sp>
-      <p:sp>
-        <p:nvSpPr>
-          <p:cNvPr id="17" name="TextBox 16"/>
-          <p:cNvSpPr txBox="1"/>
-          <p:nvPr/>
-        </p:nvSpPr>
-        <p:spPr>
-          <a:xfrm>
-            <a:off x="6035040" y="1965960"/>
-            <a:ext cx="1645920" cy="457200"/>
-          </a:xfrm>
-          <a:prstGeom prst="rect">
-            <a:avLst/>
-          </a:prstGeom>
-          <a:noFill/>
-        </p:spPr>
-        <p:txBody>
-          <a:bodyPr wrap="square">
-            <a:spAutoFit/>
-          </a:bodyPr>
-          <a:lstStyle/>
-          <a:p>
-            <a:pPr algn="ctr">
-              <a:defRPr sz="1000" b="0">
-                <a:solidFill>
-                  <a:srgbClr val="666666"/>
-                </a:solidFill>
-                <a:latin typeface="Arial"/>
-              </a:defRPr>
-            </a:pPr>
-            <a:r>
-              <a:t>התראות שירות</a:t>
-            </a:r>
-          </a:p>
-        </p:txBody>
-      </p:sp>
-      <p:sp>
-        <p:nvSpPr>
-          <p:cNvPr id="18" name="Rounded Rectangle 17"/>
-          <p:cNvSpPr/>
-          <p:nvPr/>
-        </p:nvSpPr>
-        <p:spPr>
-          <a:xfrm>
-            <a:off x="7955280" y="1371600"/>
-            <a:ext cx="1645920" cy="1097280"/>
-          </a:xfrm>
-          <a:prstGeom prst="roundRect">
-            <a:avLst/>
-          </a:prstGeom>
-          <a:solidFill>
-            <a:srgbClr val="F5F5F5"/>
-          </a:solidFill>
-          <a:ln w="12700">
-            <a:solidFill>
-              <a:srgbClr val="4DD0E1"/>
-            </a:solidFill>
-          </a:ln>
-        </p:spPr>
-        <p:style>
-          <a:lnRef idx="1">
-            <a:schemeClr val="accent1"/>
-          </a:lnRef>
-          <a:fillRef idx="3">
-            <a:schemeClr val="accent1"/>
-          </a:fillRef>
-          <a:effectRef idx="2">
-            <a:schemeClr val="accent1"/>
-          </a:effectRef>
-          <a:fontRef idx="minor">
-            <a:schemeClr val="lt1"/>
-          </a:fontRef>
-        </p:style>
-        <p:txBody>
-          <a:bodyPr rtlCol="0" anchor="ctr"/>
-          <a:lstStyle/>
-          <a:p>
-            <a:pPr algn="ctr"/>
-          </a:p>
-        </p:txBody>
-      </p:sp>
-      <p:sp>
-        <p:nvSpPr>
-          <p:cNvPr id="19" name="TextBox 18"/>
-          <p:cNvSpPr txBox="1"/>
-          <p:nvPr/>
-        </p:nvSpPr>
-        <p:spPr>
-          <a:xfrm>
-            <a:off x="7955280" y="1463040"/>
-            <a:ext cx="1645920" cy="457200"/>
-          </a:xfrm>
-          <a:prstGeom prst="rect">
-            <a:avLst/>
-          </a:prstGeom>
-          <a:noFill/>
-        </p:spPr>
-        <p:txBody>
-          <a:bodyPr wrap="square">
-            <a:spAutoFit/>
-          </a:bodyPr>
-          <a:lstStyle/>
-          <a:p>
-            <a:pPr algn="ctr">
-              <a:defRPr sz="2600" b="1">
-                <a:solidFill>
-                  <a:srgbClr val="007B83"/>
-                </a:solidFill>
-                <a:latin typeface="Arial"/>
-              </a:defRPr>
-            </a:pPr>
-            <a:r>
-              <a:t>7,046,031</a:t>
-            </a:r>
-          </a:p>
-        </p:txBody>
-      </p:sp>
-      <p:sp>
-        <p:nvSpPr>
-          <p:cNvPr id="20" name="TextBox 19"/>
-          <p:cNvSpPr txBox="1"/>
-          <p:nvPr/>
-        </p:nvSpPr>
-        <p:spPr>
-          <a:xfrm>
-            <a:off x="7955280" y="1965960"/>
-            <a:ext cx="1645920" cy="457200"/>
-          </a:xfrm>
-          <a:prstGeom prst="rect">
-            <a:avLst/>
-          </a:prstGeom>
-          <a:noFill/>
-        </p:spPr>
-        <p:txBody>
-          <a:bodyPr wrap="square">
-            <a:spAutoFit/>
-          </a:bodyPr>
-          <a:lstStyle/>
-          <a:p>
-            <a:pPr algn="ctr">
-              <a:defRPr sz="1000" b="0">
-                <a:solidFill>
-                  <a:srgbClr val="666666"/>
-                </a:solidFill>
-                <a:latin typeface="Arial"/>
-              </a:defRPr>
-            </a:pPr>
-            <a:r>
-              <a:t>סה״כ בענן</a:t>
-            </a:r>
-          </a:p>
-        </p:txBody>
-      </p:sp>
-      <p:sp>
-        <p:nvSpPr>
-          <p:cNvPr id="21" name="Rounded Rectangle 20"/>
-          <p:cNvSpPr/>
-          <p:nvPr/>
-        </p:nvSpPr>
-        <p:spPr>
-          <a:xfrm>
-            <a:off x="9875520" y="1371600"/>
-            <a:ext cx="1645920" cy="1097280"/>
-          </a:xfrm>
-          <a:prstGeom prst="roundRect">
-            <a:avLst/>
-          </a:prstGeom>
-          <a:solidFill>
-            <a:srgbClr val="F5F5F5"/>
-          </a:solidFill>
-          <a:ln w="12700">
-            <a:solidFill>
-              <a:srgbClr val="4DD0E1"/>
-            </a:solidFill>
-          </a:ln>
-        </p:spPr>
-        <p:style>
-          <a:lnRef idx="1">
-            <a:schemeClr val="accent1"/>
-          </a:lnRef>
-          <a:fillRef idx="3">
-            <a:schemeClr val="accent1"/>
-          </a:fillRef>
-          <a:effectRef idx="2">
-            <a:schemeClr val="accent1"/>
-          </a:effectRef>
-          <a:fontRef idx="minor">
-            <a:schemeClr val="lt1"/>
-          </a:fontRef>
-        </p:style>
-        <p:txBody>
-          <a:bodyPr rtlCol="0" anchor="ctr"/>
-          <a:lstStyle/>
-          <a:p>
-            <a:pPr algn="ctr"/>
-          </a:p>
-        </p:txBody>
-      </p:sp>
-      <p:sp>
-        <p:nvSpPr>
-          <p:cNvPr id="22" name="TextBox 21"/>
-          <p:cNvSpPr txBox="1"/>
-          <p:nvPr/>
-        </p:nvSpPr>
-        <p:spPr>
-          <a:xfrm>
-            <a:off x="9875520" y="1463040"/>
-            <a:ext cx="1645920" cy="457200"/>
-          </a:xfrm>
-          <a:prstGeom prst="rect">
-            <a:avLst/>
-          </a:prstGeom>
-          <a:noFill/>
-        </p:spPr>
-        <p:txBody>
-          <a:bodyPr wrap="square">
-            <a:spAutoFit/>
-          </a:bodyPr>
-          <a:lstStyle/>
-          <a:p>
-            <a:pPr algn="ctr">
-              <a:defRPr sz="2600" b="1">
-                <a:solidFill>
-                  <a:srgbClr val="007B83"/>
-                </a:solidFill>
-                <a:latin typeface="Arial"/>
-              </a:defRPr>
-            </a:pPr>
-            <a:r>
-              <a:t>4,600+</a:t>
-            </a:r>
-          </a:p>
-        </p:txBody>
-      </p:sp>
-      <p:sp>
-        <p:nvSpPr>
-          <p:cNvPr id="23" name="TextBox 22"/>
-          <p:cNvSpPr txBox="1"/>
-          <p:nvPr/>
-        </p:nvSpPr>
-        <p:spPr>
-          <a:xfrm>
-            <a:off x="9875520" y="1965960"/>
-            <a:ext cx="1645920" cy="457200"/>
-          </a:xfrm>
-          <a:prstGeom prst="rect">
-            <a:avLst/>
-          </a:prstGeom>
-          <a:noFill/>
-        </p:spPr>
-        <p:txBody>
-          <a:bodyPr wrap="square">
-            <a:spAutoFit/>
-          </a:bodyPr>
-          <a:lstStyle/>
-          <a:p>
-            <a:pPr algn="ctr">
-              <a:defRPr sz="1000" b="0">
-                <a:solidFill>
-                  <a:srgbClr val="666666"/>
-                </a:solidFill>
-                <a:latin typeface="Arial"/>
-              </a:defRPr>
-            </a:pPr>
-            <a:r>
-              <a:t>קבצים ב-MinIO</a:t>
-            </a:r>
-          </a:p>
-        </p:txBody>
-      </p:sp>
-      <p:sp>
-        <p:nvSpPr>
-          <p:cNvPr id="24" name="Rounded Rectangle 23"/>
-          <p:cNvSpPr/>
-          <p:nvPr/>
-        </p:nvSpPr>
-        <p:spPr>
-          <a:xfrm>
-            <a:off x="274320" y="2926080"/>
-            <a:ext cx="11430000" cy="1371600"/>
-          </a:xfrm>
-          <a:prstGeom prst="roundRect">
-            <a:avLst/>
-          </a:prstGeom>
-          <a:solidFill>
-            <a:srgbClr val="E0F7FA"/>
-          </a:solidFill>
-          <a:ln w="12700">
-            <a:solidFill>
-              <a:srgbClr val="4DD0E1"/>
-            </a:solidFill>
-          </a:ln>
-        </p:spPr>
-        <p:style>
-          <a:lnRef idx="1">
-            <a:schemeClr val="accent1"/>
-          </a:lnRef>
-          <a:fillRef idx="3">
-            <a:schemeClr val="accent1"/>
-          </a:fillRef>
-          <a:effectRef idx="2">
-            <a:schemeClr val="accent1"/>
-          </a:effectRef>
-          <a:fontRef idx="minor">
-            <a:schemeClr val="lt1"/>
-          </a:fontRef>
-        </p:style>
-        <p:txBody>
-          <a:bodyPr rtlCol="0" anchor="ctr"/>
-          <a:lstStyle/>
-          <a:p>
-            <a:pPr algn="ctr"/>
-          </a:p>
-        </p:txBody>
-      </p:sp>
-      <p:sp>
-        <p:nvSpPr>
-          <p:cNvPr id="25" name="TextBox 24"/>
-          <p:cNvSpPr txBox="1"/>
-          <p:nvPr/>
-        </p:nvSpPr>
-        <p:spPr>
-          <a:xfrm>
-            <a:off x="457200" y="3017520"/>
-            <a:ext cx="10972800" cy="320040"/>
-          </a:xfrm>
-          <a:prstGeom prst="rect">
-            <a:avLst/>
-          </a:prstGeom>
-          <a:noFill/>
-        </p:spPr>
-        <p:txBody>
-          <a:bodyPr wrap="square">
-            <a:spAutoFit/>
-          </a:bodyPr>
-          <a:lstStyle/>
-          <a:p>
-            <a:pPr algn="r">
-              <a:defRPr sz="1400" b="1">
-                <a:solidFill>
-                  <a:srgbClr val="007B83"/>
-                </a:solidFill>
-                <a:latin typeface="Arial"/>
-              </a:defRPr>
-            </a:pPr>
-            <a:r>
-              <a:t>📦 נתונים שמולאו בבאקפיל (Stride API)</a:t>
-            </a:r>
-          </a:p>
-        </p:txBody>
-      </p:sp>
-      <p:sp>
-        <p:nvSpPr>
-          <p:cNvPr id="26" name="TextBox 25"/>
-          <p:cNvSpPr txBox="1"/>
-          <p:nvPr/>
-        </p:nvSpPr>
-        <p:spPr>
-          <a:xfrm>
-            <a:off x="731520" y="3429000"/>
-            <a:ext cx="2286000" cy="365760"/>
-          </a:xfrm>
-          <a:prstGeom prst="rect">
-            <a:avLst/>
-          </a:prstGeom>
-          <a:noFill/>
-        </p:spPr>
-        <p:txBody>
-          <a:bodyPr wrap="square">
-            <a:spAutoFit/>
-          </a:bodyPr>
-          <a:lstStyle/>
-          <a:p>
-            <a:pPr algn="ctr">
-              <a:defRPr sz="2200" b="1">
-                <a:solidFill>
-                  <a:srgbClr val="009BA4"/>
-                </a:solidFill>
-                <a:latin typeface="Arial"/>
-              </a:defRPr>
-            </a:pPr>
-            <a:r>
-              <a:t>156,000</a:t>
-            </a:r>
-          </a:p>
-        </p:txBody>
-      </p:sp>
-      <p:sp>
-        <p:nvSpPr>
-          <p:cNvPr id="27" name="TextBox 26"/>
-          <p:cNvSpPr txBox="1"/>
-          <p:nvPr/>
-        </p:nvSpPr>
-        <p:spPr>
-          <a:xfrm>
-            <a:off x="731520" y="3794760"/>
-            <a:ext cx="2286000" cy="274320"/>
-          </a:xfrm>
-          <a:prstGeom prst="rect">
-            <a:avLst/>
-          </a:prstGeom>
-          <a:noFill/>
-        </p:spPr>
-        <p:txBody>
-          <a:bodyPr wrap="square">
-            <a:spAutoFit/>
-          </a:bodyPr>
-          <a:lstStyle/>
-          <a:p>
-            <a:pPr algn="ctr">
-              <a:defRPr sz="1100" b="0">
-                <a:solidFill>
-                  <a:srgbClr val="666666"/>
-                </a:solidFill>
-                <a:latin typeface="Arial"/>
-              </a:defRPr>
-            </a:pPr>
-            <a:r>
-              <a:t>אוטובוסים</a:t>
-            </a:r>
-          </a:p>
-        </p:txBody>
-      </p:sp>
-      <p:sp>
-        <p:nvSpPr>
-          <p:cNvPr id="28" name="TextBox 27"/>
-          <p:cNvSpPr txBox="1"/>
-          <p:nvPr/>
-        </p:nvSpPr>
-        <p:spPr>
-          <a:xfrm>
-            <a:off x="3474720" y="3429000"/>
-            <a:ext cx="2286000" cy="365760"/>
-          </a:xfrm>
-          <a:prstGeom prst="rect">
-            <a:avLst/>
-          </a:prstGeom>
-          <a:noFill/>
-        </p:spPr>
-        <p:txBody>
-          <a:bodyPr wrap="square">
-            <a:spAutoFit/>
-          </a:bodyPr>
-          <a:lstStyle/>
-          <a:p>
-            <a:pPr algn="ctr">
-              <a:defRPr sz="2200" b="1">
-                <a:solidFill>
-                  <a:srgbClr val="009BA4"/>
-                </a:solidFill>
-                <a:latin typeface="Arial"/>
-              </a:defRPr>
-            </a:pPr>
-            <a:r>
-              <a:t>58,804</a:t>
-            </a:r>
-          </a:p>
-        </p:txBody>
-      </p:sp>
-      <p:sp>
-        <p:nvSpPr>
-          <p:cNvPr id="29" name="TextBox 28"/>
-          <p:cNvSpPr txBox="1"/>
-          <p:nvPr/>
-        </p:nvSpPr>
-        <p:spPr>
-          <a:xfrm>
-            <a:off x="3474720" y="3794760"/>
-            <a:ext cx="2286000" cy="274320"/>
-          </a:xfrm>
-          <a:prstGeom prst="rect">
-            <a:avLst/>
-          </a:prstGeom>
-          <a:noFill/>
-        </p:spPr>
-        <p:txBody>
-          <a:bodyPr wrap="square">
-            <a:spAutoFit/>
-          </a:bodyPr>
-          <a:lstStyle/>
-          <a:p>
-            <a:pPr algn="ctr">
-              <a:defRPr sz="1100" b="0">
-                <a:solidFill>
-                  <a:srgbClr val="666666"/>
-                </a:solidFill>
-                <a:latin typeface="Arial"/>
-              </a:defRPr>
-            </a:pPr>
-            <a:r>
-              <a:t>נסיעות</a:t>
-            </a:r>
-          </a:p>
-        </p:txBody>
-      </p:sp>
-      <p:sp>
-        <p:nvSpPr>
-          <p:cNvPr id="30" name="TextBox 29"/>
-          <p:cNvSpPr txBox="1"/>
-          <p:nvPr/>
-        </p:nvSpPr>
-        <p:spPr>
-          <a:xfrm>
-            <a:off x="6217920" y="3429000"/>
-            <a:ext cx="2286000" cy="365760"/>
-          </a:xfrm>
-          <a:prstGeom prst="rect">
-            <a:avLst/>
-          </a:prstGeom>
-          <a:noFill/>
-        </p:spPr>
-        <p:txBody>
-          <a:bodyPr wrap="square">
-            <a:spAutoFit/>
-          </a:bodyPr>
-          <a:lstStyle/>
-          <a:p>
-            <a:pPr algn="ctr">
-              <a:defRPr sz="2200" b="1">
-                <a:solidFill>
-                  <a:srgbClr val="009BA4"/>
-                </a:solidFill>
-                <a:latin typeface="Arial"/>
-              </a:defRPr>
-            </a:pPr>
-            <a:r>
-              <a:t>13</a:t>
-            </a:r>
-          </a:p>
-        </p:txBody>
-      </p:sp>
-      <p:sp>
-        <p:nvSpPr>
-          <p:cNvPr id="31" name="TextBox 30"/>
-          <p:cNvSpPr txBox="1"/>
-          <p:nvPr/>
-        </p:nvSpPr>
-        <p:spPr>
-          <a:xfrm>
-            <a:off x="6217920" y="3794760"/>
-            <a:ext cx="2286000" cy="274320"/>
-          </a:xfrm>
-          <a:prstGeom prst="rect">
-            <a:avLst/>
-          </a:prstGeom>
-          <a:noFill/>
-        </p:spPr>
-        <p:txBody>
-          <a:bodyPr wrap="square">
-            <a:spAutoFit/>
-          </a:bodyPr>
-          <a:lstStyle/>
-          <a:p>
-            <a:pPr algn="ctr">
-              <a:defRPr sz="1100" b="0">
-                <a:solidFill>
-                  <a:srgbClr val="666666"/>
-                </a:solidFill>
-                <a:latin typeface="Arial"/>
-              </a:defRPr>
-            </a:pPr>
-            <a:r>
-              <a:t>ימים חסרים</a:t>
-            </a:r>
-          </a:p>
-        </p:txBody>
-      </p:sp>
-      <p:sp>
-        <p:nvSpPr>
-          <p:cNvPr id="32" name="TextBox 31"/>
-          <p:cNvSpPr txBox="1"/>
-          <p:nvPr/>
-        </p:nvSpPr>
-        <p:spPr>
-          <a:xfrm>
-            <a:off x="8961120" y="3429000"/>
-            <a:ext cx="2286000" cy="365760"/>
-          </a:xfrm>
-          <a:prstGeom prst="rect">
-            <a:avLst/>
-          </a:prstGeom>
-          <a:noFill/>
-        </p:spPr>
-        <p:txBody>
-          <a:bodyPr wrap="square">
-            <a:spAutoFit/>
-          </a:bodyPr>
-          <a:lstStyle/>
-          <a:p>
-            <a:pPr algn="ctr">
-              <a:defRPr sz="2200" b="1">
-                <a:solidFill>
-                  <a:srgbClr val="009BA4"/>
-                </a:solidFill>
-                <a:latin typeface="Arial"/>
-              </a:defRPr>
-            </a:pPr>
-            <a:r>
-              <a:t>38+</a:t>
-            </a:r>
-          </a:p>
-        </p:txBody>
-      </p:sp>
-      <p:sp>
-        <p:nvSpPr>
-          <p:cNvPr id="33" name="TextBox 32"/>
-          <p:cNvSpPr txBox="1"/>
-          <p:nvPr/>
-        </p:nvSpPr>
-        <p:spPr>
-          <a:xfrm>
-            <a:off x="8961120" y="3794760"/>
-            <a:ext cx="2286000" cy="274320"/>
-          </a:xfrm>
-          <a:prstGeom prst="rect">
-            <a:avLst/>
-          </a:prstGeom>
-          <a:noFill/>
-        </p:spPr>
-        <p:txBody>
-          <a:bodyPr wrap="square">
-            <a:spAutoFit/>
-          </a:bodyPr>
-          <a:lstStyle/>
-          <a:p>
-            <a:pPr algn="ctr">
-              <a:defRPr sz="1100" b="0">
-                <a:solidFill>
-                  <a:srgbClr val="666666"/>
-                </a:solidFill>
-                <a:latin typeface="Arial"/>
-              </a:defRPr>
-            </a:pPr>
-            <a:r>
-              <a:t>ימים עם נתונים</a:t>
-            </a:r>
-          </a:p>
-        </p:txBody>
-      </p:sp>
-      <p:sp>
-        <p:nvSpPr>
-          <p:cNvPr id="34" name="TextBox 33"/>
-          <p:cNvSpPr txBox="1"/>
-          <p:nvPr/>
-        </p:nvSpPr>
-        <p:spPr>
-          <a:xfrm>
-            <a:off x="457200" y="4754880"/>
-            <a:ext cx="10972800" cy="274320"/>
-          </a:xfrm>
-          <a:prstGeom prst="rect">
-            <a:avLst/>
-          </a:prstGeom>
-          <a:noFill/>
-        </p:spPr>
-        <p:txBody>
-          <a:bodyPr wrap="square">
-            <a:spAutoFit/>
-          </a:bodyPr>
-          <a:lstStyle/>
-          <a:p>
-            <a:pPr algn="r">
-              <a:defRPr sz="1300" b="1">
-                <a:solidFill>
-                  <a:srgbClr val="333333"/>
-                </a:solidFill>
-                <a:latin typeface="Arial"/>
-              </a:defRPr>
-            </a:pPr>
-            <a:r>
-              <a:t>🟢 קווים פעילים עכשיו (velocity &gt; 0):</a:t>
-            </a:r>
-          </a:p>
-        </p:txBody>
-      </p:sp>
-      <p:sp>
-        <p:nvSpPr>
-          <p:cNvPr id="35" name="Rounded Rectangle 34"/>
-          <p:cNvSpPr/>
-          <p:nvPr/>
-        </p:nvSpPr>
-        <p:spPr>
-          <a:xfrm>
-            <a:off x="914400" y="5120640"/>
-            <a:ext cx="1645920" cy="1097280"/>
-          </a:xfrm>
-          <a:prstGeom prst="roundRect">
-            <a:avLst/>
-          </a:prstGeom>
-          <a:solidFill>
-            <a:srgbClr val="F5F5F5"/>
-          </a:solidFill>
-          <a:ln w="12700">
-            <a:solidFill>
-              <a:srgbClr val="4DD0E1"/>
-            </a:solidFill>
-          </a:ln>
-        </p:spPr>
-        <p:style>
-          <a:lnRef idx="1">
-            <a:schemeClr val="accent1"/>
-          </a:lnRef>
-          <a:fillRef idx="3">
-            <a:schemeClr val="accent1"/>
-          </a:fillRef>
-          <a:effectRef idx="2">
-            <a:schemeClr val="accent1"/>
-          </a:effectRef>
-          <a:fontRef idx="minor">
-            <a:schemeClr val="lt1"/>
-          </a:fontRef>
-        </p:style>
-        <p:txBody>
-          <a:bodyPr rtlCol="0" anchor="ctr"/>
-          <a:lstStyle/>
-          <a:p>
-            <a:pPr algn="ctr"/>
-          </a:p>
-        </p:txBody>
-      </p:sp>
-      <p:sp>
-        <p:nvSpPr>
-          <p:cNvPr id="36" name="TextBox 35"/>
-          <p:cNvSpPr txBox="1"/>
-          <p:nvPr/>
-        </p:nvSpPr>
-        <p:spPr>
-          <a:xfrm>
-            <a:off x="914400" y="5212080"/>
-            <a:ext cx="1645920" cy="457200"/>
-          </a:xfrm>
-          <a:prstGeom prst="rect">
-            <a:avLst/>
-          </a:prstGeom>
-          <a:noFill/>
-        </p:spPr>
-        <p:txBody>
-          <a:bodyPr wrap="square">
-            <a:spAutoFit/>
-          </a:bodyPr>
-          <a:lstStyle/>
-          <a:p>
-            <a:pPr algn="ctr">
-              <a:defRPr sz="2600" b="1">
-                <a:solidFill>
-                  <a:srgbClr val="FF8F00"/>
-                </a:solidFill>
-                <a:latin typeface="Arial"/>
-              </a:defRPr>
-            </a:pPr>
-            <a:r>
-              <a:t>23</a:t>
-            </a:r>
-          </a:p>
-        </p:txBody>
-      </p:sp>
-      <p:sp>
-        <p:nvSpPr>
-          <p:cNvPr id="37" name="TextBox 36"/>
-          <p:cNvSpPr txBox="1"/>
-          <p:nvPr/>
-        </p:nvSpPr>
-        <p:spPr>
-          <a:xfrm>
-            <a:off x="914400" y="5715000"/>
-            <a:ext cx="1645920" cy="457200"/>
-          </a:xfrm>
-          <a:prstGeom prst="rect">
-            <a:avLst/>
-          </a:prstGeom>
-          <a:noFill/>
-        </p:spPr>
-        <p:txBody>
-          <a:bodyPr wrap="square">
-            <a:spAutoFit/>
-          </a:bodyPr>
-          <a:lstStyle/>
-          <a:p>
-            <a:pPr algn="ctr">
-              <a:defRPr sz="1000" b="0">
-                <a:solidFill>
-                  <a:srgbClr val="666666"/>
-                </a:solidFill>
-                <a:latin typeface="Arial"/>
-              </a:defRPr>
-            </a:pPr>
-            <a:r>
-              <a:t>קווי דן</a:t>
-            </a:r>
-          </a:p>
-        </p:txBody>
-      </p:sp>
-      <p:sp>
-        <p:nvSpPr>
-          <p:cNvPr id="38" name="Rounded Rectangle 37"/>
-          <p:cNvSpPr/>
-          <p:nvPr/>
-        </p:nvSpPr>
-        <p:spPr>
-          <a:xfrm>
-            <a:off x="4114800" y="5120640"/>
-            <a:ext cx="1645920" cy="1097280"/>
-          </a:xfrm>
-          <a:prstGeom prst="roundRect">
-            <a:avLst/>
-          </a:prstGeom>
-          <a:solidFill>
-            <a:srgbClr val="F5F5F5"/>
-          </a:solidFill>
-          <a:ln w="12700">
-            <a:solidFill>
-              <a:srgbClr val="4DD0E1"/>
-            </a:solidFill>
-          </a:ln>
-        </p:spPr>
-        <p:style>
-          <a:lnRef idx="1">
-            <a:schemeClr val="accent1"/>
-          </a:lnRef>
-          <a:fillRef idx="3">
-            <a:schemeClr val="accent1"/>
-          </a:fillRef>
-          <a:effectRef idx="2">
-            <a:schemeClr val="accent1"/>
-          </a:effectRef>
-          <a:fontRef idx="minor">
-            <a:schemeClr val="lt1"/>
-          </a:fontRef>
-        </p:style>
-        <p:txBody>
-          <a:bodyPr rtlCol="0" anchor="ctr"/>
-          <a:lstStyle/>
-          <a:p>
-            <a:pPr algn="ctr"/>
-          </a:p>
-        </p:txBody>
-      </p:sp>
-      <p:sp>
-        <p:nvSpPr>
-          <p:cNvPr id="39" name="TextBox 38"/>
-          <p:cNvSpPr txBox="1"/>
-          <p:nvPr/>
-        </p:nvSpPr>
-        <p:spPr>
-          <a:xfrm>
-            <a:off x="4114800" y="5212080"/>
-            <a:ext cx="1645920" cy="457200"/>
-          </a:xfrm>
-          <a:prstGeom prst="rect">
-            <a:avLst/>
-          </a:prstGeom>
-          <a:noFill/>
-        </p:spPr>
-        <p:txBody>
-          <a:bodyPr wrap="square">
-            <a:spAutoFit/>
-          </a:bodyPr>
-          <a:lstStyle/>
-          <a:p>
-            <a:pPr algn="ctr">
-              <a:defRPr sz="2600" b="1">
-                <a:solidFill>
-                  <a:srgbClr val="FF8F00"/>
-                </a:solidFill>
-                <a:latin typeface="Arial"/>
-              </a:defRPr>
-            </a:pPr>
-            <a:r>
-              <a:t>30</a:t>
-            </a:r>
-          </a:p>
-        </p:txBody>
-      </p:sp>
-      <p:sp>
-        <p:nvSpPr>
-          <p:cNvPr id="40" name="TextBox 39"/>
-          <p:cNvSpPr txBox="1"/>
-          <p:nvPr/>
-        </p:nvSpPr>
-        <p:spPr>
-          <a:xfrm>
-            <a:off x="4114800" y="5715000"/>
-            <a:ext cx="1645920" cy="457200"/>
-          </a:xfrm>
-          <a:prstGeom prst="rect">
-            <a:avLst/>
-          </a:prstGeom>
-          <a:noFill/>
-        </p:spPr>
-        <p:txBody>
-          <a:bodyPr wrap="square">
-            <a:spAutoFit/>
-          </a:bodyPr>
-          <a:lstStyle/>
-          <a:p>
-            <a:pPr algn="ctr">
-              <a:defRPr sz="1000" b="0">
-                <a:solidFill>
-                  <a:srgbClr val="666666"/>
-                </a:solidFill>
-                <a:latin typeface="Arial"/>
-              </a:defRPr>
-            </a:pPr>
-            <a:r>
-              <a:t>קווי אגד</a:t>
-            </a:r>
-          </a:p>
-        </p:txBody>
-      </p:sp>
-      <p:sp>
-        <p:nvSpPr>
-          <p:cNvPr id="41" name="Rounded Rectangle 40"/>
-          <p:cNvSpPr/>
-          <p:nvPr/>
-        </p:nvSpPr>
-        <p:spPr>
-          <a:xfrm>
-            <a:off x="7315200" y="5120640"/>
-            <a:ext cx="1645920" cy="1097280"/>
-          </a:xfrm>
-          <a:prstGeom prst="roundRect">
-            <a:avLst/>
-          </a:prstGeom>
-          <a:solidFill>
-            <a:srgbClr val="F5F5F5"/>
-          </a:solidFill>
-          <a:ln w="12700">
-            <a:solidFill>
-              <a:srgbClr val="4DD0E1"/>
-            </a:solidFill>
-          </a:ln>
-        </p:spPr>
-        <p:style>
-          <a:lnRef idx="1">
-            <a:schemeClr val="accent1"/>
-          </a:lnRef>
-          <a:fillRef idx="3">
-            <a:schemeClr val="accent1"/>
-          </a:fillRef>
-          <a:effectRef idx="2">
-            <a:schemeClr val="accent1"/>
-          </a:effectRef>
-          <a:fontRef idx="minor">
-            <a:schemeClr val="lt1"/>
-          </a:fontRef>
-        </p:style>
-        <p:txBody>
-          <a:bodyPr rtlCol="0" anchor="ctr"/>
-          <a:lstStyle/>
-          <a:p>
-            <a:pPr algn="ctr"/>
-          </a:p>
-        </p:txBody>
-      </p:sp>
-      <p:sp>
-        <p:nvSpPr>
-          <p:cNvPr id="42" name="TextBox 41"/>
-          <p:cNvSpPr txBox="1"/>
-          <p:nvPr/>
-        </p:nvSpPr>
-        <p:spPr>
-          <a:xfrm>
-            <a:off x="7315200" y="5212080"/>
-            <a:ext cx="1645920" cy="457200"/>
-          </a:xfrm>
-          <a:prstGeom prst="rect">
-            <a:avLst/>
-          </a:prstGeom>
-          <a:noFill/>
-        </p:spPr>
-        <p:txBody>
-          <a:bodyPr wrap="square">
-            <a:spAutoFit/>
-          </a:bodyPr>
-          <a:lstStyle/>
-          <a:p>
-            <a:pPr algn="ctr">
-              <a:defRPr sz="2600" b="1">
-                <a:solidFill>
-                  <a:srgbClr val="FF8F00"/>
-                </a:solidFill>
-                <a:latin typeface="Arial"/>
-              </a:defRPr>
-            </a:pPr>
-            <a:r>
-              <a:t>15</a:t>
-            </a:r>
-          </a:p>
-        </p:txBody>
-      </p:sp>
-      <p:sp>
-        <p:nvSpPr>
-          <p:cNvPr id="43" name="TextBox 42"/>
-          <p:cNvSpPr txBox="1"/>
-          <p:nvPr/>
-        </p:nvSpPr>
-        <p:spPr>
-          <a:xfrm>
-            <a:off x="7315200" y="5715000"/>
-            <a:ext cx="1645920" cy="457200"/>
-          </a:xfrm>
-          <a:prstGeom prst="rect">
-            <a:avLst/>
-          </a:prstGeom>
-          <a:noFill/>
-        </p:spPr>
-        <p:txBody>
-          <a:bodyPr wrap="square">
-            <a:spAutoFit/>
-          </a:bodyPr>
-          <a:lstStyle/>
-          <a:p>
-            <a:pPr algn="ctr">
-              <a:defRPr sz="1000" b="0">
-                <a:solidFill>
-                  <a:srgbClr val="666666"/>
-                </a:solidFill>
-                <a:latin typeface="Arial"/>
-              </a:defRPr>
-            </a:pPr>
-            <a:r>
-              <a:t>קווי סופרבוס</a:t>
-            </a:r>
-          </a:p>
-        </p:txBody>
-      </p:sp>
+              <a:t>* הדשבורד כולל ניתוח עיכובים, מהירויות ממוצעות, קווי רכבת פעילים, והתפלגות מהירות אוטובוסים — כל הנתונים בזמן אמת</a:t>
+            </a:r>
+          </a:p>
+        </p:txBody>
+      </p:sp>
+      <p:pic>
+        <p:nvPicPr>
+          <p:cNvPr id="8" name="Picture 7" descr="cloud_delays.png"/>
+          <p:cNvPicPr>
+            <a:picLocks noChangeAspect="1"/>
+          </p:cNvPicPr>
+          <p:nvPr/>
+        </p:nvPicPr>
+        <p:blipFill>
+          <a:blip r:embed="rId2"/>
+          <a:stretch>
+            <a:fillRect/>
+          </a:stretch>
+        </p:blipFill>
+        <p:spPr>
+          <a:xfrm>
+            <a:off x="137160" y="1097280"/>
+            <a:ext cx="11887200" cy="5394960"/>
+          </a:xfrm>
+          <a:prstGeom prst="rect">
+            <a:avLst/>
+          </a:prstGeom>
+        </p:spPr>
+      </p:pic>
     </p:spTree>
   </p:cSld>
   <p:clrMapOvr>
@@ -6721,7 +5316,7 @@
               </a:defRPr>
             </a:pPr>
             <a:r>
-              <a:t>Tech Stack</a:t>
+              <a:t>המערכת בזמן אמת  📈</a:t>
             </a:r>
           </a:p>
         </p:txBody>
@@ -6757,7 +5352,7 @@
               </a:defRPr>
             </a:pPr>
             <a:r>
-              <a:t>כל הטכנולוגיות שבשימוש</a:t>
+              <a:t>מספרים מתוך Elastic Cloud (managed)</a:t>
             </a:r>
           </a:p>
         </p:txBody>
@@ -6793,7 +5388,7 @@
               </a:defRPr>
             </a:pPr>
             <a:r>
-              <a:t>11 / 15</a:t>
+              <a:t>10 / 15</a:t>
             </a:r>
           </a:p>
         </p:txBody>
@@ -6806,8 +5401,8 @@
         </p:nvSpPr>
         <p:spPr>
           <a:xfrm>
-            <a:off x="137160" y="1280160"/>
-            <a:ext cx="1828800" cy="4572000"/>
+            <a:off x="274320" y="1371600"/>
+            <a:ext cx="1645920" cy="1097280"/>
           </a:xfrm>
           <a:prstGeom prst="roundRect">
             <a:avLst/>
@@ -6851,8 +5446,8 @@
         </p:nvSpPr>
         <p:spPr>
           <a:xfrm>
-            <a:off x="137160" y="1371600"/>
-            <a:ext cx="1828800" cy="365760"/>
+            <a:off x="274320" y="1463040"/>
+            <a:ext cx="1645920" cy="457200"/>
           </a:xfrm>
           <a:prstGeom prst="rect">
             <a:avLst/>
@@ -6866,7 +5461,7 @@
           <a:lstStyle/>
           <a:p>
             <a:pPr algn="ctr">
-              <a:defRPr sz="1400" b="1">
+              <a:defRPr sz="2600" b="1">
                 <a:solidFill>
                   <a:srgbClr val="007B83"/>
                 </a:solidFill>
@@ -6874,7 +5469,7 @@
               </a:defRPr>
             </a:pPr>
             <a:r>
-              <a:t>Backend</a:t>
+              <a:t>2,917,758</a:t>
             </a:r>
           </a:p>
         </p:txBody>
@@ -6887,8 +5482,8 @@
         </p:nvSpPr>
         <p:spPr>
           <a:xfrm>
-            <a:off x="228600" y="1783080"/>
-            <a:ext cx="1645920" cy="3931920"/>
+            <a:off x="274320" y="1965960"/>
+            <a:ext cx="1645920" cy="457200"/>
           </a:xfrm>
           <a:prstGeom prst="rect">
             <a:avLst/>
@@ -6902,35 +5497,15 @@
           <a:lstStyle/>
           <a:p>
             <a:pPr algn="ctr">
-              <a:defRPr sz="1100" b="0">
-                <a:solidFill>
-                  <a:srgbClr val="333333"/>
-                </a:solidFill>
-                <a:latin typeface="Arial"/>
-              </a:defRPr>
-            </a:pPr>
-            <a:r>
-              <a:t>Python 3.12</a:t>
-            </a:r>
-            <a:br/>
-            <a:r>
-              <a:t>Flask (HTTP server)</a:t>
-            </a:r>
-            <a:br/>
-            <a:r>
-              <a:t>asyncio + threading</a:t>
-            </a:r>
-            <a:br/>
-            <a:r>
-              <a:t>boto3 (S3/MinIO)</a:t>
-            </a:r>
-            <a:br/>
-            <a:r>
-              <a:t>elasticsearch-py</a:t>
-            </a:r>
-            <a:br/>
-            <a:r>
-              <a:t>kafka-python</a:t>
+              <a:defRPr sz="1000" b="0">
+                <a:solidFill>
+                  <a:srgbClr val="666666"/>
+                </a:solidFill>
+                <a:latin typeface="Arial"/>
+              </a:defRPr>
+            </a:pPr>
+            <a:r>
+              <a:t>רשומות אוטובוס</a:t>
             </a:r>
           </a:p>
         </p:txBody>
@@ -6943,8 +5518,8 @@
         </p:nvSpPr>
         <p:spPr>
           <a:xfrm>
-            <a:off x="2148840" y="1280160"/>
-            <a:ext cx="1828800" cy="4572000"/>
+            <a:off x="2194560" y="1371600"/>
+            <a:ext cx="1645920" cy="1097280"/>
           </a:xfrm>
           <a:prstGeom prst="roundRect">
             <a:avLst/>
@@ -6988,8 +5563,8 @@
         </p:nvSpPr>
         <p:spPr>
           <a:xfrm>
-            <a:off x="2148840" y="1371600"/>
-            <a:ext cx="1828800" cy="365760"/>
+            <a:off x="2194560" y="1463040"/>
+            <a:ext cx="1645920" cy="457200"/>
           </a:xfrm>
           <a:prstGeom prst="rect">
             <a:avLst/>
@@ -7003,7 +5578,7 @@
           <a:lstStyle/>
           <a:p>
             <a:pPr algn="ctr">
-              <a:defRPr sz="1400" b="1">
+              <a:defRPr sz="2600" b="1">
                 <a:solidFill>
                   <a:srgbClr val="007B83"/>
                 </a:solidFill>
@@ -7011,7 +5586,7 @@
               </a:defRPr>
             </a:pPr>
             <a:r>
-              <a:t>Big Data</a:t>
+              <a:t>1,906,678</a:t>
             </a:r>
           </a:p>
         </p:txBody>
@@ -7024,8 +5599,8 @@
         </p:nvSpPr>
         <p:spPr>
           <a:xfrm>
-            <a:off x="2240280" y="1783080"/>
-            <a:ext cx="1645920" cy="3931920"/>
+            <a:off x="2194560" y="1965960"/>
+            <a:ext cx="1645920" cy="457200"/>
           </a:xfrm>
           <a:prstGeom prst="rect">
             <a:avLst/>
@@ -7039,31 +5614,15 @@
           <a:lstStyle/>
           <a:p>
             <a:pPr algn="ctr">
-              <a:defRPr sz="1100" b="0">
-                <a:solidFill>
-                  <a:srgbClr val="333333"/>
-                </a:solidFill>
-                <a:latin typeface="Arial"/>
-              </a:defRPr>
-            </a:pPr>
-            <a:r>
-              <a:t>Apache Kafka 7.5</a:t>
-            </a:r>
-            <a:br/>
-            <a:r>
-              <a:t>Apache Airflow 2.7</a:t>
-            </a:r>
-            <a:br/>
-            <a:r>
-              <a:t>Elasticsearch (Elastic Cloud)</a:t>
-            </a:r>
-            <a:br/>
-            <a:r>
-              <a:t>MinIO (S3-compatible)</a:t>
-            </a:r>
-            <a:br/>
-            <a:r>
-              <a:t>Apache Zookeeper</a:t>
+              <a:defRPr sz="1000" b="0">
+                <a:solidFill>
+                  <a:srgbClr val="666666"/>
+                </a:solidFill>
+                <a:latin typeface="Arial"/>
+              </a:defRPr>
+            </a:pPr>
+            <a:r>
+              <a:t>רשומות רכבת</a:t>
             </a:r>
           </a:p>
         </p:txBody>
@@ -7076,8 +5635,8 @@
         </p:nvSpPr>
         <p:spPr>
           <a:xfrm>
-            <a:off x="4160520" y="1280160"/>
-            <a:ext cx="1828800" cy="4572000"/>
+            <a:off x="4114800" y="1371600"/>
+            <a:ext cx="1645920" cy="1097280"/>
           </a:xfrm>
           <a:prstGeom prst="roundRect">
             <a:avLst/>
@@ -7121,8 +5680,8 @@
         </p:nvSpPr>
         <p:spPr>
           <a:xfrm>
-            <a:off x="4160520" y="1371600"/>
-            <a:ext cx="1828800" cy="365760"/>
+            <a:off x="4114800" y="1463040"/>
+            <a:ext cx="1645920" cy="457200"/>
           </a:xfrm>
           <a:prstGeom prst="rect">
             <a:avLst/>
@@ -7136,7 +5695,7 @@
           <a:lstStyle/>
           <a:p>
             <a:pPr algn="ctr">
-              <a:defRPr sz="1400" b="1">
+              <a:defRPr sz="2600" b="1">
                 <a:solidFill>
                   <a:srgbClr val="007B83"/>
                 </a:solidFill>
@@ -7144,7 +5703,7 @@
               </a:defRPr>
             </a:pPr>
             <a:r>
-              <a:t>Database</a:t>
+              <a:t>591,661</a:t>
             </a:r>
           </a:p>
         </p:txBody>
@@ -7157,8 +5716,8 @@
         </p:nvSpPr>
         <p:spPr>
           <a:xfrm>
-            <a:off x="4251960" y="1783080"/>
-            <a:ext cx="1645920" cy="3931920"/>
+            <a:off x="4114800" y="1965960"/>
+            <a:ext cx="1645920" cy="457200"/>
           </a:xfrm>
           <a:prstGeom prst="rect">
             <a:avLst/>
@@ -7172,27 +5731,15 @@
           <a:lstStyle/>
           <a:p>
             <a:pPr algn="ctr">
-              <a:defRPr sz="1100" b="0">
-                <a:solidFill>
-                  <a:srgbClr val="333333"/>
-                </a:solidFill>
-                <a:latin typeface="Arial"/>
-              </a:defRPr>
-            </a:pPr>
-            <a:r>
-              <a:t>PostgreSQL 13</a:t>
-            </a:r>
-            <a:br/>
-            <a:r>
-              <a:t>psycopg2</a:t>
-            </a:r>
-            <a:br/>
-            <a:r>
-              <a:t>SQL (GTFS schema)</a:t>
-            </a:r>
-            <a:br/>
-            <a:r>
-              <a:t>Hive-style partitions</a:t>
+              <a:defRPr sz="1000" b="0">
+                <a:solidFill>
+                  <a:srgbClr val="666666"/>
+                </a:solidFill>
+                <a:latin typeface="Arial"/>
+              </a:defRPr>
+            </a:pPr>
+            <a:r>
+              <a:t>מקטעי תנועה</a:t>
             </a:r>
           </a:p>
         </p:txBody>
@@ -7205,8 +5752,8 @@
         </p:nvSpPr>
         <p:spPr>
           <a:xfrm>
-            <a:off x="6172200" y="1280160"/>
-            <a:ext cx="1828800" cy="4572000"/>
+            <a:off x="6035040" y="1371600"/>
+            <a:ext cx="1645920" cy="1097280"/>
           </a:xfrm>
           <a:prstGeom prst="roundRect">
             <a:avLst/>
@@ -7250,8 +5797,8 @@
         </p:nvSpPr>
         <p:spPr>
           <a:xfrm>
-            <a:off x="6172200" y="1371600"/>
-            <a:ext cx="1828800" cy="365760"/>
+            <a:off x="6035040" y="1463040"/>
+            <a:ext cx="1645920" cy="457200"/>
           </a:xfrm>
           <a:prstGeom prst="rect">
             <a:avLst/>
@@ -7265,7 +5812,7 @@
           <a:lstStyle/>
           <a:p>
             <a:pPr algn="ctr">
-              <a:defRPr sz="1400" b="1">
+              <a:defRPr sz="2600" b="1">
                 <a:solidFill>
                   <a:srgbClr val="007B83"/>
                 </a:solidFill>
@@ -7273,7 +5820,7 @@
               </a:defRPr>
             </a:pPr>
             <a:r>
-              <a:t>Frontend</a:t>
+              <a:t>1,629,934</a:t>
             </a:r>
           </a:p>
         </p:txBody>
@@ -7286,8 +5833,8 @@
         </p:nvSpPr>
         <p:spPr>
           <a:xfrm>
-            <a:off x="6263640" y="1783080"/>
-            <a:ext cx="1645920" cy="3931920"/>
+            <a:off x="6035040" y="1965960"/>
+            <a:ext cx="1645920" cy="457200"/>
           </a:xfrm>
           <a:prstGeom prst="rect">
             <a:avLst/>
@@ -7301,31 +5848,15 @@
           <a:lstStyle/>
           <a:p>
             <a:pPr algn="ctr">
-              <a:defRPr sz="1100" b="0">
-                <a:solidFill>
-                  <a:srgbClr val="333333"/>
-                </a:solidFill>
-                <a:latin typeface="Arial"/>
-              </a:defRPr>
-            </a:pPr>
-            <a:r>
-              <a:t>HTML5 + JavaScript ES6+</a:t>
-            </a:r>
-            <a:br/>
-            <a:r>
-              <a:t>Leaflet (maps)</a:t>
-            </a:r>
-            <a:br/>
-            <a:r>
-              <a:t>Kibana 8.8</a:t>
-            </a:r>
-            <a:br/>
-            <a:r>
-              <a:t>Hebrew RTL UI</a:t>
-            </a:r>
-            <a:br/>
-            <a:r>
-              <a:t>PWA + Service Worker</a:t>
+              <a:defRPr sz="1000" b="0">
+                <a:solidFill>
+                  <a:srgbClr val="666666"/>
+                </a:solidFill>
+                <a:latin typeface="Arial"/>
+              </a:defRPr>
+            </a:pPr>
+            <a:r>
+              <a:t>התראות שירות</a:t>
             </a:r>
           </a:p>
         </p:txBody>
@@ -7338,8 +5869,8 @@
         </p:nvSpPr>
         <p:spPr>
           <a:xfrm>
-            <a:off x="8183880" y="1280160"/>
-            <a:ext cx="1828800" cy="4572000"/>
+            <a:off x="7955280" y="1371600"/>
+            <a:ext cx="1645920" cy="1097280"/>
           </a:xfrm>
           <a:prstGeom prst="roundRect">
             <a:avLst/>
@@ -7383,8 +5914,8 @@
         </p:nvSpPr>
         <p:spPr>
           <a:xfrm>
-            <a:off x="8183880" y="1371600"/>
-            <a:ext cx="1828800" cy="365760"/>
+            <a:off x="7955280" y="1463040"/>
+            <a:ext cx="1645920" cy="457200"/>
           </a:xfrm>
           <a:prstGeom prst="rect">
             <a:avLst/>
@@ -7398,7 +5929,7 @@
           <a:lstStyle/>
           <a:p>
             <a:pPr algn="ctr">
-              <a:defRPr sz="1400" b="1">
+              <a:defRPr sz="2600" b="1">
                 <a:solidFill>
                   <a:srgbClr val="007B83"/>
                 </a:solidFill>
@@ -7406,7 +5937,7 @@
               </a:defRPr>
             </a:pPr>
             <a:r>
-              <a:t>DevOps</a:t>
+              <a:t>7,046,031</a:t>
             </a:r>
           </a:p>
         </p:txBody>
@@ -7419,8 +5950,8 @@
         </p:nvSpPr>
         <p:spPr>
           <a:xfrm>
-            <a:off x="8275320" y="1783080"/>
-            <a:ext cx="1645920" cy="3931920"/>
+            <a:off x="7955280" y="1965960"/>
+            <a:ext cx="1645920" cy="457200"/>
           </a:xfrm>
           <a:prstGeom prst="rect">
             <a:avLst/>
@@ -7434,31 +5965,15 @@
           <a:lstStyle/>
           <a:p>
             <a:pPr algn="ctr">
-              <a:defRPr sz="1100" b="0">
-                <a:solidFill>
-                  <a:srgbClr val="333333"/>
-                </a:solidFill>
-                <a:latin typeface="Arial"/>
-              </a:defRPr>
-            </a:pPr>
-            <a:r>
-              <a:t>Docker + Docker Compose</a:t>
-            </a:r>
-            <a:br/>
-            <a:r>
-              <a:t>Linux VM (Hyper-V)</a:t>
-            </a:r>
-            <a:br/>
-            <a:r>
-              <a:t>Bash automation</a:t>
-            </a:r>
-            <a:br/>
-            <a:r>
-              <a:t>Cron pipelines</a:t>
-            </a:r>
-            <a:br/>
-            <a:r>
-              <a:t>ngrok tunneling</a:t>
+              <a:defRPr sz="1000" b="0">
+                <a:solidFill>
+                  <a:srgbClr val="666666"/>
+                </a:solidFill>
+                <a:latin typeface="Arial"/>
+              </a:defRPr>
+            </a:pPr>
+            <a:r>
+              <a:t>סה״כ בענן</a:t>
             </a:r>
           </a:p>
         </p:txBody>
@@ -7471,8 +5986,8 @@
         </p:nvSpPr>
         <p:spPr>
           <a:xfrm>
-            <a:off x="10195560" y="1280160"/>
-            <a:ext cx="1828800" cy="4572000"/>
+            <a:off x="9875520" y="1371600"/>
+            <a:ext cx="1645920" cy="1097280"/>
           </a:xfrm>
           <a:prstGeom prst="roundRect">
             <a:avLst/>
@@ -7516,8 +6031,8 @@
         </p:nvSpPr>
         <p:spPr>
           <a:xfrm>
-            <a:off x="10195560" y="1371600"/>
-            <a:ext cx="1828800" cy="365760"/>
+            <a:off x="9875520" y="1463040"/>
+            <a:ext cx="1645920" cy="457200"/>
           </a:xfrm>
           <a:prstGeom prst="rect">
             <a:avLst/>
@@ -7531,6 +6046,123 @@
           <a:lstStyle/>
           <a:p>
             <a:pPr algn="ctr">
+              <a:defRPr sz="2600" b="1">
+                <a:solidFill>
+                  <a:srgbClr val="007B83"/>
+                </a:solidFill>
+                <a:latin typeface="Arial"/>
+              </a:defRPr>
+            </a:pPr>
+            <a:r>
+              <a:t>4,600+</a:t>
+            </a:r>
+          </a:p>
+        </p:txBody>
+      </p:sp>
+      <p:sp>
+        <p:nvSpPr>
+          <p:cNvPr id="23" name="TextBox 22"/>
+          <p:cNvSpPr txBox="1"/>
+          <p:nvPr/>
+        </p:nvSpPr>
+        <p:spPr>
+          <a:xfrm>
+            <a:off x="9875520" y="1965960"/>
+            <a:ext cx="1645920" cy="457200"/>
+          </a:xfrm>
+          <a:prstGeom prst="rect">
+            <a:avLst/>
+          </a:prstGeom>
+          <a:noFill/>
+        </p:spPr>
+        <p:txBody>
+          <a:bodyPr wrap="square">
+            <a:spAutoFit/>
+          </a:bodyPr>
+          <a:lstStyle/>
+          <a:p>
+            <a:pPr algn="ctr">
+              <a:defRPr sz="1000" b="0">
+                <a:solidFill>
+                  <a:srgbClr val="666666"/>
+                </a:solidFill>
+                <a:latin typeface="Arial"/>
+              </a:defRPr>
+            </a:pPr>
+            <a:r>
+              <a:t>קבצים ב-MinIO</a:t>
+            </a:r>
+          </a:p>
+        </p:txBody>
+      </p:sp>
+      <p:sp>
+        <p:nvSpPr>
+          <p:cNvPr id="24" name="Rounded Rectangle 23"/>
+          <p:cNvSpPr/>
+          <p:nvPr/>
+        </p:nvSpPr>
+        <p:spPr>
+          <a:xfrm>
+            <a:off x="274320" y="2926080"/>
+            <a:ext cx="11430000" cy="1371600"/>
+          </a:xfrm>
+          <a:prstGeom prst="roundRect">
+            <a:avLst/>
+          </a:prstGeom>
+          <a:solidFill>
+            <a:srgbClr val="E0F7FA"/>
+          </a:solidFill>
+          <a:ln w="12700">
+            <a:solidFill>
+              <a:srgbClr val="4DD0E1"/>
+            </a:solidFill>
+          </a:ln>
+        </p:spPr>
+        <p:style>
+          <a:lnRef idx="1">
+            <a:schemeClr val="accent1"/>
+          </a:lnRef>
+          <a:fillRef idx="3">
+            <a:schemeClr val="accent1"/>
+          </a:fillRef>
+          <a:effectRef idx="2">
+            <a:schemeClr val="accent1"/>
+          </a:effectRef>
+          <a:fontRef idx="minor">
+            <a:schemeClr val="lt1"/>
+          </a:fontRef>
+        </p:style>
+        <p:txBody>
+          <a:bodyPr rtlCol="0" anchor="ctr"/>
+          <a:lstStyle/>
+          <a:p>
+            <a:pPr algn="ctr"/>
+          </a:p>
+        </p:txBody>
+      </p:sp>
+      <p:sp>
+        <p:nvSpPr>
+          <p:cNvPr id="25" name="TextBox 24"/>
+          <p:cNvSpPr txBox="1"/>
+          <p:nvPr/>
+        </p:nvSpPr>
+        <p:spPr>
+          <a:xfrm>
+            <a:off x="457200" y="3017520"/>
+            <a:ext cx="10972800" cy="320040"/>
+          </a:xfrm>
+          <a:prstGeom prst="rect">
+            <a:avLst/>
+          </a:prstGeom>
+          <a:noFill/>
+        </p:spPr>
+        <p:txBody>
+          <a:bodyPr wrap="square">
+            <a:spAutoFit/>
+          </a:bodyPr>
+          <a:lstStyle/>
+          <a:p>
+            <a:pPr algn="r">
               <a:defRPr sz="1400" b="1">
                 <a:solidFill>
                   <a:srgbClr val="007B83"/>
@@ -7539,21 +6171,57 @@
               </a:defRPr>
             </a:pPr>
             <a:r>
-              <a:t>AI &amp; APIs</a:t>
-            </a:r>
-          </a:p>
-        </p:txBody>
-      </p:sp>
-      <p:sp>
-        <p:nvSpPr>
-          <p:cNvPr id="23" name="TextBox 22"/>
-          <p:cNvSpPr txBox="1"/>
-          <p:nvPr/>
-        </p:nvSpPr>
-        <p:spPr>
-          <a:xfrm>
-            <a:off x="10287000" y="1783080"/>
-            <a:ext cx="1645920" cy="3931920"/>
+              <a:t>📦 נתונים שמולאו בבאקפיל (Stride API)</a:t>
+            </a:r>
+          </a:p>
+        </p:txBody>
+      </p:sp>
+      <p:sp>
+        <p:nvSpPr>
+          <p:cNvPr id="26" name="TextBox 25"/>
+          <p:cNvSpPr txBox="1"/>
+          <p:nvPr/>
+        </p:nvSpPr>
+        <p:spPr>
+          <a:xfrm>
+            <a:off x="731520" y="3429000"/>
+            <a:ext cx="2286000" cy="365760"/>
+          </a:xfrm>
+          <a:prstGeom prst="rect">
+            <a:avLst/>
+          </a:prstGeom>
+          <a:noFill/>
+        </p:spPr>
+        <p:txBody>
+          <a:bodyPr wrap="square">
+            <a:spAutoFit/>
+          </a:bodyPr>
+          <a:lstStyle/>
+          <a:p>
+            <a:pPr algn="ctr">
+              <a:defRPr sz="2200" b="1">
+                <a:solidFill>
+                  <a:srgbClr val="009BA4"/>
+                </a:solidFill>
+                <a:latin typeface="Arial"/>
+              </a:defRPr>
+            </a:pPr>
+            <a:r>
+              <a:t>156,000</a:t>
+            </a:r>
+          </a:p>
+        </p:txBody>
+      </p:sp>
+      <p:sp>
+        <p:nvSpPr>
+          <p:cNvPr id="27" name="TextBox 26"/>
+          <p:cNvSpPr txBox="1"/>
+          <p:nvPr/>
+        </p:nvSpPr>
+        <p:spPr>
+          <a:xfrm>
+            <a:off x="731520" y="3794760"/>
+            <a:ext cx="2286000" cy="274320"/>
           </a:xfrm>
           <a:prstGeom prst="rect">
             <a:avLst/>
@@ -7569,25 +6237,616 @@
             <a:pPr algn="ctr">
               <a:defRPr sz="1100" b="0">
                 <a:solidFill>
+                  <a:srgbClr val="666666"/>
+                </a:solidFill>
+                <a:latin typeface="Arial"/>
+              </a:defRPr>
+            </a:pPr>
+            <a:r>
+              <a:t>אוטובוסים</a:t>
+            </a:r>
+          </a:p>
+        </p:txBody>
+      </p:sp>
+      <p:sp>
+        <p:nvSpPr>
+          <p:cNvPr id="28" name="TextBox 27"/>
+          <p:cNvSpPr txBox="1"/>
+          <p:nvPr/>
+        </p:nvSpPr>
+        <p:spPr>
+          <a:xfrm>
+            <a:off x="3474720" y="3429000"/>
+            <a:ext cx="2286000" cy="365760"/>
+          </a:xfrm>
+          <a:prstGeom prst="rect">
+            <a:avLst/>
+          </a:prstGeom>
+          <a:noFill/>
+        </p:spPr>
+        <p:txBody>
+          <a:bodyPr wrap="square">
+            <a:spAutoFit/>
+          </a:bodyPr>
+          <a:lstStyle/>
+          <a:p>
+            <a:pPr algn="ctr">
+              <a:defRPr sz="2200" b="1">
+                <a:solidFill>
+                  <a:srgbClr val="009BA4"/>
+                </a:solidFill>
+                <a:latin typeface="Arial"/>
+              </a:defRPr>
+            </a:pPr>
+            <a:r>
+              <a:t>58,804</a:t>
+            </a:r>
+          </a:p>
+        </p:txBody>
+      </p:sp>
+      <p:sp>
+        <p:nvSpPr>
+          <p:cNvPr id="29" name="TextBox 28"/>
+          <p:cNvSpPr txBox="1"/>
+          <p:nvPr/>
+        </p:nvSpPr>
+        <p:spPr>
+          <a:xfrm>
+            <a:off x="3474720" y="3794760"/>
+            <a:ext cx="2286000" cy="274320"/>
+          </a:xfrm>
+          <a:prstGeom prst="rect">
+            <a:avLst/>
+          </a:prstGeom>
+          <a:noFill/>
+        </p:spPr>
+        <p:txBody>
+          <a:bodyPr wrap="square">
+            <a:spAutoFit/>
+          </a:bodyPr>
+          <a:lstStyle/>
+          <a:p>
+            <a:pPr algn="ctr">
+              <a:defRPr sz="1100" b="0">
+                <a:solidFill>
+                  <a:srgbClr val="666666"/>
+                </a:solidFill>
+                <a:latin typeface="Arial"/>
+              </a:defRPr>
+            </a:pPr>
+            <a:r>
+              <a:t>נסיעות</a:t>
+            </a:r>
+          </a:p>
+        </p:txBody>
+      </p:sp>
+      <p:sp>
+        <p:nvSpPr>
+          <p:cNvPr id="30" name="TextBox 29"/>
+          <p:cNvSpPr txBox="1"/>
+          <p:nvPr/>
+        </p:nvSpPr>
+        <p:spPr>
+          <a:xfrm>
+            <a:off x="6217920" y="3429000"/>
+            <a:ext cx="2286000" cy="365760"/>
+          </a:xfrm>
+          <a:prstGeom prst="rect">
+            <a:avLst/>
+          </a:prstGeom>
+          <a:noFill/>
+        </p:spPr>
+        <p:txBody>
+          <a:bodyPr wrap="square">
+            <a:spAutoFit/>
+          </a:bodyPr>
+          <a:lstStyle/>
+          <a:p>
+            <a:pPr algn="ctr">
+              <a:defRPr sz="2200" b="1">
+                <a:solidFill>
+                  <a:srgbClr val="009BA4"/>
+                </a:solidFill>
+                <a:latin typeface="Arial"/>
+              </a:defRPr>
+            </a:pPr>
+            <a:r>
+              <a:t>13</a:t>
+            </a:r>
+          </a:p>
+        </p:txBody>
+      </p:sp>
+      <p:sp>
+        <p:nvSpPr>
+          <p:cNvPr id="31" name="TextBox 30"/>
+          <p:cNvSpPr txBox="1"/>
+          <p:nvPr/>
+        </p:nvSpPr>
+        <p:spPr>
+          <a:xfrm>
+            <a:off x="6217920" y="3794760"/>
+            <a:ext cx="2286000" cy="274320"/>
+          </a:xfrm>
+          <a:prstGeom prst="rect">
+            <a:avLst/>
+          </a:prstGeom>
+          <a:noFill/>
+        </p:spPr>
+        <p:txBody>
+          <a:bodyPr wrap="square">
+            <a:spAutoFit/>
+          </a:bodyPr>
+          <a:lstStyle/>
+          <a:p>
+            <a:pPr algn="ctr">
+              <a:defRPr sz="1100" b="0">
+                <a:solidFill>
+                  <a:srgbClr val="666666"/>
+                </a:solidFill>
+                <a:latin typeface="Arial"/>
+              </a:defRPr>
+            </a:pPr>
+            <a:r>
+              <a:t>ימים חסרים</a:t>
+            </a:r>
+          </a:p>
+        </p:txBody>
+      </p:sp>
+      <p:sp>
+        <p:nvSpPr>
+          <p:cNvPr id="32" name="TextBox 31"/>
+          <p:cNvSpPr txBox="1"/>
+          <p:nvPr/>
+        </p:nvSpPr>
+        <p:spPr>
+          <a:xfrm>
+            <a:off x="8961120" y="3429000"/>
+            <a:ext cx="2286000" cy="365760"/>
+          </a:xfrm>
+          <a:prstGeom prst="rect">
+            <a:avLst/>
+          </a:prstGeom>
+          <a:noFill/>
+        </p:spPr>
+        <p:txBody>
+          <a:bodyPr wrap="square">
+            <a:spAutoFit/>
+          </a:bodyPr>
+          <a:lstStyle/>
+          <a:p>
+            <a:pPr algn="ctr">
+              <a:defRPr sz="2200" b="1">
+                <a:solidFill>
+                  <a:srgbClr val="009BA4"/>
+                </a:solidFill>
+                <a:latin typeface="Arial"/>
+              </a:defRPr>
+            </a:pPr>
+            <a:r>
+              <a:t>38+</a:t>
+            </a:r>
+          </a:p>
+        </p:txBody>
+      </p:sp>
+      <p:sp>
+        <p:nvSpPr>
+          <p:cNvPr id="33" name="TextBox 32"/>
+          <p:cNvSpPr txBox="1"/>
+          <p:nvPr/>
+        </p:nvSpPr>
+        <p:spPr>
+          <a:xfrm>
+            <a:off x="8961120" y="3794760"/>
+            <a:ext cx="2286000" cy="274320"/>
+          </a:xfrm>
+          <a:prstGeom prst="rect">
+            <a:avLst/>
+          </a:prstGeom>
+          <a:noFill/>
+        </p:spPr>
+        <p:txBody>
+          <a:bodyPr wrap="square">
+            <a:spAutoFit/>
+          </a:bodyPr>
+          <a:lstStyle/>
+          <a:p>
+            <a:pPr algn="ctr">
+              <a:defRPr sz="1100" b="0">
+                <a:solidFill>
+                  <a:srgbClr val="666666"/>
+                </a:solidFill>
+                <a:latin typeface="Arial"/>
+              </a:defRPr>
+            </a:pPr>
+            <a:r>
+              <a:t>ימים עם נתונים</a:t>
+            </a:r>
+          </a:p>
+        </p:txBody>
+      </p:sp>
+      <p:sp>
+        <p:nvSpPr>
+          <p:cNvPr id="34" name="TextBox 33"/>
+          <p:cNvSpPr txBox="1"/>
+          <p:nvPr/>
+        </p:nvSpPr>
+        <p:spPr>
+          <a:xfrm>
+            <a:off x="457200" y="4754880"/>
+            <a:ext cx="10972800" cy="274320"/>
+          </a:xfrm>
+          <a:prstGeom prst="rect">
+            <a:avLst/>
+          </a:prstGeom>
+          <a:noFill/>
+        </p:spPr>
+        <p:txBody>
+          <a:bodyPr wrap="square">
+            <a:spAutoFit/>
+          </a:bodyPr>
+          <a:lstStyle/>
+          <a:p>
+            <a:pPr algn="r">
+              <a:defRPr sz="1300" b="1">
+                <a:solidFill>
                   <a:srgbClr val="333333"/>
                 </a:solidFill>
                 <a:latin typeface="Arial"/>
               </a:defRPr>
             </a:pPr>
             <a:r>
-              <a:t>Google Gemini API</a:t>
-            </a:r>
-            <a:br/>
-            <a:r>
-              <a:t>Stride GTFS API</a:t>
-            </a:r>
-            <a:br/>
-            <a:r>
-              <a:t>HERE Traffic v7</a:t>
-            </a:r>
-            <a:br/>
-            <a:r>
-              <a:t>Nominatim geocoding</a:t>
+              <a:t>🟢 קווים פעילים עכשיו (velocity &gt; 0):</a:t>
+            </a:r>
+          </a:p>
+        </p:txBody>
+      </p:sp>
+      <p:sp>
+        <p:nvSpPr>
+          <p:cNvPr id="35" name="Rounded Rectangle 34"/>
+          <p:cNvSpPr/>
+          <p:nvPr/>
+        </p:nvSpPr>
+        <p:spPr>
+          <a:xfrm>
+            <a:off x="914400" y="5120640"/>
+            <a:ext cx="1645920" cy="1097280"/>
+          </a:xfrm>
+          <a:prstGeom prst="roundRect">
+            <a:avLst/>
+          </a:prstGeom>
+          <a:solidFill>
+            <a:srgbClr val="F5F5F5"/>
+          </a:solidFill>
+          <a:ln w="12700">
+            <a:solidFill>
+              <a:srgbClr val="4DD0E1"/>
+            </a:solidFill>
+          </a:ln>
+        </p:spPr>
+        <p:style>
+          <a:lnRef idx="1">
+            <a:schemeClr val="accent1"/>
+          </a:lnRef>
+          <a:fillRef idx="3">
+            <a:schemeClr val="accent1"/>
+          </a:fillRef>
+          <a:effectRef idx="2">
+            <a:schemeClr val="accent1"/>
+          </a:effectRef>
+          <a:fontRef idx="minor">
+            <a:schemeClr val="lt1"/>
+          </a:fontRef>
+        </p:style>
+        <p:txBody>
+          <a:bodyPr rtlCol="0" anchor="ctr"/>
+          <a:lstStyle/>
+          <a:p>
+            <a:pPr algn="ctr"/>
+          </a:p>
+        </p:txBody>
+      </p:sp>
+      <p:sp>
+        <p:nvSpPr>
+          <p:cNvPr id="36" name="TextBox 35"/>
+          <p:cNvSpPr txBox="1"/>
+          <p:nvPr/>
+        </p:nvSpPr>
+        <p:spPr>
+          <a:xfrm>
+            <a:off x="914400" y="5212080"/>
+            <a:ext cx="1645920" cy="457200"/>
+          </a:xfrm>
+          <a:prstGeom prst="rect">
+            <a:avLst/>
+          </a:prstGeom>
+          <a:noFill/>
+        </p:spPr>
+        <p:txBody>
+          <a:bodyPr wrap="square">
+            <a:spAutoFit/>
+          </a:bodyPr>
+          <a:lstStyle/>
+          <a:p>
+            <a:pPr algn="ctr">
+              <a:defRPr sz="2600" b="1">
+                <a:solidFill>
+                  <a:srgbClr val="FF8F00"/>
+                </a:solidFill>
+                <a:latin typeface="Arial"/>
+              </a:defRPr>
+            </a:pPr>
+            <a:r>
+              <a:t>23</a:t>
+            </a:r>
+          </a:p>
+        </p:txBody>
+      </p:sp>
+      <p:sp>
+        <p:nvSpPr>
+          <p:cNvPr id="37" name="TextBox 36"/>
+          <p:cNvSpPr txBox="1"/>
+          <p:nvPr/>
+        </p:nvSpPr>
+        <p:spPr>
+          <a:xfrm>
+            <a:off x="914400" y="5715000"/>
+            <a:ext cx="1645920" cy="457200"/>
+          </a:xfrm>
+          <a:prstGeom prst="rect">
+            <a:avLst/>
+          </a:prstGeom>
+          <a:noFill/>
+        </p:spPr>
+        <p:txBody>
+          <a:bodyPr wrap="square">
+            <a:spAutoFit/>
+          </a:bodyPr>
+          <a:lstStyle/>
+          <a:p>
+            <a:pPr algn="ctr">
+              <a:defRPr sz="1000" b="0">
+                <a:solidFill>
+                  <a:srgbClr val="666666"/>
+                </a:solidFill>
+                <a:latin typeface="Arial"/>
+              </a:defRPr>
+            </a:pPr>
+            <a:r>
+              <a:t>קווי דן</a:t>
+            </a:r>
+          </a:p>
+        </p:txBody>
+      </p:sp>
+      <p:sp>
+        <p:nvSpPr>
+          <p:cNvPr id="38" name="Rounded Rectangle 37"/>
+          <p:cNvSpPr/>
+          <p:nvPr/>
+        </p:nvSpPr>
+        <p:spPr>
+          <a:xfrm>
+            <a:off x="4114800" y="5120640"/>
+            <a:ext cx="1645920" cy="1097280"/>
+          </a:xfrm>
+          <a:prstGeom prst="roundRect">
+            <a:avLst/>
+          </a:prstGeom>
+          <a:solidFill>
+            <a:srgbClr val="F5F5F5"/>
+          </a:solidFill>
+          <a:ln w="12700">
+            <a:solidFill>
+              <a:srgbClr val="4DD0E1"/>
+            </a:solidFill>
+          </a:ln>
+        </p:spPr>
+        <p:style>
+          <a:lnRef idx="1">
+            <a:schemeClr val="accent1"/>
+          </a:lnRef>
+          <a:fillRef idx="3">
+            <a:schemeClr val="accent1"/>
+          </a:fillRef>
+          <a:effectRef idx="2">
+            <a:schemeClr val="accent1"/>
+          </a:effectRef>
+          <a:fontRef idx="minor">
+            <a:schemeClr val="lt1"/>
+          </a:fontRef>
+        </p:style>
+        <p:txBody>
+          <a:bodyPr rtlCol="0" anchor="ctr"/>
+          <a:lstStyle/>
+          <a:p>
+            <a:pPr algn="ctr"/>
+          </a:p>
+        </p:txBody>
+      </p:sp>
+      <p:sp>
+        <p:nvSpPr>
+          <p:cNvPr id="39" name="TextBox 38"/>
+          <p:cNvSpPr txBox="1"/>
+          <p:nvPr/>
+        </p:nvSpPr>
+        <p:spPr>
+          <a:xfrm>
+            <a:off x="4114800" y="5212080"/>
+            <a:ext cx="1645920" cy="457200"/>
+          </a:xfrm>
+          <a:prstGeom prst="rect">
+            <a:avLst/>
+          </a:prstGeom>
+          <a:noFill/>
+        </p:spPr>
+        <p:txBody>
+          <a:bodyPr wrap="square">
+            <a:spAutoFit/>
+          </a:bodyPr>
+          <a:lstStyle/>
+          <a:p>
+            <a:pPr algn="ctr">
+              <a:defRPr sz="2600" b="1">
+                <a:solidFill>
+                  <a:srgbClr val="FF8F00"/>
+                </a:solidFill>
+                <a:latin typeface="Arial"/>
+              </a:defRPr>
+            </a:pPr>
+            <a:r>
+              <a:t>30</a:t>
+            </a:r>
+          </a:p>
+        </p:txBody>
+      </p:sp>
+      <p:sp>
+        <p:nvSpPr>
+          <p:cNvPr id="40" name="TextBox 39"/>
+          <p:cNvSpPr txBox="1"/>
+          <p:nvPr/>
+        </p:nvSpPr>
+        <p:spPr>
+          <a:xfrm>
+            <a:off x="4114800" y="5715000"/>
+            <a:ext cx="1645920" cy="457200"/>
+          </a:xfrm>
+          <a:prstGeom prst="rect">
+            <a:avLst/>
+          </a:prstGeom>
+          <a:noFill/>
+        </p:spPr>
+        <p:txBody>
+          <a:bodyPr wrap="square">
+            <a:spAutoFit/>
+          </a:bodyPr>
+          <a:lstStyle/>
+          <a:p>
+            <a:pPr algn="ctr">
+              <a:defRPr sz="1000" b="0">
+                <a:solidFill>
+                  <a:srgbClr val="666666"/>
+                </a:solidFill>
+                <a:latin typeface="Arial"/>
+              </a:defRPr>
+            </a:pPr>
+            <a:r>
+              <a:t>קווי אגד</a:t>
+            </a:r>
+          </a:p>
+        </p:txBody>
+      </p:sp>
+      <p:sp>
+        <p:nvSpPr>
+          <p:cNvPr id="41" name="Rounded Rectangle 40"/>
+          <p:cNvSpPr/>
+          <p:nvPr/>
+        </p:nvSpPr>
+        <p:spPr>
+          <a:xfrm>
+            <a:off x="7315200" y="5120640"/>
+            <a:ext cx="1645920" cy="1097280"/>
+          </a:xfrm>
+          <a:prstGeom prst="roundRect">
+            <a:avLst/>
+          </a:prstGeom>
+          <a:solidFill>
+            <a:srgbClr val="F5F5F5"/>
+          </a:solidFill>
+          <a:ln w="12700">
+            <a:solidFill>
+              <a:srgbClr val="4DD0E1"/>
+            </a:solidFill>
+          </a:ln>
+        </p:spPr>
+        <p:style>
+          <a:lnRef idx="1">
+            <a:schemeClr val="accent1"/>
+          </a:lnRef>
+          <a:fillRef idx="3">
+            <a:schemeClr val="accent1"/>
+          </a:fillRef>
+          <a:effectRef idx="2">
+            <a:schemeClr val="accent1"/>
+          </a:effectRef>
+          <a:fontRef idx="minor">
+            <a:schemeClr val="lt1"/>
+          </a:fontRef>
+        </p:style>
+        <p:txBody>
+          <a:bodyPr rtlCol="0" anchor="ctr"/>
+          <a:lstStyle/>
+          <a:p>
+            <a:pPr algn="ctr"/>
+          </a:p>
+        </p:txBody>
+      </p:sp>
+      <p:sp>
+        <p:nvSpPr>
+          <p:cNvPr id="42" name="TextBox 41"/>
+          <p:cNvSpPr txBox="1"/>
+          <p:nvPr/>
+        </p:nvSpPr>
+        <p:spPr>
+          <a:xfrm>
+            <a:off x="7315200" y="5212080"/>
+            <a:ext cx="1645920" cy="457200"/>
+          </a:xfrm>
+          <a:prstGeom prst="rect">
+            <a:avLst/>
+          </a:prstGeom>
+          <a:noFill/>
+        </p:spPr>
+        <p:txBody>
+          <a:bodyPr wrap="square">
+            <a:spAutoFit/>
+          </a:bodyPr>
+          <a:lstStyle/>
+          <a:p>
+            <a:pPr algn="ctr">
+              <a:defRPr sz="2600" b="1">
+                <a:solidFill>
+                  <a:srgbClr val="FF8F00"/>
+                </a:solidFill>
+                <a:latin typeface="Arial"/>
+              </a:defRPr>
+            </a:pPr>
+            <a:r>
+              <a:t>15</a:t>
+            </a:r>
+          </a:p>
+        </p:txBody>
+      </p:sp>
+      <p:sp>
+        <p:nvSpPr>
+          <p:cNvPr id="43" name="TextBox 42"/>
+          <p:cNvSpPr txBox="1"/>
+          <p:nvPr/>
+        </p:nvSpPr>
+        <p:spPr>
+          <a:xfrm>
+            <a:off x="7315200" y="5715000"/>
+            <a:ext cx="1645920" cy="457200"/>
+          </a:xfrm>
+          <a:prstGeom prst="rect">
+            <a:avLst/>
+          </a:prstGeom>
+          <a:noFill/>
+        </p:spPr>
+        <p:txBody>
+          <a:bodyPr wrap="square">
+            <a:spAutoFit/>
+          </a:bodyPr>
+          <a:lstStyle/>
+          <a:p>
+            <a:pPr algn="ctr">
+              <a:defRPr sz="1000" b="0">
+                <a:solidFill>
+                  <a:srgbClr val="666666"/>
+                </a:solidFill>
+                <a:latin typeface="Arial"/>
+              </a:defRPr>
+            </a:pPr>
+            <a:r>
+              <a:t>קווי סופרבוס</a:t>
             </a:r>
           </a:p>
         </p:txBody>
@@ -7692,7 +6951,7 @@
               </a:defRPr>
             </a:pPr>
             <a:r>
-              <a:t>פרוייקט הקוד  💻</a:t>
+              <a:t>Tech Stack</a:t>
             </a:r>
           </a:p>
         </p:txBody>
@@ -7728,7 +6987,7 @@
               </a:defRPr>
             </a:pPr>
             <a:r>
-              <a:t>מבנה הקוד, מודולריות ועקרונות</a:t>
+              <a:t>כל הטכנולוגיות שבשימוש</a:t>
             </a:r>
           </a:p>
         </p:txBody>
@@ -7764,7 +7023,7 @@
               </a:defRPr>
             </a:pPr>
             <a:r>
-              <a:t>12 / 15</a:t>
+              <a:t>11 / 15</a:t>
             </a:r>
           </a:p>
         </p:txBody>
@@ -7777,8 +7036,8 @@
         </p:nvSpPr>
         <p:spPr>
           <a:xfrm>
-            <a:off x="274320" y="1280160"/>
-            <a:ext cx="4572000" cy="4846320"/>
+            <a:off x="137160" y="1280160"/>
+            <a:ext cx="1828800" cy="4572000"/>
           </a:xfrm>
           <a:prstGeom prst="roundRect">
             <a:avLst/>
@@ -7822,22 +7081,22 @@
         </p:nvSpPr>
         <p:spPr>
           <a:xfrm>
-            <a:off x="365760" y="1371600"/>
-            <a:ext cx="4389120" cy="274320"/>
-          </a:xfrm>
-          <a:prstGeom prst="rect">
-            <a:avLst/>
-          </a:prstGeom>
-          <a:noFill/>
-        </p:spPr>
-        <p:txBody>
-          <a:bodyPr wrap="square">
-            <a:spAutoFit/>
-          </a:bodyPr>
-          <a:lstStyle/>
-          <a:p>
-            <a:pPr algn="r">
-              <a:defRPr sz="1300" b="1">
+            <a:off x="137160" y="1371600"/>
+            <a:ext cx="1828800" cy="365760"/>
+          </a:xfrm>
+          <a:prstGeom prst="rect">
+            <a:avLst/>
+          </a:prstGeom>
+          <a:noFill/>
+        </p:spPr>
+        <p:txBody>
+          <a:bodyPr wrap="square">
+            <a:spAutoFit/>
+          </a:bodyPr>
+          <a:lstStyle/>
+          <a:p>
+            <a:pPr algn="ctr">
+              <a:defRPr sz="1400" b="1">
                 <a:solidFill>
                   <a:srgbClr val="007B83"/>
                 </a:solidFill>
@@ -7845,7 +7104,7 @@
               </a:defRPr>
             </a:pPr>
             <a:r>
-              <a:t>מבנה התיקיות:</a:t>
+              <a:t>Backend</a:t>
             </a:r>
           </a:p>
         </p:txBody>
@@ -7858,78 +7117,50 @@
         </p:nvSpPr>
         <p:spPr>
           <a:xfrm>
-            <a:off x="365760" y="1691640"/>
-            <a:ext cx="4389120" cy="4114800"/>
-          </a:xfrm>
-          <a:prstGeom prst="rect">
-            <a:avLst/>
-          </a:prstGeom>
-          <a:noFill/>
-        </p:spPr>
-        <p:txBody>
-          <a:bodyPr wrap="square">
-            <a:spAutoFit/>
-          </a:bodyPr>
-          <a:lstStyle/>
-          <a:p>
-            <a:pPr algn="l">
-              <a:defRPr sz="1000" b="0">
+            <a:off x="228600" y="1783080"/>
+            <a:ext cx="1645920" cy="3931920"/>
+          </a:xfrm>
+          <a:prstGeom prst="rect">
+            <a:avLst/>
+          </a:prstGeom>
+          <a:noFill/>
+        </p:spPr>
+        <p:txBody>
+          <a:bodyPr wrap="square">
+            <a:spAutoFit/>
+          </a:bodyPr>
+          <a:lstStyle/>
+          <a:p>
+            <a:pPr algn="ctr">
+              <a:defRPr sz="1100" b="0">
                 <a:solidFill>
                   <a:srgbClr val="333333"/>
                 </a:solidFill>
-                <a:latin typeface="Consolas"/>
-              </a:defRPr>
-            </a:pPr>
-            <a:r>
-              <a:t>finalproject/</a:t>
+                <a:latin typeface="Arial"/>
+              </a:defRPr>
+            </a:pPr>
+            <a:r>
+              <a:t>Python 3.12</a:t>
             </a:r>
             <a:br/>
             <a:r>
-              <a:t>├─ bot.py                 # Flask server</a:t>
+              <a:t>Flask (HTTP server)</a:t>
             </a:r>
             <a:br/>
             <a:r>
-              <a:t>├─ gushdan_app.html       # PWA UI</a:t>
+              <a:t>asyncio + threading</a:t>
             </a:r>
             <a:br/>
             <a:r>
-              <a:t>├─ service-worker.js      # PWA cache</a:t>
+              <a:t>boto3 (S3/MinIO)</a:t>
             </a:r>
             <a:br/>
             <a:r>
-              <a:t>├─ producers/             # 5 Kafka producers</a:t>
+              <a:t>elasticsearch-py</a:t>
             </a:r>
             <a:br/>
             <a:r>
-              <a:t>├─ collectors/            # Delay collectors</a:t>
-            </a:r>
-            <a:br/>
-            <a:r>
-              <a:t>├─ etl/                   # Transformers</a:t>
-            </a:r>
-            <a:br/>
-            <a:r>
-              <a:t>├─ storage/               # MinIO + ES writers</a:t>
-            </a:r>
-            <a:br/>
-            <a:r>
-              <a:t>├─ airflow/dags/          # 6 DAGs</a:t>
-            </a:r>
-            <a:br/>
-            <a:r>
-              <a:t>├─ scripts/               # Automation</a:t>
-            </a:r>
-            <a:br/>
-            <a:r>
-              <a:t>│   ├─ wake_backfill.py   # Gap recovery</a:t>
-            </a:r>
-            <a:br/>
-            <a:r>
-              <a:t>│   └─ full_backfill.py   # Historical fill</a:t>
-            </a:r>
-            <a:br/>
-            <a:r>
-              <a:t>└─ docker-compose.yml     # 9 services</a:t>
+              <a:t>kafka-python</a:t>
             </a:r>
           </a:p>
         </p:txBody>
@@ -7942,8 +7173,8 @@
         </p:nvSpPr>
         <p:spPr>
           <a:xfrm>
-            <a:off x="5303520" y="1371600"/>
-            <a:ext cx="6400800" cy="685800"/>
+            <a:off x="2148840" y="1280160"/>
+            <a:ext cx="1828800" cy="4572000"/>
           </a:xfrm>
           <a:prstGeom prst="roundRect">
             <a:avLst/>
@@ -7987,8 +7218,8 @@
         </p:nvSpPr>
         <p:spPr>
           <a:xfrm>
-            <a:off x="5394960" y="1417320"/>
-            <a:ext cx="457200" cy="365760"/>
+            <a:off x="2148840" y="1371600"/>
+            <a:ext cx="1828800" cy="365760"/>
           </a:xfrm>
           <a:prstGeom prst="rect">
             <a:avLst/>
@@ -8002,15 +7233,15 @@
           <a:lstStyle/>
           <a:p>
             <a:pPr algn="ctr">
-              <a:defRPr sz="1800" b="0">
-                <a:solidFill>
-                  <a:srgbClr val="009BA4"/>
-                </a:solidFill>
-                <a:latin typeface="Arial"/>
-              </a:defRPr>
-            </a:pPr>
-            <a:r>
-              <a:t>🔁</a:t>
+              <a:defRPr sz="1400" b="1">
+                <a:solidFill>
+                  <a:srgbClr val="007B83"/>
+                </a:solidFill>
+                <a:latin typeface="Arial"/>
+              </a:defRPr>
+            </a:pPr>
+            <a:r>
+              <a:t>Big Data</a:t>
             </a:r>
           </a:p>
         </p:txBody>
@@ -8023,80 +7254,60 @@
         </p:nvSpPr>
         <p:spPr>
           <a:xfrm>
-            <a:off x="5852160" y="1417320"/>
-            <a:ext cx="1828800" cy="320040"/>
-          </a:xfrm>
-          <a:prstGeom prst="rect">
-            <a:avLst/>
-          </a:prstGeom>
-          <a:noFill/>
-        </p:spPr>
-        <p:txBody>
-          <a:bodyPr wrap="square">
-            <a:spAutoFit/>
-          </a:bodyPr>
-          <a:lstStyle/>
-          <a:p>
-            <a:pPr algn="l">
-              <a:defRPr sz="1300" b="1">
-                <a:solidFill>
-                  <a:srgbClr val="007B83"/>
-                </a:solidFill>
-                <a:latin typeface="Arial"/>
-              </a:defRPr>
-            </a:pPr>
-            <a:r>
-              <a:t>Resilience</a:t>
-            </a:r>
-          </a:p>
-        </p:txBody>
-      </p:sp>
-      <p:sp>
-        <p:nvSpPr>
-          <p:cNvPr id="12" name="TextBox 11"/>
-          <p:cNvSpPr txBox="1"/>
-          <p:nvPr/>
-        </p:nvSpPr>
-        <p:spPr>
-          <a:xfrm>
-            <a:off x="5852160" y="1719072"/>
-            <a:ext cx="5486400" cy="274320"/>
-          </a:xfrm>
-          <a:prstGeom prst="rect">
-            <a:avLst/>
-          </a:prstGeom>
-          <a:noFill/>
-        </p:spPr>
-        <p:txBody>
-          <a:bodyPr wrap="square">
-            <a:spAutoFit/>
-          </a:bodyPr>
-          <a:lstStyle/>
-          <a:p>
-            <a:pPr algn="l">
-              <a:defRPr sz="1000" b="0">
-                <a:solidFill>
-                  <a:srgbClr val="666666"/>
-                </a:solidFill>
-                <a:latin typeface="Arial"/>
-              </a:defRPr>
-            </a:pPr>
-            <a:r>
-              <a:t>ניסיונות חוזרים, fallback, buffer</a:t>
-            </a:r>
-          </a:p>
-        </p:txBody>
-      </p:sp>
-      <p:sp>
-        <p:nvSpPr>
-          <p:cNvPr id="13" name="Rounded Rectangle 12"/>
+            <a:off x="2240280" y="1783080"/>
+            <a:ext cx="1645920" cy="3931920"/>
+          </a:xfrm>
+          <a:prstGeom prst="rect">
+            <a:avLst/>
+          </a:prstGeom>
+          <a:noFill/>
+        </p:spPr>
+        <p:txBody>
+          <a:bodyPr wrap="square">
+            <a:spAutoFit/>
+          </a:bodyPr>
+          <a:lstStyle/>
+          <a:p>
+            <a:pPr algn="ctr">
+              <a:defRPr sz="1100" b="0">
+                <a:solidFill>
+                  <a:srgbClr val="333333"/>
+                </a:solidFill>
+                <a:latin typeface="Arial"/>
+              </a:defRPr>
+            </a:pPr>
+            <a:r>
+              <a:t>Apache Kafka 7.5</a:t>
+            </a:r>
+            <a:br/>
+            <a:r>
+              <a:t>Apache Airflow 2.7</a:t>
+            </a:r>
+            <a:br/>
+            <a:r>
+              <a:t>Elasticsearch (Elastic Cloud)</a:t>
+            </a:r>
+            <a:br/>
+            <a:r>
+              <a:t>MinIO (S3-compatible)</a:t>
+            </a:r>
+            <a:br/>
+            <a:r>
+              <a:t>Apache Zookeeper</a:t>
+            </a:r>
+          </a:p>
+        </p:txBody>
+      </p:sp>
+      <p:sp>
+        <p:nvSpPr>
+          <p:cNvPr id="12" name="Rounded Rectangle 11"/>
           <p:cNvSpPr/>
           <p:nvPr/>
         </p:nvSpPr>
         <p:spPr>
           <a:xfrm>
-            <a:off x="5303520" y="2148840"/>
-            <a:ext cx="6400800" cy="685800"/>
+            <a:off x="4160520" y="1280160"/>
+            <a:ext cx="1828800" cy="4572000"/>
           </a:xfrm>
           <a:prstGeom prst="roundRect">
             <a:avLst/>
@@ -8134,14 +7345,50 @@
       </p:sp>
       <p:sp>
         <p:nvSpPr>
+          <p:cNvPr id="13" name="TextBox 12"/>
+          <p:cNvSpPr txBox="1"/>
+          <p:nvPr/>
+        </p:nvSpPr>
+        <p:spPr>
+          <a:xfrm>
+            <a:off x="4160520" y="1371600"/>
+            <a:ext cx="1828800" cy="365760"/>
+          </a:xfrm>
+          <a:prstGeom prst="rect">
+            <a:avLst/>
+          </a:prstGeom>
+          <a:noFill/>
+        </p:spPr>
+        <p:txBody>
+          <a:bodyPr wrap="square">
+            <a:spAutoFit/>
+          </a:bodyPr>
+          <a:lstStyle/>
+          <a:p>
+            <a:pPr algn="ctr">
+              <a:defRPr sz="1400" b="1">
+                <a:solidFill>
+                  <a:srgbClr val="007B83"/>
+                </a:solidFill>
+                <a:latin typeface="Arial"/>
+              </a:defRPr>
+            </a:pPr>
+            <a:r>
+              <a:t>Database</a:t>
+            </a:r>
+          </a:p>
+        </p:txBody>
+      </p:sp>
+      <p:sp>
+        <p:nvSpPr>
           <p:cNvPr id="14" name="TextBox 13"/>
           <p:cNvSpPr txBox="1"/>
           <p:nvPr/>
         </p:nvSpPr>
         <p:spPr>
           <a:xfrm>
-            <a:off x="5394960" y="2194560"/>
-            <a:ext cx="457200" cy="365760"/>
+            <a:off x="4251960" y="1783080"/>
+            <a:ext cx="1645920" cy="3931920"/>
           </a:xfrm>
           <a:prstGeom prst="rect">
             <a:avLst/>
@@ -8155,101 +7402,41 @@
           <a:lstStyle/>
           <a:p>
             <a:pPr algn="ctr">
-              <a:defRPr sz="1800" b="0">
-                <a:solidFill>
-                  <a:srgbClr val="009BA4"/>
-                </a:solidFill>
-                <a:latin typeface="Arial"/>
-              </a:defRPr>
-            </a:pPr>
-            <a:r>
-              <a:t>🧩</a:t>
-            </a:r>
-          </a:p>
-        </p:txBody>
-      </p:sp>
-      <p:sp>
-        <p:nvSpPr>
-          <p:cNvPr id="15" name="TextBox 14"/>
-          <p:cNvSpPr txBox="1"/>
-          <p:nvPr/>
-        </p:nvSpPr>
-        <p:spPr>
-          <a:xfrm>
-            <a:off x="5852160" y="2194560"/>
-            <a:ext cx="1828800" cy="320040"/>
-          </a:xfrm>
-          <a:prstGeom prst="rect">
-            <a:avLst/>
-          </a:prstGeom>
-          <a:noFill/>
-        </p:spPr>
-        <p:txBody>
-          <a:bodyPr wrap="square">
-            <a:spAutoFit/>
-          </a:bodyPr>
-          <a:lstStyle/>
-          <a:p>
-            <a:pPr algn="l">
-              <a:defRPr sz="1300" b="1">
-                <a:solidFill>
-                  <a:srgbClr val="007B83"/>
-                </a:solidFill>
-                <a:latin typeface="Arial"/>
-              </a:defRPr>
-            </a:pPr>
-            <a:r>
-              <a:t>Modularity</a:t>
-            </a:r>
-          </a:p>
-        </p:txBody>
-      </p:sp>
-      <p:sp>
-        <p:nvSpPr>
-          <p:cNvPr id="16" name="TextBox 15"/>
-          <p:cNvSpPr txBox="1"/>
-          <p:nvPr/>
-        </p:nvSpPr>
-        <p:spPr>
-          <a:xfrm>
-            <a:off x="5852160" y="2496312"/>
-            <a:ext cx="5486400" cy="274320"/>
-          </a:xfrm>
-          <a:prstGeom prst="rect">
-            <a:avLst/>
-          </a:prstGeom>
-          <a:noFill/>
-        </p:spPr>
-        <p:txBody>
-          <a:bodyPr wrap="square">
-            <a:spAutoFit/>
-          </a:bodyPr>
-          <a:lstStyle/>
-          <a:p>
-            <a:pPr algn="l">
-              <a:defRPr sz="1000" b="0">
-                <a:solidFill>
-                  <a:srgbClr val="666666"/>
-                </a:solidFill>
-                <a:latin typeface="Arial"/>
-              </a:defRPr>
-            </a:pPr>
-            <a:r>
-              <a:t>כל producer/transformer בקובץ נפרד</a:t>
-            </a:r>
-          </a:p>
-        </p:txBody>
-      </p:sp>
-      <p:sp>
-        <p:nvSpPr>
-          <p:cNvPr id="17" name="Rounded Rectangle 16"/>
+              <a:defRPr sz="1100" b="0">
+                <a:solidFill>
+                  <a:srgbClr val="333333"/>
+                </a:solidFill>
+                <a:latin typeface="Arial"/>
+              </a:defRPr>
+            </a:pPr>
+            <a:r>
+              <a:t>PostgreSQL 13</a:t>
+            </a:r>
+            <a:br/>
+            <a:r>
+              <a:t>psycopg2</a:t>
+            </a:r>
+            <a:br/>
+            <a:r>
+              <a:t>SQL (GTFS schema)</a:t>
+            </a:r>
+            <a:br/>
+            <a:r>
+              <a:t>Hive-style partitions</a:t>
+            </a:r>
+          </a:p>
+        </p:txBody>
+      </p:sp>
+      <p:sp>
+        <p:nvSpPr>
+          <p:cNvPr id="15" name="Rounded Rectangle 14"/>
           <p:cNvSpPr/>
           <p:nvPr/>
         </p:nvSpPr>
         <p:spPr>
           <a:xfrm>
-            <a:off x="5303520" y="2926080"/>
-            <a:ext cx="6400800" cy="685800"/>
+            <a:off x="6172200" y="1280160"/>
+            <a:ext cx="1828800" cy="4572000"/>
           </a:xfrm>
           <a:prstGeom prst="roundRect">
             <a:avLst/>
@@ -8287,14 +7474,14 @@
       </p:sp>
       <p:sp>
         <p:nvSpPr>
-          <p:cNvPr id="18" name="TextBox 17"/>
-          <p:cNvSpPr txBox="1"/>
-          <p:nvPr/>
-        </p:nvSpPr>
-        <p:spPr>
-          <a:xfrm>
-            <a:off x="5394960" y="2971800"/>
-            <a:ext cx="457200" cy="365760"/>
+          <p:cNvPr id="16" name="TextBox 15"/>
+          <p:cNvSpPr txBox="1"/>
+          <p:nvPr/>
+        </p:nvSpPr>
+        <p:spPr>
+          <a:xfrm>
+            <a:off x="6172200" y="1371600"/>
+            <a:ext cx="1828800" cy="365760"/>
           </a:xfrm>
           <a:prstGeom prst="rect">
             <a:avLst/>
@@ -8308,43 +7495,7 @@
           <a:lstStyle/>
           <a:p>
             <a:pPr algn="ctr">
-              <a:defRPr sz="1800" b="0">
-                <a:solidFill>
-                  <a:srgbClr val="009BA4"/>
-                </a:solidFill>
-                <a:latin typeface="Arial"/>
-              </a:defRPr>
-            </a:pPr>
-            <a:r>
-              <a:t>📦</a:t>
-            </a:r>
-          </a:p>
-        </p:txBody>
-      </p:sp>
-      <p:sp>
-        <p:nvSpPr>
-          <p:cNvPr id="19" name="TextBox 18"/>
-          <p:cNvSpPr txBox="1"/>
-          <p:nvPr/>
-        </p:nvSpPr>
-        <p:spPr>
-          <a:xfrm>
-            <a:off x="5852160" y="2971800"/>
-            <a:ext cx="1828800" cy="320040"/>
-          </a:xfrm>
-          <a:prstGeom prst="rect">
-            <a:avLst/>
-          </a:prstGeom>
-          <a:noFill/>
-        </p:spPr>
-        <p:txBody>
-          <a:bodyPr wrap="square">
-            <a:spAutoFit/>
-          </a:bodyPr>
-          <a:lstStyle/>
-          <a:p>
-            <a:pPr algn="l">
-              <a:defRPr sz="1300" b="1">
+              <a:defRPr sz="1400" b="1">
                 <a:solidFill>
                   <a:srgbClr val="007B83"/>
                 </a:solidFill>
@@ -8352,57 +7503,73 @@
               </a:defRPr>
             </a:pPr>
             <a:r>
-              <a:t>Containerization</a:t>
-            </a:r>
-          </a:p>
-        </p:txBody>
-      </p:sp>
-      <p:sp>
-        <p:nvSpPr>
-          <p:cNvPr id="20" name="TextBox 19"/>
-          <p:cNvSpPr txBox="1"/>
-          <p:nvPr/>
-        </p:nvSpPr>
-        <p:spPr>
-          <a:xfrm>
-            <a:off x="5852160" y="3273552"/>
-            <a:ext cx="5486400" cy="274320"/>
-          </a:xfrm>
-          <a:prstGeom prst="rect">
-            <a:avLst/>
-          </a:prstGeom>
-          <a:noFill/>
-        </p:spPr>
-        <p:txBody>
-          <a:bodyPr wrap="square">
-            <a:spAutoFit/>
-          </a:bodyPr>
-          <a:lstStyle/>
-          <a:p>
-            <a:pPr algn="l">
-              <a:defRPr sz="1000" b="0">
-                <a:solidFill>
-                  <a:srgbClr val="666666"/>
-                </a:solidFill>
-                <a:latin typeface="Arial"/>
-              </a:defRPr>
-            </a:pPr>
-            <a:r>
-              <a:t>כל שירות ב-Docker מבודד</a:t>
-            </a:r>
-          </a:p>
-        </p:txBody>
-      </p:sp>
-      <p:sp>
-        <p:nvSpPr>
-          <p:cNvPr id="21" name="Rounded Rectangle 20"/>
+              <a:t>Frontend</a:t>
+            </a:r>
+          </a:p>
+        </p:txBody>
+      </p:sp>
+      <p:sp>
+        <p:nvSpPr>
+          <p:cNvPr id="17" name="TextBox 16"/>
+          <p:cNvSpPr txBox="1"/>
+          <p:nvPr/>
+        </p:nvSpPr>
+        <p:spPr>
+          <a:xfrm>
+            <a:off x="6263640" y="1783080"/>
+            <a:ext cx="1645920" cy="3931920"/>
+          </a:xfrm>
+          <a:prstGeom prst="rect">
+            <a:avLst/>
+          </a:prstGeom>
+          <a:noFill/>
+        </p:spPr>
+        <p:txBody>
+          <a:bodyPr wrap="square">
+            <a:spAutoFit/>
+          </a:bodyPr>
+          <a:lstStyle/>
+          <a:p>
+            <a:pPr algn="ctr">
+              <a:defRPr sz="1100" b="0">
+                <a:solidFill>
+                  <a:srgbClr val="333333"/>
+                </a:solidFill>
+                <a:latin typeface="Arial"/>
+              </a:defRPr>
+            </a:pPr>
+            <a:r>
+              <a:t>HTML5 + JavaScript ES6+</a:t>
+            </a:r>
+            <a:br/>
+            <a:r>
+              <a:t>Leaflet (maps)</a:t>
+            </a:r>
+            <a:br/>
+            <a:r>
+              <a:t>Kibana 8.8</a:t>
+            </a:r>
+            <a:br/>
+            <a:r>
+              <a:t>Hebrew RTL UI</a:t>
+            </a:r>
+            <a:br/>
+            <a:r>
+              <a:t>PWA + Service Worker</a:t>
+            </a:r>
+          </a:p>
+        </p:txBody>
+      </p:sp>
+      <p:sp>
+        <p:nvSpPr>
+          <p:cNvPr id="18" name="Rounded Rectangle 17"/>
           <p:cNvSpPr/>
           <p:nvPr/>
         </p:nvSpPr>
         <p:spPr>
           <a:xfrm>
-            <a:off x="5303520" y="3703320"/>
-            <a:ext cx="6400800" cy="685800"/>
+            <a:off x="8183880" y="1280160"/>
+            <a:ext cx="1828800" cy="4572000"/>
           </a:xfrm>
           <a:prstGeom prst="roundRect">
             <a:avLst/>
@@ -8440,14 +7607,14 @@
       </p:sp>
       <p:sp>
         <p:nvSpPr>
-          <p:cNvPr id="22" name="TextBox 21"/>
-          <p:cNvSpPr txBox="1"/>
-          <p:nvPr/>
-        </p:nvSpPr>
-        <p:spPr>
-          <a:xfrm>
-            <a:off x="5394960" y="3749040"/>
-            <a:ext cx="457200" cy="365760"/>
+          <p:cNvPr id="19" name="TextBox 18"/>
+          <p:cNvSpPr txBox="1"/>
+          <p:nvPr/>
+        </p:nvSpPr>
+        <p:spPr>
+          <a:xfrm>
+            <a:off x="8183880" y="1371600"/>
+            <a:ext cx="1828800" cy="365760"/>
           </a:xfrm>
           <a:prstGeom prst="rect">
             <a:avLst/>
@@ -8461,43 +7628,7 @@
           <a:lstStyle/>
           <a:p>
             <a:pPr algn="ctr">
-              <a:defRPr sz="1800" b="0">
-                <a:solidFill>
-                  <a:srgbClr val="009BA4"/>
-                </a:solidFill>
-                <a:latin typeface="Arial"/>
-              </a:defRPr>
-            </a:pPr>
-            <a:r>
-              <a:t>🛡️</a:t>
-            </a:r>
-          </a:p>
-        </p:txBody>
-      </p:sp>
-      <p:sp>
-        <p:nvSpPr>
-          <p:cNvPr id="23" name="TextBox 22"/>
-          <p:cNvSpPr txBox="1"/>
-          <p:nvPr/>
-        </p:nvSpPr>
-        <p:spPr>
-          <a:xfrm>
-            <a:off x="5852160" y="3749040"/>
-            <a:ext cx="1828800" cy="320040"/>
-          </a:xfrm>
-          <a:prstGeom prst="rect">
-            <a:avLst/>
-          </a:prstGeom>
-          <a:noFill/>
-        </p:spPr>
-        <p:txBody>
-          <a:bodyPr wrap="square">
-            <a:spAutoFit/>
-          </a:bodyPr>
-          <a:lstStyle/>
-          <a:p>
-            <a:pPr algn="l">
-              <a:defRPr sz="1300" b="1">
+              <a:defRPr sz="1400" b="1">
                 <a:solidFill>
                   <a:srgbClr val="007B83"/>
                 </a:solidFill>
@@ -8505,57 +7636,73 @@
               </a:defRPr>
             </a:pPr>
             <a:r>
-              <a:t>Store &amp; Forward</a:t>
-            </a:r>
-          </a:p>
-        </p:txBody>
-      </p:sp>
-      <p:sp>
-        <p:nvSpPr>
-          <p:cNvPr id="24" name="TextBox 23"/>
-          <p:cNvSpPr txBox="1"/>
-          <p:nvPr/>
-        </p:nvSpPr>
-        <p:spPr>
-          <a:xfrm>
-            <a:off x="5852160" y="4050792"/>
-            <a:ext cx="5486400" cy="274320"/>
-          </a:xfrm>
-          <a:prstGeom prst="rect">
-            <a:avLst/>
-          </a:prstGeom>
-          <a:noFill/>
-        </p:spPr>
-        <p:txBody>
-          <a:bodyPr wrap="square">
-            <a:spAutoFit/>
-          </a:bodyPr>
-          <a:lstStyle/>
-          <a:p>
-            <a:pPr algn="l">
-              <a:defRPr sz="1000" b="0">
-                <a:solidFill>
-                  <a:srgbClr val="666666"/>
-                </a:solidFill>
-                <a:latin typeface="Arial"/>
-              </a:defRPr>
-            </a:pPr>
-            <a:r>
-              <a:t>buffer מקומי + flush אוטומטי</a:t>
-            </a:r>
-          </a:p>
-        </p:txBody>
-      </p:sp>
-      <p:sp>
-        <p:nvSpPr>
-          <p:cNvPr id="25" name="Rounded Rectangle 24"/>
+              <a:t>DevOps</a:t>
+            </a:r>
+          </a:p>
+        </p:txBody>
+      </p:sp>
+      <p:sp>
+        <p:nvSpPr>
+          <p:cNvPr id="20" name="TextBox 19"/>
+          <p:cNvSpPr txBox="1"/>
+          <p:nvPr/>
+        </p:nvSpPr>
+        <p:spPr>
+          <a:xfrm>
+            <a:off x="8275320" y="1783080"/>
+            <a:ext cx="1645920" cy="3931920"/>
+          </a:xfrm>
+          <a:prstGeom prst="rect">
+            <a:avLst/>
+          </a:prstGeom>
+          <a:noFill/>
+        </p:spPr>
+        <p:txBody>
+          <a:bodyPr wrap="square">
+            <a:spAutoFit/>
+          </a:bodyPr>
+          <a:lstStyle/>
+          <a:p>
+            <a:pPr algn="ctr">
+              <a:defRPr sz="1100" b="0">
+                <a:solidFill>
+                  <a:srgbClr val="333333"/>
+                </a:solidFill>
+                <a:latin typeface="Arial"/>
+              </a:defRPr>
+            </a:pPr>
+            <a:r>
+              <a:t>Docker + Docker Compose</a:t>
+            </a:r>
+            <a:br/>
+            <a:r>
+              <a:t>Linux VM (Hyper-V)</a:t>
+            </a:r>
+            <a:br/>
+            <a:r>
+              <a:t>Bash automation</a:t>
+            </a:r>
+            <a:br/>
+            <a:r>
+              <a:t>Cron pipelines</a:t>
+            </a:r>
+            <a:br/>
+            <a:r>
+              <a:t>ngrok tunneling</a:t>
+            </a:r>
+          </a:p>
+        </p:txBody>
+      </p:sp>
+      <p:sp>
+        <p:nvSpPr>
+          <p:cNvPr id="21" name="Rounded Rectangle 20"/>
           <p:cNvSpPr/>
           <p:nvPr/>
         </p:nvSpPr>
         <p:spPr>
           <a:xfrm>
-            <a:off x="5303520" y="4480560"/>
-            <a:ext cx="6400800" cy="685800"/>
+            <a:off x="10195560" y="1280160"/>
+            <a:ext cx="1828800" cy="4572000"/>
           </a:xfrm>
           <a:prstGeom prst="roundRect">
             <a:avLst/>
@@ -8593,14 +7740,14 @@
       </p:sp>
       <p:sp>
         <p:nvSpPr>
-          <p:cNvPr id="26" name="TextBox 25"/>
-          <p:cNvSpPr txBox="1"/>
-          <p:nvPr/>
-        </p:nvSpPr>
-        <p:spPr>
-          <a:xfrm>
-            <a:off x="5394960" y="4526280"/>
-            <a:ext cx="457200" cy="365760"/>
+          <p:cNvPr id="22" name="TextBox 21"/>
+          <p:cNvSpPr txBox="1"/>
+          <p:nvPr/>
+        </p:nvSpPr>
+        <p:spPr>
+          <a:xfrm>
+            <a:off x="10195560" y="1371600"/>
+            <a:ext cx="1828800" cy="365760"/>
           </a:xfrm>
           <a:prstGeom prst="rect">
             <a:avLst/>
@@ -8614,43 +7761,7 @@
           <a:lstStyle/>
           <a:p>
             <a:pPr algn="ctr">
-              <a:defRPr sz="1800" b="0">
-                <a:solidFill>
-                  <a:srgbClr val="009BA4"/>
-                </a:solidFill>
-                <a:latin typeface="Arial"/>
-              </a:defRPr>
-            </a:pPr>
-            <a:r>
-              <a:t>⏰</a:t>
-            </a:r>
-          </a:p>
-        </p:txBody>
-      </p:sp>
-      <p:sp>
-        <p:nvSpPr>
-          <p:cNvPr id="27" name="TextBox 26"/>
-          <p:cNvSpPr txBox="1"/>
-          <p:nvPr/>
-        </p:nvSpPr>
-        <p:spPr>
-          <a:xfrm>
-            <a:off x="5852160" y="4526280"/>
-            <a:ext cx="1828800" cy="320040"/>
-          </a:xfrm>
-          <a:prstGeom prst="rect">
-            <a:avLst/>
-          </a:prstGeom>
-          <a:noFill/>
-        </p:spPr>
-        <p:txBody>
-          <a:bodyPr wrap="square">
-            <a:spAutoFit/>
-          </a:bodyPr>
-          <a:lstStyle/>
-          <a:p>
-            <a:pPr algn="l">
-              <a:defRPr sz="1300" b="1">
+              <a:defRPr sz="1400" b="1">
                 <a:solidFill>
                   <a:srgbClr val="007B83"/>
                 </a:solidFill>
@@ -8658,102 +7769,21 @@
               </a:defRPr>
             </a:pPr>
             <a:r>
-              <a:t>Auto-Recovery</a:t>
-            </a:r>
-          </a:p>
-        </p:txBody>
-      </p:sp>
-      <p:sp>
-        <p:nvSpPr>
-          <p:cNvPr id="28" name="TextBox 27"/>
-          <p:cNvSpPr txBox="1"/>
-          <p:nvPr/>
-        </p:nvSpPr>
-        <p:spPr>
-          <a:xfrm>
-            <a:off x="5852160" y="4828032"/>
-            <a:ext cx="5486400" cy="274320"/>
-          </a:xfrm>
-          <a:prstGeom prst="rect">
-            <a:avLst/>
-          </a:prstGeom>
-          <a:noFill/>
-        </p:spPr>
-        <p:txBody>
-          <a:bodyPr wrap="square">
-            <a:spAutoFit/>
-          </a:bodyPr>
-          <a:lstStyle/>
-          <a:p>
-            <a:pPr algn="l">
-              <a:defRPr sz="1000" b="0">
-                <a:solidFill>
-                  <a:srgbClr val="666666"/>
-                </a:solidFill>
-                <a:latin typeface="Arial"/>
-              </a:defRPr>
-            </a:pPr>
-            <a:r>
-              <a:t>wake_backfill + watchdog + cron</a:t>
-            </a:r>
-          </a:p>
-        </p:txBody>
-      </p:sp>
-      <p:sp>
-        <p:nvSpPr>
-          <p:cNvPr id="29" name="Rounded Rectangle 28"/>
-          <p:cNvSpPr/>
-          <p:nvPr/>
-        </p:nvSpPr>
-        <p:spPr>
-          <a:xfrm>
-            <a:off x="5303520" y="5257800"/>
-            <a:ext cx="6400800" cy="685800"/>
-          </a:xfrm>
-          <a:prstGeom prst="roundRect">
-            <a:avLst/>
-          </a:prstGeom>
-          <a:solidFill>
-            <a:srgbClr val="F5F5F5"/>
-          </a:solidFill>
-          <a:ln w="12700">
-            <a:solidFill>
-              <a:srgbClr val="4DD0E1"/>
-            </a:solidFill>
-          </a:ln>
-        </p:spPr>
-        <p:style>
-          <a:lnRef idx="1">
-            <a:schemeClr val="accent1"/>
-          </a:lnRef>
-          <a:fillRef idx="3">
-            <a:schemeClr val="accent1"/>
-          </a:fillRef>
-          <a:effectRef idx="2">
-            <a:schemeClr val="accent1"/>
-          </a:effectRef>
-          <a:fontRef idx="minor">
-            <a:schemeClr val="lt1"/>
-          </a:fontRef>
-        </p:style>
-        <p:txBody>
-          <a:bodyPr rtlCol="0" anchor="ctr"/>
-          <a:lstStyle/>
-          <a:p>
-            <a:pPr algn="ctr"/>
-          </a:p>
-        </p:txBody>
-      </p:sp>
-      <p:sp>
-        <p:nvSpPr>
-          <p:cNvPr id="30" name="TextBox 29"/>
-          <p:cNvSpPr txBox="1"/>
-          <p:nvPr/>
-        </p:nvSpPr>
-        <p:spPr>
-          <a:xfrm>
-            <a:off x="5394960" y="5303520"/>
-            <a:ext cx="457200" cy="365760"/>
+              <a:t>AI &amp; APIs</a:t>
+            </a:r>
+          </a:p>
+        </p:txBody>
+      </p:sp>
+      <p:sp>
+        <p:nvSpPr>
+          <p:cNvPr id="23" name="TextBox 22"/>
+          <p:cNvSpPr txBox="1"/>
+          <p:nvPr/>
+        </p:nvSpPr>
+        <p:spPr>
+          <a:xfrm>
+            <a:off x="10287000" y="1783080"/>
+            <a:ext cx="1645920" cy="3931920"/>
           </a:xfrm>
           <a:prstGeom prst="rect">
             <a:avLst/>
@@ -8767,87 +7797,27 @@
           <a:lstStyle/>
           <a:p>
             <a:pPr algn="ctr">
-              <a:defRPr sz="1800" b="0">
-                <a:solidFill>
-                  <a:srgbClr val="009BA4"/>
-                </a:solidFill>
-                <a:latin typeface="Arial"/>
-              </a:defRPr>
-            </a:pPr>
-            <a:r>
-              <a:t>🔍</a:t>
-            </a:r>
-          </a:p>
-        </p:txBody>
-      </p:sp>
-      <p:sp>
-        <p:nvSpPr>
-          <p:cNvPr id="31" name="TextBox 30"/>
-          <p:cNvSpPr txBox="1"/>
-          <p:nvPr/>
-        </p:nvSpPr>
-        <p:spPr>
-          <a:xfrm>
-            <a:off x="5852160" y="5303520"/>
-            <a:ext cx="1828800" cy="320040"/>
-          </a:xfrm>
-          <a:prstGeom prst="rect">
-            <a:avLst/>
-          </a:prstGeom>
-          <a:noFill/>
-        </p:spPr>
-        <p:txBody>
-          <a:bodyPr wrap="square">
-            <a:spAutoFit/>
-          </a:bodyPr>
-          <a:lstStyle/>
-          <a:p>
-            <a:pPr algn="l">
-              <a:defRPr sz="1300" b="1">
-                <a:solidFill>
-                  <a:srgbClr val="007B83"/>
-                </a:solidFill>
-                <a:latin typeface="Arial"/>
-              </a:defRPr>
-            </a:pPr>
-            <a:r>
-              <a:t>Observability</a:t>
-            </a:r>
-          </a:p>
-        </p:txBody>
-      </p:sp>
-      <p:sp>
-        <p:nvSpPr>
-          <p:cNvPr id="32" name="TextBox 31"/>
-          <p:cNvSpPr txBox="1"/>
-          <p:nvPr/>
-        </p:nvSpPr>
-        <p:spPr>
-          <a:xfrm>
-            <a:off x="5852160" y="5605272"/>
-            <a:ext cx="5486400" cy="274320"/>
-          </a:xfrm>
-          <a:prstGeom prst="rect">
-            <a:avLst/>
-          </a:prstGeom>
-          <a:noFill/>
-        </p:spPr>
-        <p:txBody>
-          <a:bodyPr wrap="square">
-            <a:spAutoFit/>
-          </a:bodyPr>
-          <a:lstStyle/>
-          <a:p>
-            <a:pPr algn="l">
-              <a:defRPr sz="1000" b="0">
-                <a:solidFill>
-                  <a:srgbClr val="666666"/>
-                </a:solidFill>
-                <a:latin typeface="Arial"/>
-              </a:defRPr>
-            </a:pPr>
-            <a:r>
-              <a:t>logs, /health, /status, watchdog</a:t>
+              <a:defRPr sz="1100" b="0">
+                <a:solidFill>
+                  <a:srgbClr val="333333"/>
+                </a:solidFill>
+                <a:latin typeface="Arial"/>
+              </a:defRPr>
+            </a:pPr>
+            <a:r>
+              <a:t>Google Gemini API</a:t>
+            </a:r>
+            <a:br/>
+            <a:r>
+              <a:t>Stride GTFS API</a:t>
+            </a:r>
+            <a:br/>
+            <a:r>
+              <a:t>HERE Traffic v7</a:t>
+            </a:r>
+            <a:br/>
+            <a:r>
+              <a:t>Nominatim geocoding</a:t>
             </a:r>
           </a:p>
         </p:txBody>
@@ -8952,7 +7922,7 @@
               </a:defRPr>
             </a:pPr>
             <a:r>
-              <a:t>אתגרים שפתרנו  🛠️</a:t>
+              <a:t>פרוייקט הקוד  💻</a:t>
             </a:r>
           </a:p>
         </p:txBody>
@@ -8988,7 +7958,7 @@
               </a:defRPr>
             </a:pPr>
             <a:r>
-              <a:t>תקלות אמיתיות שנתקלנו בהן ופתרנו</a:t>
+              <a:t>מבנה הקוד, מודולריות ועקרונות</a:t>
             </a:r>
           </a:p>
         </p:txBody>
@@ -9024,7 +7994,7 @@
               </a:defRPr>
             </a:pPr>
             <a:r>
-              <a:t>13 / 15</a:t>
+              <a:t>12 / 15</a:t>
             </a:r>
           </a:p>
         </p:txBody>
@@ -9037,14 +8007,14 @@
         </p:nvSpPr>
         <p:spPr>
           <a:xfrm>
-            <a:off x="274320" y="1188720"/>
-            <a:ext cx="11430000" cy="594360"/>
+            <a:off x="274320" y="1280160"/>
+            <a:ext cx="4572000" cy="4846320"/>
           </a:xfrm>
           <a:prstGeom prst="roundRect">
             <a:avLst/>
           </a:prstGeom>
           <a:solidFill>
-            <a:srgbClr val="E0F7FA"/>
+            <a:srgbClr val="F5F5F5"/>
           </a:solidFill>
           <a:ln w="12700">
             <a:solidFill>
@@ -9082,30 +8052,30 @@
         </p:nvSpPr>
         <p:spPr>
           <a:xfrm>
-            <a:off x="365760" y="1234440"/>
-            <a:ext cx="457200" cy="320040"/>
-          </a:xfrm>
-          <a:prstGeom prst="rect">
-            <a:avLst/>
-          </a:prstGeom>
-          <a:noFill/>
-        </p:spPr>
-        <p:txBody>
-          <a:bodyPr wrap="square">
-            <a:spAutoFit/>
-          </a:bodyPr>
-          <a:lstStyle/>
-          <a:p>
-            <a:pPr algn="ctr">
-              <a:defRPr sz="1600" b="0">
-                <a:solidFill>
-                  <a:srgbClr val="009BA4"/>
-                </a:solidFill>
-                <a:latin typeface="Arial"/>
-              </a:defRPr>
-            </a:pPr>
-            <a:r>
-              <a:t>🚫</a:t>
+            <a:off x="365760" y="1371600"/>
+            <a:ext cx="4389120" cy="274320"/>
+          </a:xfrm>
+          <a:prstGeom prst="rect">
+            <a:avLst/>
+          </a:prstGeom>
+          <a:noFill/>
+        </p:spPr>
+        <p:txBody>
+          <a:bodyPr wrap="square">
+            <a:spAutoFit/>
+          </a:bodyPr>
+          <a:lstStyle/>
+          <a:p>
+            <a:pPr algn="r">
+              <a:defRPr sz="1300" b="1">
+                <a:solidFill>
+                  <a:srgbClr val="007B83"/>
+                </a:solidFill>
+                <a:latin typeface="Arial"/>
+              </a:defRPr>
+            </a:pPr>
+            <a:r>
+              <a:t>מבנה התיקיות:</a:t>
             </a:r>
           </a:p>
         </p:txBody>
@@ -9118,44 +8088,8 @@
         </p:nvSpPr>
         <p:spPr>
           <a:xfrm>
-            <a:off x="822960" y="1216152"/>
-            <a:ext cx="3657600" cy="274320"/>
-          </a:xfrm>
-          <a:prstGeom prst="rect">
-            <a:avLst/>
-          </a:prstGeom>
-          <a:noFill/>
-        </p:spPr>
-        <p:txBody>
-          <a:bodyPr wrap="square">
-            <a:spAutoFit/>
-          </a:bodyPr>
-          <a:lstStyle/>
-          <a:p>
-            <a:pPr algn="l">
-              <a:defRPr sz="1200" b="1">
-                <a:solidFill>
-                  <a:srgbClr val="333333"/>
-                </a:solidFill>
-                <a:latin typeface="Arial"/>
-              </a:defRPr>
-            </a:pPr>
-            <a:r>
-              <a:t>MOT GTFS-RT WAF block</a:t>
-            </a:r>
-          </a:p>
-        </p:txBody>
-      </p:sp>
-      <p:sp>
-        <p:nvSpPr>
-          <p:cNvPr id="9" name="TextBox 8"/>
-          <p:cNvSpPr txBox="1"/>
-          <p:nvPr/>
-        </p:nvSpPr>
-        <p:spPr>
-          <a:xfrm>
-            <a:off x="822960" y="1490472"/>
-            <a:ext cx="10515600" cy="274320"/>
+            <a:off x="365760" y="1691640"/>
+            <a:ext cx="4389120" cy="4114800"/>
           </a:xfrm>
           <a:prstGeom prst="rect">
             <a:avLst/>
@@ -9171,33 +8105,81 @@
             <a:pPr algn="l">
               <a:defRPr sz="1000" b="0">
                 <a:solidFill>
-                  <a:srgbClr val="666666"/>
-                </a:solidFill>
-                <a:latin typeface="Arial"/>
-              </a:defRPr>
-            </a:pPr>
-            <a:r>
-              <a:t>שימוש ב-Stride API של עמותת הסדנא כפרוקסי</a:t>
-            </a:r>
-          </a:p>
-        </p:txBody>
-      </p:sp>
-      <p:sp>
-        <p:nvSpPr>
-          <p:cNvPr id="10" name="Rounded Rectangle 9"/>
+                  <a:srgbClr val="333333"/>
+                </a:solidFill>
+                <a:latin typeface="Consolas"/>
+              </a:defRPr>
+            </a:pPr>
+            <a:r>
+              <a:t>finalproject/</a:t>
+            </a:r>
+            <a:br/>
+            <a:r>
+              <a:t>├─ bot.py                 # Flask server</a:t>
+            </a:r>
+            <a:br/>
+            <a:r>
+              <a:t>├─ gushdan_app.html       # PWA UI</a:t>
+            </a:r>
+            <a:br/>
+            <a:r>
+              <a:t>├─ service-worker.js      # PWA cache</a:t>
+            </a:r>
+            <a:br/>
+            <a:r>
+              <a:t>├─ producers/             # 5 Kafka producers</a:t>
+            </a:r>
+            <a:br/>
+            <a:r>
+              <a:t>├─ collectors/            # Delay collectors</a:t>
+            </a:r>
+            <a:br/>
+            <a:r>
+              <a:t>├─ etl/                   # Transformers</a:t>
+            </a:r>
+            <a:br/>
+            <a:r>
+              <a:t>├─ storage/               # MinIO + ES writers</a:t>
+            </a:r>
+            <a:br/>
+            <a:r>
+              <a:t>├─ airflow/dags/          # 6 DAGs</a:t>
+            </a:r>
+            <a:br/>
+            <a:r>
+              <a:t>├─ scripts/               # Automation</a:t>
+            </a:r>
+            <a:br/>
+            <a:r>
+              <a:t>│   ├─ wake_backfill.py   # Gap recovery</a:t>
+            </a:r>
+            <a:br/>
+            <a:r>
+              <a:t>│   └─ full_backfill.py   # Historical fill</a:t>
+            </a:r>
+            <a:br/>
+            <a:r>
+              <a:t>└─ docker-compose.yml     # 9 services</a:t>
+            </a:r>
+          </a:p>
+        </p:txBody>
+      </p:sp>
+      <p:sp>
+        <p:nvSpPr>
+          <p:cNvPr id="9" name="Rounded Rectangle 8"/>
           <p:cNvSpPr/>
           <p:nvPr/>
         </p:nvSpPr>
         <p:spPr>
           <a:xfrm>
-            <a:off x="274320" y="1847088"/>
-            <a:ext cx="11430000" cy="594360"/>
+            <a:off x="5303520" y="1371600"/>
+            <a:ext cx="6400800" cy="685800"/>
           </a:xfrm>
           <a:prstGeom prst="roundRect">
             <a:avLst/>
           </a:prstGeom>
           <a:solidFill>
-            <a:srgbClr val="FFFFFF"/>
+            <a:srgbClr val="F5F5F5"/>
           </a:solidFill>
           <a:ln w="12700">
             <a:solidFill>
@@ -9229,36 +8211,72 @@
       </p:sp>
       <p:sp>
         <p:nvSpPr>
+          <p:cNvPr id="10" name="TextBox 9"/>
+          <p:cNvSpPr txBox="1"/>
+          <p:nvPr/>
+        </p:nvSpPr>
+        <p:spPr>
+          <a:xfrm>
+            <a:off x="5394960" y="1417320"/>
+            <a:ext cx="457200" cy="365760"/>
+          </a:xfrm>
+          <a:prstGeom prst="rect">
+            <a:avLst/>
+          </a:prstGeom>
+          <a:noFill/>
+        </p:spPr>
+        <p:txBody>
+          <a:bodyPr wrap="square">
+            <a:spAutoFit/>
+          </a:bodyPr>
+          <a:lstStyle/>
+          <a:p>
+            <a:pPr algn="ctr">
+              <a:defRPr sz="1800" b="0">
+                <a:solidFill>
+                  <a:srgbClr val="009BA4"/>
+                </a:solidFill>
+                <a:latin typeface="Arial"/>
+              </a:defRPr>
+            </a:pPr>
+            <a:r>
+              <a:t>🔁</a:t>
+            </a:r>
+          </a:p>
+        </p:txBody>
+      </p:sp>
+      <p:sp>
+        <p:nvSpPr>
           <p:cNvPr id="11" name="TextBox 10"/>
           <p:cNvSpPr txBox="1"/>
           <p:nvPr/>
         </p:nvSpPr>
         <p:spPr>
           <a:xfrm>
-            <a:off x="365760" y="1892808"/>
-            <a:ext cx="457200" cy="320040"/>
-          </a:xfrm>
-          <a:prstGeom prst="rect">
-            <a:avLst/>
-          </a:prstGeom>
-          <a:noFill/>
-        </p:spPr>
-        <p:txBody>
-          <a:bodyPr wrap="square">
-            <a:spAutoFit/>
-          </a:bodyPr>
-          <a:lstStyle/>
-          <a:p>
-            <a:pPr algn="ctr">
-              <a:defRPr sz="1600" b="0">
-                <a:solidFill>
-                  <a:srgbClr val="009BA4"/>
-                </a:solidFill>
-                <a:latin typeface="Arial"/>
-              </a:defRPr>
-            </a:pPr>
-            <a:r>
-              <a:t>⚠️</a:t>
+            <a:off x="5852160" y="1417320"/>
+            <a:ext cx="1828800" cy="320040"/>
+          </a:xfrm>
+          <a:prstGeom prst="rect">
+            <a:avLst/>
+          </a:prstGeom>
+          <a:noFill/>
+        </p:spPr>
+        <p:txBody>
+          <a:bodyPr wrap="square">
+            <a:spAutoFit/>
+          </a:bodyPr>
+          <a:lstStyle/>
+          <a:p>
+            <a:pPr algn="l">
+              <a:defRPr sz="1300" b="1">
+                <a:solidFill>
+                  <a:srgbClr val="007B83"/>
+                </a:solidFill>
+                <a:latin typeface="Arial"/>
+              </a:defRPr>
+            </a:pPr>
+            <a:r>
+              <a:t>Resilience</a:t>
             </a:r>
           </a:p>
         </p:txBody>
@@ -9271,44 +8289,8 @@
         </p:nvSpPr>
         <p:spPr>
           <a:xfrm>
-            <a:off x="822960" y="1874520"/>
-            <a:ext cx="3657600" cy="274320"/>
-          </a:xfrm>
-          <a:prstGeom prst="rect">
-            <a:avLst/>
-          </a:prstGeom>
-          <a:noFill/>
-        </p:spPr>
-        <p:txBody>
-          <a:bodyPr wrap="square">
-            <a:spAutoFit/>
-          </a:bodyPr>
-          <a:lstStyle/>
-          <a:p>
-            <a:pPr algn="l">
-              <a:defRPr sz="1200" b="1">
-                <a:solidFill>
-                  <a:srgbClr val="333333"/>
-                </a:solidFill>
-                <a:latin typeface="Arial"/>
-              </a:defRPr>
-            </a:pPr>
-            <a:r>
-              <a:t>siri_route vs siri_routes (PLURAL!)</a:t>
-            </a:r>
-          </a:p>
-        </p:txBody>
-      </p:sp>
-      <p:sp>
-        <p:nvSpPr>
-          <p:cNvPr id="13" name="TextBox 12"/>
-          <p:cNvSpPr txBox="1"/>
-          <p:nvPr/>
-        </p:nvSpPr>
-        <p:spPr>
-          <a:xfrm>
-            <a:off x="822960" y="2148840"/>
-            <a:ext cx="10515600" cy="274320"/>
+            <a:off x="5852160" y="1719072"/>
+            <a:ext cx="5486400" cy="274320"/>
           </a:xfrm>
           <a:prstGeom prst="rect">
             <a:avLst/>
@@ -9330,27 +8312,27 @@
               </a:defRPr>
             </a:pPr>
             <a:r>
-              <a:t>באג נסתר: Stride מתעלם מפרמטר ביחיד ומחזיר הכל</a:t>
-            </a:r>
-          </a:p>
-        </p:txBody>
-      </p:sp>
-      <p:sp>
-        <p:nvSpPr>
-          <p:cNvPr id="14" name="Rounded Rectangle 13"/>
+              <a:t>ניסיונות חוזרים, fallback, buffer</a:t>
+            </a:r>
+          </a:p>
+        </p:txBody>
+      </p:sp>
+      <p:sp>
+        <p:nvSpPr>
+          <p:cNvPr id="13" name="Rounded Rectangle 12"/>
           <p:cNvSpPr/>
           <p:nvPr/>
         </p:nvSpPr>
         <p:spPr>
           <a:xfrm>
-            <a:off x="274320" y="2505456"/>
-            <a:ext cx="11430000" cy="594360"/>
+            <a:off x="5303520" y="2148840"/>
+            <a:ext cx="6400800" cy="685800"/>
           </a:xfrm>
           <a:prstGeom prst="roundRect">
             <a:avLst/>
           </a:prstGeom>
           <a:solidFill>
-            <a:srgbClr val="E0F7FA"/>
+            <a:srgbClr val="F5F5F5"/>
           </a:solidFill>
           <a:ln w="12700">
             <a:solidFill>
@@ -9382,36 +8364,72 @@
       </p:sp>
       <p:sp>
         <p:nvSpPr>
+          <p:cNvPr id="14" name="TextBox 13"/>
+          <p:cNvSpPr txBox="1"/>
+          <p:nvPr/>
+        </p:nvSpPr>
+        <p:spPr>
+          <a:xfrm>
+            <a:off x="5394960" y="2194560"/>
+            <a:ext cx="457200" cy="365760"/>
+          </a:xfrm>
+          <a:prstGeom prst="rect">
+            <a:avLst/>
+          </a:prstGeom>
+          <a:noFill/>
+        </p:spPr>
+        <p:txBody>
+          <a:bodyPr wrap="square">
+            <a:spAutoFit/>
+          </a:bodyPr>
+          <a:lstStyle/>
+          <a:p>
+            <a:pPr algn="ctr">
+              <a:defRPr sz="1800" b="0">
+                <a:solidFill>
+                  <a:srgbClr val="009BA4"/>
+                </a:solidFill>
+                <a:latin typeface="Arial"/>
+              </a:defRPr>
+            </a:pPr>
+            <a:r>
+              <a:t>🧩</a:t>
+            </a:r>
+          </a:p>
+        </p:txBody>
+      </p:sp>
+      <p:sp>
+        <p:nvSpPr>
           <p:cNvPr id="15" name="TextBox 14"/>
           <p:cNvSpPr txBox="1"/>
           <p:nvPr/>
         </p:nvSpPr>
         <p:spPr>
           <a:xfrm>
-            <a:off x="365760" y="2551176"/>
-            <a:ext cx="457200" cy="320040"/>
-          </a:xfrm>
-          <a:prstGeom prst="rect">
-            <a:avLst/>
-          </a:prstGeom>
-          <a:noFill/>
-        </p:spPr>
-        <p:txBody>
-          <a:bodyPr wrap="square">
-            <a:spAutoFit/>
-          </a:bodyPr>
-          <a:lstStyle/>
-          <a:p>
-            <a:pPr algn="ctr">
-              <a:defRPr sz="1600" b="0">
-                <a:solidFill>
-                  <a:srgbClr val="009BA4"/>
-                </a:solidFill>
-                <a:latin typeface="Arial"/>
-              </a:defRPr>
-            </a:pPr>
-            <a:r>
-              <a:t>📉</a:t>
+            <a:off x="5852160" y="2194560"/>
+            <a:ext cx="1828800" cy="320040"/>
+          </a:xfrm>
+          <a:prstGeom prst="rect">
+            <a:avLst/>
+          </a:prstGeom>
+          <a:noFill/>
+        </p:spPr>
+        <p:txBody>
+          <a:bodyPr wrap="square">
+            <a:spAutoFit/>
+          </a:bodyPr>
+          <a:lstStyle/>
+          <a:p>
+            <a:pPr algn="l">
+              <a:defRPr sz="1300" b="1">
+                <a:solidFill>
+                  <a:srgbClr val="007B83"/>
+                </a:solidFill>
+                <a:latin typeface="Arial"/>
+              </a:defRPr>
+            </a:pPr>
+            <a:r>
+              <a:t>Modularity</a:t>
             </a:r>
           </a:p>
         </p:txBody>
@@ -9424,44 +8442,8 @@
         </p:nvSpPr>
         <p:spPr>
           <a:xfrm>
-            <a:off x="822960" y="2532888"/>
-            <a:ext cx="3657600" cy="274320"/>
-          </a:xfrm>
-          <a:prstGeom prst="rect">
-            <a:avLst/>
-          </a:prstGeom>
-          <a:noFill/>
-        </p:spPr>
-        <p:txBody>
-          <a:bodyPr wrap="square">
-            <a:spAutoFit/>
-          </a:bodyPr>
-          <a:lstStyle/>
-          <a:p>
-            <a:pPr algn="l">
-              <a:defRPr sz="1200" b="1">
-                <a:solidFill>
-                  <a:srgbClr val="333333"/>
-                </a:solidFill>
-                <a:latin typeface="Arial"/>
-              </a:defRPr>
-            </a:pPr>
-            <a:r>
-              <a:t>Elasticsearch OOM ב-VM מוגבל</a:t>
-            </a:r>
-          </a:p>
-        </p:txBody>
-      </p:sp>
-      <p:sp>
-        <p:nvSpPr>
-          <p:cNvPr id="17" name="TextBox 16"/>
-          <p:cNvSpPr txBox="1"/>
-          <p:nvPr/>
-        </p:nvSpPr>
-        <p:spPr>
-          <a:xfrm>
-            <a:off x="822960" y="2807208"/>
-            <a:ext cx="10515600" cy="274320"/>
+            <a:off x="5852160" y="2496312"/>
+            <a:ext cx="5486400" cy="274320"/>
           </a:xfrm>
           <a:prstGeom prst="rect">
             <a:avLst/>
@@ -9483,27 +8465,27 @@
               </a:defRPr>
             </a:pPr>
             <a:r>
-              <a:t>פתרון: הגירה ל-Elastic Cloud — 7M+ רשומות, אפס עומס על ה-VM</a:t>
-            </a:r>
-          </a:p>
-        </p:txBody>
-      </p:sp>
-      <p:sp>
-        <p:nvSpPr>
-          <p:cNvPr id="18" name="Rounded Rectangle 17"/>
+              <a:t>כל producer/transformer בקובץ נפרד</a:t>
+            </a:r>
+          </a:p>
+        </p:txBody>
+      </p:sp>
+      <p:sp>
+        <p:nvSpPr>
+          <p:cNvPr id="17" name="Rounded Rectangle 16"/>
           <p:cNvSpPr/>
           <p:nvPr/>
         </p:nvSpPr>
         <p:spPr>
           <a:xfrm>
-            <a:off x="274320" y="3163824"/>
-            <a:ext cx="11430000" cy="594360"/>
+            <a:off x="5303520" y="2926080"/>
+            <a:ext cx="6400800" cy="685800"/>
           </a:xfrm>
           <a:prstGeom prst="roundRect">
             <a:avLst/>
           </a:prstGeom>
           <a:solidFill>
-            <a:srgbClr val="FFFFFF"/>
+            <a:srgbClr val="F5F5F5"/>
           </a:solidFill>
           <a:ln w="12700">
             <a:solidFill>
@@ -9535,36 +8517,72 @@
       </p:sp>
       <p:sp>
         <p:nvSpPr>
+          <p:cNvPr id="18" name="TextBox 17"/>
+          <p:cNvSpPr txBox="1"/>
+          <p:nvPr/>
+        </p:nvSpPr>
+        <p:spPr>
+          <a:xfrm>
+            <a:off x="5394960" y="2971800"/>
+            <a:ext cx="457200" cy="365760"/>
+          </a:xfrm>
+          <a:prstGeom prst="rect">
+            <a:avLst/>
+          </a:prstGeom>
+          <a:noFill/>
+        </p:spPr>
+        <p:txBody>
+          <a:bodyPr wrap="square">
+            <a:spAutoFit/>
+          </a:bodyPr>
+          <a:lstStyle/>
+          <a:p>
+            <a:pPr algn="ctr">
+              <a:defRPr sz="1800" b="0">
+                <a:solidFill>
+                  <a:srgbClr val="009BA4"/>
+                </a:solidFill>
+                <a:latin typeface="Arial"/>
+              </a:defRPr>
+            </a:pPr>
+            <a:r>
+              <a:t>📦</a:t>
+            </a:r>
+          </a:p>
+        </p:txBody>
+      </p:sp>
+      <p:sp>
+        <p:nvSpPr>
           <p:cNvPr id="19" name="TextBox 18"/>
           <p:cNvSpPr txBox="1"/>
           <p:nvPr/>
         </p:nvSpPr>
         <p:spPr>
           <a:xfrm>
-            <a:off x="365760" y="3209544"/>
-            <a:ext cx="457200" cy="320040"/>
-          </a:xfrm>
-          <a:prstGeom prst="rect">
-            <a:avLst/>
-          </a:prstGeom>
-          <a:noFill/>
-        </p:spPr>
-        <p:txBody>
-          <a:bodyPr wrap="square">
-            <a:spAutoFit/>
-          </a:bodyPr>
-          <a:lstStyle/>
-          <a:p>
-            <a:pPr algn="ctr">
-              <a:defRPr sz="1600" b="0">
-                <a:solidFill>
-                  <a:srgbClr val="009BA4"/>
-                </a:solidFill>
-                <a:latin typeface="Arial"/>
-              </a:defRPr>
-            </a:pPr>
-            <a:r>
-              <a:t>💤</a:t>
+            <a:off x="5852160" y="2971800"/>
+            <a:ext cx="1828800" cy="320040"/>
+          </a:xfrm>
+          <a:prstGeom prst="rect">
+            <a:avLst/>
+          </a:prstGeom>
+          <a:noFill/>
+        </p:spPr>
+        <p:txBody>
+          <a:bodyPr wrap="square">
+            <a:spAutoFit/>
+          </a:bodyPr>
+          <a:lstStyle/>
+          <a:p>
+            <a:pPr algn="l">
+              <a:defRPr sz="1300" b="1">
+                <a:solidFill>
+                  <a:srgbClr val="007B83"/>
+                </a:solidFill>
+                <a:latin typeface="Arial"/>
+              </a:defRPr>
+            </a:pPr>
+            <a:r>
+              <a:t>Containerization</a:t>
             </a:r>
           </a:p>
         </p:txBody>
@@ -9577,44 +8595,8 @@
         </p:nvSpPr>
         <p:spPr>
           <a:xfrm>
-            <a:off x="822960" y="3191256"/>
-            <a:ext cx="3657600" cy="274320"/>
-          </a:xfrm>
-          <a:prstGeom prst="rect">
-            <a:avLst/>
-          </a:prstGeom>
-          <a:noFill/>
-        </p:spPr>
-        <p:txBody>
-          <a:bodyPr wrap="square">
-            <a:spAutoFit/>
-          </a:bodyPr>
-          <a:lstStyle/>
-          <a:p>
-            <a:pPr algn="l">
-              <a:defRPr sz="1200" b="1">
-                <a:solidFill>
-                  <a:srgbClr val="333333"/>
-                </a:solidFill>
-                <a:latin typeface="Arial"/>
-              </a:defRPr>
-            </a:pPr>
-            <a:r>
-              <a:t>מצב שינה — פערים בנתונים</a:t>
-            </a:r>
-          </a:p>
-        </p:txBody>
-      </p:sp>
-      <p:sp>
-        <p:nvSpPr>
-          <p:cNvPr id="21" name="TextBox 20"/>
-          <p:cNvSpPr txBox="1"/>
-          <p:nvPr/>
-        </p:nvSpPr>
-        <p:spPr>
-          <a:xfrm>
-            <a:off x="822960" y="3465576"/>
-            <a:ext cx="10515600" cy="274320"/>
+            <a:off x="5852160" y="3273552"/>
+            <a:ext cx="5486400" cy="274320"/>
           </a:xfrm>
           <a:prstGeom prst="rect">
             <a:avLst/>
@@ -9636,27 +8618,27 @@
               </a:defRPr>
             </a:pPr>
             <a:r>
-              <a:t>@reboot לא עובד ב-resume! תוקן ל-*/15 cron + סריקה שעה-שעה</a:t>
-            </a:r>
-          </a:p>
-        </p:txBody>
-      </p:sp>
-      <p:sp>
-        <p:nvSpPr>
-          <p:cNvPr id="22" name="Rounded Rectangle 21"/>
+              <a:t>כל שירות ב-Docker מבודד</a:t>
+            </a:r>
+          </a:p>
+        </p:txBody>
+      </p:sp>
+      <p:sp>
+        <p:nvSpPr>
+          <p:cNvPr id="21" name="Rounded Rectangle 20"/>
           <p:cNvSpPr/>
           <p:nvPr/>
         </p:nvSpPr>
         <p:spPr>
           <a:xfrm>
-            <a:off x="274320" y="3822192"/>
-            <a:ext cx="11430000" cy="594360"/>
+            <a:off x="5303520" y="3703320"/>
+            <a:ext cx="6400800" cy="685800"/>
           </a:xfrm>
           <a:prstGeom prst="roundRect">
             <a:avLst/>
           </a:prstGeom>
           <a:solidFill>
-            <a:srgbClr val="E0F7FA"/>
+            <a:srgbClr val="F5F5F5"/>
           </a:solidFill>
           <a:ln w="12700">
             <a:solidFill>
@@ -9688,36 +8670,72 @@
       </p:sp>
       <p:sp>
         <p:nvSpPr>
+          <p:cNvPr id="22" name="TextBox 21"/>
+          <p:cNvSpPr txBox="1"/>
+          <p:nvPr/>
+        </p:nvSpPr>
+        <p:spPr>
+          <a:xfrm>
+            <a:off x="5394960" y="3749040"/>
+            <a:ext cx="457200" cy="365760"/>
+          </a:xfrm>
+          <a:prstGeom prst="rect">
+            <a:avLst/>
+          </a:prstGeom>
+          <a:noFill/>
+        </p:spPr>
+        <p:txBody>
+          <a:bodyPr wrap="square">
+            <a:spAutoFit/>
+          </a:bodyPr>
+          <a:lstStyle/>
+          <a:p>
+            <a:pPr algn="ctr">
+              <a:defRPr sz="1800" b="0">
+                <a:solidFill>
+                  <a:srgbClr val="009BA4"/>
+                </a:solidFill>
+                <a:latin typeface="Arial"/>
+              </a:defRPr>
+            </a:pPr>
+            <a:r>
+              <a:t>🛡️</a:t>
+            </a:r>
+          </a:p>
+        </p:txBody>
+      </p:sp>
+      <p:sp>
+        <p:nvSpPr>
           <p:cNvPr id="23" name="TextBox 22"/>
           <p:cNvSpPr txBox="1"/>
           <p:nvPr/>
         </p:nvSpPr>
         <p:spPr>
           <a:xfrm>
-            <a:off x="365760" y="3867912"/>
-            <a:ext cx="457200" cy="320040"/>
-          </a:xfrm>
-          <a:prstGeom prst="rect">
-            <a:avLst/>
-          </a:prstGeom>
-          <a:noFill/>
-        </p:spPr>
-        <p:txBody>
-          <a:bodyPr wrap="square">
-            <a:spAutoFit/>
-          </a:bodyPr>
-          <a:lstStyle/>
-          <a:p>
-            <a:pPr algn="ctr">
-              <a:defRPr sz="1600" b="0">
-                <a:solidFill>
-                  <a:srgbClr val="009BA4"/>
-                </a:solidFill>
-                <a:latin typeface="Arial"/>
-              </a:defRPr>
-            </a:pPr>
-            <a:r>
-              <a:t>🐌</a:t>
+            <a:off x="5852160" y="3749040"/>
+            <a:ext cx="1828800" cy="320040"/>
+          </a:xfrm>
+          <a:prstGeom prst="rect">
+            <a:avLst/>
+          </a:prstGeom>
+          <a:noFill/>
+        </p:spPr>
+        <p:txBody>
+          <a:bodyPr wrap="square">
+            <a:spAutoFit/>
+          </a:bodyPr>
+          <a:lstStyle/>
+          <a:p>
+            <a:pPr algn="l">
+              <a:defRPr sz="1300" b="1">
+                <a:solidFill>
+                  <a:srgbClr val="007B83"/>
+                </a:solidFill>
+                <a:latin typeface="Arial"/>
+              </a:defRPr>
+            </a:pPr>
+            <a:r>
+              <a:t>Store &amp; Forward</a:t>
             </a:r>
           </a:p>
         </p:txBody>
@@ -9730,44 +8748,8 @@
         </p:nvSpPr>
         <p:spPr>
           <a:xfrm>
-            <a:off x="822960" y="3849624"/>
-            <a:ext cx="3657600" cy="274320"/>
-          </a:xfrm>
-          <a:prstGeom prst="rect">
-            <a:avLst/>
-          </a:prstGeom>
-          <a:noFill/>
-        </p:spPr>
-        <p:txBody>
-          <a:bodyPr wrap="square">
-            <a:spAutoFit/>
-          </a:bodyPr>
-          <a:lstStyle/>
-          <a:p>
-            <a:pPr algn="l">
-              <a:defRPr sz="1200" b="1">
-                <a:solidFill>
-                  <a:srgbClr val="333333"/>
-                </a:solidFill>
-                <a:latin typeface="Arial"/>
-              </a:defRPr>
-            </a:pPr>
-            <a:r>
-              <a:t>/status timeout (30+ שניות)</a:t>
-            </a:r>
-          </a:p>
-        </p:txBody>
-      </p:sp>
-      <p:sp>
-        <p:nvSpPr>
-          <p:cNvPr id="25" name="TextBox 24"/>
-          <p:cNvSpPr txBox="1"/>
-          <p:nvPr/>
-        </p:nvSpPr>
-        <p:spPr>
-          <a:xfrm>
-            <a:off x="822960" y="4123944"/>
-            <a:ext cx="10515600" cy="274320"/>
+            <a:off x="5852160" y="4050792"/>
+            <a:ext cx="5486400" cy="274320"/>
           </a:xfrm>
           <a:prstGeom prst="rect">
             <a:avLst/>
@@ -9789,27 +8771,27 @@
               </a:defRPr>
             </a:pPr>
             <a:r>
-              <a:t>boto3 client per-request → module-level singleton → 3 שניות</a:t>
-            </a:r>
-          </a:p>
-        </p:txBody>
-      </p:sp>
-      <p:sp>
-        <p:nvSpPr>
-          <p:cNvPr id="26" name="Rounded Rectangle 25"/>
+              <a:t>buffer מקומי + flush אוטומטי</a:t>
+            </a:r>
+          </a:p>
+        </p:txBody>
+      </p:sp>
+      <p:sp>
+        <p:nvSpPr>
+          <p:cNvPr id="25" name="Rounded Rectangle 24"/>
           <p:cNvSpPr/>
           <p:nvPr/>
         </p:nvSpPr>
         <p:spPr>
           <a:xfrm>
-            <a:off x="274320" y="4480559"/>
-            <a:ext cx="11430000" cy="594360"/>
+            <a:off x="5303520" y="4480560"/>
+            <a:ext cx="6400800" cy="685800"/>
           </a:xfrm>
           <a:prstGeom prst="roundRect">
             <a:avLst/>
           </a:prstGeom>
           <a:solidFill>
-            <a:srgbClr val="FFFFFF"/>
+            <a:srgbClr val="F5F5F5"/>
           </a:solidFill>
           <a:ln w="12700">
             <a:solidFill>
@@ -9841,36 +8823,72 @@
       </p:sp>
       <p:sp>
         <p:nvSpPr>
+          <p:cNvPr id="26" name="TextBox 25"/>
+          <p:cNvSpPr txBox="1"/>
+          <p:nvPr/>
+        </p:nvSpPr>
+        <p:spPr>
+          <a:xfrm>
+            <a:off x="5394960" y="4526280"/>
+            <a:ext cx="457200" cy="365760"/>
+          </a:xfrm>
+          <a:prstGeom prst="rect">
+            <a:avLst/>
+          </a:prstGeom>
+          <a:noFill/>
+        </p:spPr>
+        <p:txBody>
+          <a:bodyPr wrap="square">
+            <a:spAutoFit/>
+          </a:bodyPr>
+          <a:lstStyle/>
+          <a:p>
+            <a:pPr algn="ctr">
+              <a:defRPr sz="1800" b="0">
+                <a:solidFill>
+                  <a:srgbClr val="009BA4"/>
+                </a:solidFill>
+                <a:latin typeface="Arial"/>
+              </a:defRPr>
+            </a:pPr>
+            <a:r>
+              <a:t>⏰</a:t>
+            </a:r>
+          </a:p>
+        </p:txBody>
+      </p:sp>
+      <p:sp>
+        <p:nvSpPr>
           <p:cNvPr id="27" name="TextBox 26"/>
           <p:cNvSpPr txBox="1"/>
           <p:nvPr/>
         </p:nvSpPr>
         <p:spPr>
           <a:xfrm>
-            <a:off x="365760" y="4526279"/>
-            <a:ext cx="457200" cy="320040"/>
-          </a:xfrm>
-          <a:prstGeom prst="rect">
-            <a:avLst/>
-          </a:prstGeom>
-          <a:noFill/>
-        </p:spPr>
-        <p:txBody>
-          <a:bodyPr wrap="square">
-            <a:spAutoFit/>
-          </a:bodyPr>
-          <a:lstStyle/>
-          <a:p>
-            <a:pPr algn="ctr">
-              <a:defRPr sz="1600" b="0">
-                <a:solidFill>
-                  <a:srgbClr val="009BA4"/>
-                </a:solidFill>
-                <a:latin typeface="Arial"/>
-              </a:defRPr>
-            </a:pPr>
-            <a:r>
-              <a:t>🗃️</a:t>
+            <a:off x="5852160" y="4526280"/>
+            <a:ext cx="1828800" cy="320040"/>
+          </a:xfrm>
+          <a:prstGeom prst="rect">
+            <a:avLst/>
+          </a:prstGeom>
+          <a:noFill/>
+        </p:spPr>
+        <p:txBody>
+          <a:bodyPr wrap="square">
+            <a:spAutoFit/>
+          </a:bodyPr>
+          <a:lstStyle/>
+          <a:p>
+            <a:pPr algn="l">
+              <a:defRPr sz="1300" b="1">
+                <a:solidFill>
+                  <a:srgbClr val="007B83"/>
+                </a:solidFill>
+                <a:latin typeface="Arial"/>
+              </a:defRPr>
+            </a:pPr>
+            <a:r>
+              <a:t>Auto-Recovery</a:t>
             </a:r>
           </a:p>
         </p:txBody>
@@ -9883,44 +8901,8 @@
         </p:nvSpPr>
         <p:spPr>
           <a:xfrm>
-            <a:off x="822960" y="4507991"/>
-            <a:ext cx="3657600" cy="274320"/>
-          </a:xfrm>
-          <a:prstGeom prst="rect">
-            <a:avLst/>
-          </a:prstGeom>
-          <a:noFill/>
-        </p:spPr>
-        <p:txBody>
-          <a:bodyPr wrap="square">
-            <a:spAutoFit/>
-          </a:bodyPr>
-          <a:lstStyle/>
-          <a:p>
-            <a:pPr algn="l">
-              <a:defRPr sz="1200" b="1">
-                <a:solidFill>
-                  <a:srgbClr val="333333"/>
-                </a:solidFill>
-                <a:latin typeface="Arial"/>
-              </a:defRPr>
-            </a:pPr>
-            <a:r>
-              <a:t>MinIO endpoint: localhost vs minio:9000</a:t>
-            </a:r>
-          </a:p>
-        </p:txBody>
-      </p:sp>
-      <p:sp>
-        <p:nvSpPr>
-          <p:cNvPr id="29" name="TextBox 28"/>
-          <p:cNvSpPr txBox="1"/>
-          <p:nvPr/>
-        </p:nvSpPr>
-        <p:spPr>
-          <a:xfrm>
-            <a:off x="822960" y="4782311"/>
-            <a:ext cx="10515600" cy="274320"/>
+            <a:off x="5852160" y="4828032"/>
+            <a:ext cx="5486400" cy="274320"/>
           </a:xfrm>
           <a:prstGeom prst="rect">
             <a:avLst/>
@@ -9942,27 +8924,27 @@
               </a:defRPr>
             </a:pPr>
             <a:r>
-              <a:t>סקריפטים על host חייבים localhost, Docker משתמש ב-minio</a:t>
-            </a:r>
-          </a:p>
-        </p:txBody>
-      </p:sp>
-      <p:sp>
-        <p:nvSpPr>
-          <p:cNvPr id="30" name="Rounded Rectangle 29"/>
+              <a:t>wake_backfill + watchdog + cron</a:t>
+            </a:r>
+          </a:p>
+        </p:txBody>
+      </p:sp>
+      <p:sp>
+        <p:nvSpPr>
+          <p:cNvPr id="29" name="Rounded Rectangle 28"/>
           <p:cNvSpPr/>
           <p:nvPr/>
         </p:nvSpPr>
         <p:spPr>
           <a:xfrm>
-            <a:off x="274320" y="5138928"/>
-            <a:ext cx="11430000" cy="594360"/>
+            <a:off x="5303520" y="5257800"/>
+            <a:ext cx="6400800" cy="685800"/>
           </a:xfrm>
           <a:prstGeom prst="roundRect">
             <a:avLst/>
           </a:prstGeom>
           <a:solidFill>
-            <a:srgbClr val="E0F7FA"/>
+            <a:srgbClr val="F5F5F5"/>
           </a:solidFill>
           <a:ln w="12700">
             <a:solidFill>
@@ -9994,36 +8976,72 @@
       </p:sp>
       <p:sp>
         <p:nvSpPr>
+          <p:cNvPr id="30" name="TextBox 29"/>
+          <p:cNvSpPr txBox="1"/>
+          <p:nvPr/>
+        </p:nvSpPr>
+        <p:spPr>
+          <a:xfrm>
+            <a:off x="5394960" y="5303520"/>
+            <a:ext cx="457200" cy="365760"/>
+          </a:xfrm>
+          <a:prstGeom prst="rect">
+            <a:avLst/>
+          </a:prstGeom>
+          <a:noFill/>
+        </p:spPr>
+        <p:txBody>
+          <a:bodyPr wrap="square">
+            <a:spAutoFit/>
+          </a:bodyPr>
+          <a:lstStyle/>
+          <a:p>
+            <a:pPr algn="ctr">
+              <a:defRPr sz="1800" b="0">
+                <a:solidFill>
+                  <a:srgbClr val="009BA4"/>
+                </a:solidFill>
+                <a:latin typeface="Arial"/>
+              </a:defRPr>
+            </a:pPr>
+            <a:r>
+              <a:t>🔍</a:t>
+            </a:r>
+          </a:p>
+        </p:txBody>
+      </p:sp>
+      <p:sp>
+        <p:nvSpPr>
           <p:cNvPr id="31" name="TextBox 30"/>
           <p:cNvSpPr txBox="1"/>
           <p:nvPr/>
         </p:nvSpPr>
         <p:spPr>
           <a:xfrm>
-            <a:off x="365760" y="5184648"/>
-            <a:ext cx="457200" cy="320040"/>
-          </a:xfrm>
-          <a:prstGeom prst="rect">
-            <a:avLst/>
-          </a:prstGeom>
-          <a:noFill/>
-        </p:spPr>
-        <p:txBody>
-          <a:bodyPr wrap="square">
-            <a:spAutoFit/>
-          </a:bodyPr>
-          <a:lstStyle/>
-          <a:p>
-            <a:pPr algn="ctr">
-              <a:defRPr sz="1600" b="0">
-                <a:solidFill>
-                  <a:srgbClr val="009BA4"/>
-                </a:solidFill>
-                <a:latin typeface="Arial"/>
-              </a:defRPr>
-            </a:pPr>
-            <a:r>
-              <a:t>🔄</a:t>
+            <a:off x="5852160" y="5303520"/>
+            <a:ext cx="1828800" cy="320040"/>
+          </a:xfrm>
+          <a:prstGeom prst="rect">
+            <a:avLst/>
+          </a:prstGeom>
+          <a:noFill/>
+        </p:spPr>
+        <p:txBody>
+          <a:bodyPr wrap="square">
+            <a:spAutoFit/>
+          </a:bodyPr>
+          <a:lstStyle/>
+          <a:p>
+            <a:pPr algn="l">
+              <a:defRPr sz="1300" b="1">
+                <a:solidFill>
+                  <a:srgbClr val="007B83"/>
+                </a:solidFill>
+                <a:latin typeface="Arial"/>
+              </a:defRPr>
+            </a:pPr>
+            <a:r>
+              <a:t>Observability</a:t>
             </a:r>
           </a:p>
         </p:txBody>
@@ -10036,44 +9054,8 @@
         </p:nvSpPr>
         <p:spPr>
           <a:xfrm>
-            <a:off x="822960" y="5166360"/>
-            <a:ext cx="3657600" cy="274320"/>
-          </a:xfrm>
-          <a:prstGeom prst="rect">
-            <a:avLst/>
-          </a:prstGeom>
-          <a:noFill/>
-        </p:spPr>
-        <p:txBody>
-          <a:bodyPr wrap="square">
-            <a:spAutoFit/>
-          </a:bodyPr>
-          <a:lstStyle/>
-          <a:p>
-            <a:pPr algn="l">
-              <a:defRPr sz="1200" b="1">
-                <a:solidFill>
-                  <a:srgbClr val="333333"/>
-                </a:solidFill>
-                <a:latin typeface="Arial"/>
-              </a:defRPr>
-            </a:pPr>
-            <a:r>
-              <a:t>Kafka InconsistentClusterIdException</a:t>
-            </a:r>
-          </a:p>
-        </p:txBody>
-      </p:sp>
-      <p:sp>
-        <p:nvSpPr>
-          <p:cNvPr id="33" name="TextBox 32"/>
-          <p:cNvSpPr txBox="1"/>
-          <p:nvPr/>
-        </p:nvSpPr>
-        <p:spPr>
-          <a:xfrm>
-            <a:off x="822960" y="5440680"/>
-            <a:ext cx="10515600" cy="274320"/>
+            <a:off x="5852160" y="5605272"/>
+            <a:ext cx="5486400" cy="274320"/>
           </a:xfrm>
           <a:prstGeom prst="rect">
             <a:avLst/>
@@ -10095,160 +9077,7 @@
               </a:defRPr>
             </a:pPr>
             <a:r>
-              <a:t>ניקוי volume דרך container זמני — בלי sudo</a:t>
-            </a:r>
-          </a:p>
-        </p:txBody>
-      </p:sp>
-      <p:sp>
-        <p:nvSpPr>
-          <p:cNvPr id="34" name="Rounded Rectangle 33"/>
-          <p:cNvSpPr/>
-          <p:nvPr/>
-        </p:nvSpPr>
-        <p:spPr>
-          <a:xfrm>
-            <a:off x="274320" y="5797296"/>
-            <a:ext cx="11430000" cy="594360"/>
-          </a:xfrm>
-          <a:prstGeom prst="roundRect">
-            <a:avLst/>
-          </a:prstGeom>
-          <a:solidFill>
-            <a:srgbClr val="FFFFFF"/>
-          </a:solidFill>
-          <a:ln w="12700">
-            <a:solidFill>
-              <a:srgbClr val="4DD0E1"/>
-            </a:solidFill>
-          </a:ln>
-        </p:spPr>
-        <p:style>
-          <a:lnRef idx="1">
-            <a:schemeClr val="accent1"/>
-          </a:lnRef>
-          <a:fillRef idx="3">
-            <a:schemeClr val="accent1"/>
-          </a:fillRef>
-          <a:effectRef idx="2">
-            <a:schemeClr val="accent1"/>
-          </a:effectRef>
-          <a:fontRef idx="minor">
-            <a:schemeClr val="lt1"/>
-          </a:fontRef>
-        </p:style>
-        <p:txBody>
-          <a:bodyPr rtlCol="0" anchor="ctr"/>
-          <a:lstStyle/>
-          <a:p>
-            <a:pPr algn="ctr"/>
-          </a:p>
-        </p:txBody>
-      </p:sp>
-      <p:sp>
-        <p:nvSpPr>
-          <p:cNvPr id="35" name="TextBox 34"/>
-          <p:cNvSpPr txBox="1"/>
-          <p:nvPr/>
-        </p:nvSpPr>
-        <p:spPr>
-          <a:xfrm>
-            <a:off x="365760" y="5843016"/>
-            <a:ext cx="457200" cy="320040"/>
-          </a:xfrm>
-          <a:prstGeom prst="rect">
-            <a:avLst/>
-          </a:prstGeom>
-          <a:noFill/>
-        </p:spPr>
-        <p:txBody>
-          <a:bodyPr wrap="square">
-            <a:spAutoFit/>
-          </a:bodyPr>
-          <a:lstStyle/>
-          <a:p>
-            <a:pPr algn="ctr">
-              <a:defRPr sz="1600" b="0">
-                <a:solidFill>
-                  <a:srgbClr val="009BA4"/>
-                </a:solidFill>
-                <a:latin typeface="Arial"/>
-              </a:defRPr>
-            </a:pPr>
-            <a:r>
-              <a:t>💻</a:t>
-            </a:r>
-          </a:p>
-        </p:txBody>
-      </p:sp>
-      <p:sp>
-        <p:nvSpPr>
-          <p:cNvPr id="36" name="TextBox 35"/>
-          <p:cNvSpPr txBox="1"/>
-          <p:nvPr/>
-        </p:nvSpPr>
-        <p:spPr>
-          <a:xfrm>
-            <a:off x="822960" y="5824728"/>
-            <a:ext cx="3657600" cy="274320"/>
-          </a:xfrm>
-          <a:prstGeom prst="rect">
-            <a:avLst/>
-          </a:prstGeom>
-          <a:noFill/>
-        </p:spPr>
-        <p:txBody>
-          <a:bodyPr wrap="square">
-            <a:spAutoFit/>
-          </a:bodyPr>
-          <a:lstStyle/>
-          <a:p>
-            <a:pPr algn="l">
-              <a:defRPr sz="1200" b="1">
-                <a:solidFill>
-                  <a:srgbClr val="333333"/>
-                </a:solidFill>
-                <a:latin typeface="Arial"/>
-              </a:defRPr>
-            </a:pPr>
-            <a:r>
-              <a:t>Docker stop — permission denied</a:t>
-            </a:r>
-          </a:p>
-        </p:txBody>
-      </p:sp>
-      <p:sp>
-        <p:nvSpPr>
-          <p:cNvPr id="37" name="TextBox 36"/>
-          <p:cNvSpPr txBox="1"/>
-          <p:nvPr/>
-        </p:nvSpPr>
-        <p:spPr>
-          <a:xfrm>
-            <a:off x="822960" y="6099048"/>
-            <a:ext cx="10515600" cy="274320"/>
-          </a:xfrm>
-          <a:prstGeom prst="rect">
-            <a:avLst/>
-          </a:prstGeom>
-          <a:noFill/>
-        </p:spPr>
-        <p:txBody>
-          <a:bodyPr wrap="square">
-            <a:spAutoFit/>
-          </a:bodyPr>
-          <a:lstStyle/>
-          <a:p>
-            <a:pPr algn="l">
-              <a:defRPr sz="1000" b="0">
-                <a:solidFill>
-                  <a:srgbClr val="666666"/>
-                </a:solidFill>
-                <a:latin typeface="Arial"/>
-              </a:defRPr>
-            </a:pPr>
-            <a:r>
-              <a:t>containers שהורצו ע״י root: פתרון docker exec kill</a:t>
+              <a:t>logs, /health, /status, watchdog</a:t>
             </a:r>
           </a:p>
         </p:txBody>
@@ -10353,7 +9182,7 @@
               </a:defRPr>
             </a:pPr>
             <a:r>
-              <a:t>המשך פיתוח  🚀</a:t>
+              <a:t>אתגרים שפתרנו  🛠️</a:t>
             </a:r>
           </a:p>
         </p:txBody>
@@ -10389,7 +9218,7 @@
               </a:defRPr>
             </a:pPr>
             <a:r>
-              <a:t>מה אפשר להוסיף בעתיד</a:t>
+              <a:t>תקלות אמיתיות שנתקלנו בהן ופתרנו</a:t>
             </a:r>
           </a:p>
         </p:txBody>
@@ -10425,7 +9254,7 @@
               </a:defRPr>
             </a:pPr>
             <a:r>
-              <a:t>14 / 15</a:t>
+              <a:t>13 / 15</a:t>
             </a:r>
           </a:p>
         </p:txBody>
@@ -10438,14 +9267,14 @@
         </p:nvSpPr>
         <p:spPr>
           <a:xfrm>
-            <a:off x="274320" y="1371600"/>
-            <a:ext cx="3566160" cy="1920240"/>
+            <a:off x="274320" y="1188720"/>
+            <a:ext cx="11430000" cy="594360"/>
           </a:xfrm>
           <a:prstGeom prst="roundRect">
             <a:avLst/>
           </a:prstGeom>
           <a:solidFill>
-            <a:srgbClr val="F5F5F5"/>
+            <a:srgbClr val="E0F7FA"/>
           </a:solidFill>
           <a:ln w="12700">
             <a:solidFill>
@@ -10483,8 +9312,8 @@
         </p:nvSpPr>
         <p:spPr>
           <a:xfrm>
-            <a:off x="411480" y="1463040"/>
-            <a:ext cx="548640" cy="457200"/>
+            <a:off x="365760" y="1234440"/>
+            <a:ext cx="457200" cy="320040"/>
           </a:xfrm>
           <a:prstGeom prst="rect">
             <a:avLst/>
@@ -10498,7 +9327,7 @@
           <a:lstStyle/>
           <a:p>
             <a:pPr algn="ctr">
-              <a:defRPr sz="2800" b="0">
+              <a:defRPr sz="1600" b="0">
                 <a:solidFill>
                   <a:srgbClr val="009BA4"/>
                 </a:solidFill>
@@ -10506,7 +9335,7 @@
               </a:defRPr>
             </a:pPr>
             <a:r>
-              <a:t>🗺️</a:t>
+              <a:t>🚫</a:t>
             </a:r>
           </a:p>
         </p:txBody>
@@ -10519,30 +9348,30 @@
         </p:nvSpPr>
         <p:spPr>
           <a:xfrm>
-            <a:off x="411480" y="1874520"/>
-            <a:ext cx="3291840" cy="365760"/>
-          </a:xfrm>
-          <a:prstGeom prst="rect">
-            <a:avLst/>
-          </a:prstGeom>
-          <a:noFill/>
-        </p:spPr>
-        <p:txBody>
-          <a:bodyPr wrap="square">
-            <a:spAutoFit/>
-          </a:bodyPr>
-          <a:lstStyle/>
-          <a:p>
-            <a:pPr algn="r">
-              <a:defRPr sz="1400" b="1">
-                <a:solidFill>
-                  <a:srgbClr val="007B83"/>
-                </a:solidFill>
-                <a:latin typeface="Arial"/>
-              </a:defRPr>
-            </a:pPr>
-            <a:r>
-              <a:t>Heat Maps</a:t>
+            <a:off x="822960" y="1216152"/>
+            <a:ext cx="3657600" cy="274320"/>
+          </a:xfrm>
+          <a:prstGeom prst="rect">
+            <a:avLst/>
+          </a:prstGeom>
+          <a:noFill/>
+        </p:spPr>
+        <p:txBody>
+          <a:bodyPr wrap="square">
+            <a:spAutoFit/>
+          </a:bodyPr>
+          <a:lstStyle/>
+          <a:p>
+            <a:pPr algn="l">
+              <a:defRPr sz="1200" b="1">
+                <a:solidFill>
+                  <a:srgbClr val="333333"/>
+                </a:solidFill>
+                <a:latin typeface="Arial"/>
+              </a:defRPr>
+            </a:pPr>
+            <a:r>
+              <a:t>MOT GTFS-RT WAF block</a:t>
             </a:r>
           </a:p>
         </p:txBody>
@@ -10555,22 +9384,22 @@
         </p:nvSpPr>
         <p:spPr>
           <a:xfrm>
-            <a:off x="411480" y="2240280"/>
-            <a:ext cx="3291840" cy="914400"/>
-          </a:xfrm>
-          <a:prstGeom prst="rect">
-            <a:avLst/>
-          </a:prstGeom>
-          <a:noFill/>
-        </p:spPr>
-        <p:txBody>
-          <a:bodyPr wrap="square">
-            <a:spAutoFit/>
-          </a:bodyPr>
-          <a:lstStyle/>
-          <a:p>
-            <a:pPr algn="r">
-              <a:defRPr sz="1100" b="0">
+            <a:off x="822960" y="1490472"/>
+            <a:ext cx="10515600" cy="274320"/>
+          </a:xfrm>
+          <a:prstGeom prst="rect">
+            <a:avLst/>
+          </a:prstGeom>
+          <a:noFill/>
+        </p:spPr>
+        <p:txBody>
+          <a:bodyPr wrap="square">
+            <a:spAutoFit/>
+          </a:bodyPr>
+          <a:lstStyle/>
+          <a:p>
+            <a:pPr algn="l">
+              <a:defRPr sz="1000" b="0">
                 <a:solidFill>
                   <a:srgbClr val="666666"/>
                 </a:solidFill>
@@ -10578,7 +9407,7 @@
               </a:defRPr>
             </a:pPr>
             <a:r>
-              <a:t>מפת חום של עומסי תנועה לפי שעה ויום בשבוע — זיהוי צווארי בקבוק</a:t>
+              <a:t>שימוש ב-Stride API של עמותת הסדנא כפרוקסי</a:t>
             </a:r>
           </a:p>
         </p:txBody>
@@ -10591,14 +9420,14 @@
         </p:nvSpPr>
         <p:spPr>
           <a:xfrm>
-            <a:off x="4206240" y="1371600"/>
-            <a:ext cx="3566160" cy="1920240"/>
+            <a:off x="274320" y="1847088"/>
+            <a:ext cx="11430000" cy="594360"/>
           </a:xfrm>
           <a:prstGeom prst="roundRect">
             <a:avLst/>
           </a:prstGeom>
           <a:solidFill>
-            <a:srgbClr val="F5F5F5"/>
+            <a:srgbClr val="FFFFFF"/>
           </a:solidFill>
           <a:ln w="12700">
             <a:solidFill>
@@ -10636,8 +9465,8 @@
         </p:nvSpPr>
         <p:spPr>
           <a:xfrm>
-            <a:off x="4343400" y="1463040"/>
-            <a:ext cx="548640" cy="457200"/>
+            <a:off x="365760" y="1892808"/>
+            <a:ext cx="457200" cy="320040"/>
           </a:xfrm>
           <a:prstGeom prst="rect">
             <a:avLst/>
@@ -10651,7 +9480,7 @@
           <a:lstStyle/>
           <a:p>
             <a:pPr algn="ctr">
-              <a:defRPr sz="2800" b="0">
+              <a:defRPr sz="1600" b="0">
                 <a:solidFill>
                   <a:srgbClr val="009BA4"/>
                 </a:solidFill>
@@ -10659,7 +9488,7 @@
               </a:defRPr>
             </a:pPr>
             <a:r>
-              <a:t>🔔</a:t>
+              <a:t>⚠️</a:t>
             </a:r>
           </a:p>
         </p:txBody>
@@ -10672,30 +9501,30 @@
         </p:nvSpPr>
         <p:spPr>
           <a:xfrm>
-            <a:off x="4343400" y="1874520"/>
-            <a:ext cx="3291840" cy="365760"/>
-          </a:xfrm>
-          <a:prstGeom prst="rect">
-            <a:avLst/>
-          </a:prstGeom>
-          <a:noFill/>
-        </p:spPr>
-        <p:txBody>
-          <a:bodyPr wrap="square">
-            <a:spAutoFit/>
-          </a:bodyPr>
-          <a:lstStyle/>
-          <a:p>
-            <a:pPr algn="r">
-              <a:defRPr sz="1400" b="1">
-                <a:solidFill>
-                  <a:srgbClr val="007B83"/>
-                </a:solidFill>
-                <a:latin typeface="Arial"/>
-              </a:defRPr>
-            </a:pPr>
-            <a:r>
-              <a:t>Real-time Push Alerts</a:t>
+            <a:off x="822960" y="1874520"/>
+            <a:ext cx="3657600" cy="274320"/>
+          </a:xfrm>
+          <a:prstGeom prst="rect">
+            <a:avLst/>
+          </a:prstGeom>
+          <a:noFill/>
+        </p:spPr>
+        <p:txBody>
+          <a:bodyPr wrap="square">
+            <a:spAutoFit/>
+          </a:bodyPr>
+          <a:lstStyle/>
+          <a:p>
+            <a:pPr algn="l">
+              <a:defRPr sz="1200" b="1">
+                <a:solidFill>
+                  <a:srgbClr val="333333"/>
+                </a:solidFill>
+                <a:latin typeface="Arial"/>
+              </a:defRPr>
+            </a:pPr>
+            <a:r>
+              <a:t>siri_route vs siri_routes (PLURAL!)</a:t>
             </a:r>
           </a:p>
         </p:txBody>
@@ -10708,22 +9537,22 @@
         </p:nvSpPr>
         <p:spPr>
           <a:xfrm>
-            <a:off x="4343400" y="2240280"/>
-            <a:ext cx="3291840" cy="914400"/>
-          </a:xfrm>
-          <a:prstGeom prst="rect">
-            <a:avLst/>
-          </a:prstGeom>
-          <a:noFill/>
-        </p:spPr>
-        <p:txBody>
-          <a:bodyPr wrap="square">
-            <a:spAutoFit/>
-          </a:bodyPr>
-          <a:lstStyle/>
-          <a:p>
-            <a:pPr algn="r">
-              <a:defRPr sz="1100" b="0">
+            <a:off x="822960" y="2148840"/>
+            <a:ext cx="10515600" cy="274320"/>
+          </a:xfrm>
+          <a:prstGeom prst="rect">
+            <a:avLst/>
+          </a:prstGeom>
+          <a:noFill/>
+        </p:spPr>
+        <p:txBody>
+          <a:bodyPr wrap="square">
+            <a:spAutoFit/>
+          </a:bodyPr>
+          <a:lstStyle/>
+          <a:p>
+            <a:pPr algn="l">
+              <a:defRPr sz="1000" b="0">
                 <a:solidFill>
                   <a:srgbClr val="666666"/>
                 </a:solidFill>
@@ -10731,7 +9560,7 @@
               </a:defRPr>
             </a:pPr>
             <a:r>
-              <a:t>התראות Push למשתמשים על שיבושים וביטולים בקווים שלהם</a:t>
+              <a:t>באג נסתר: Stride מתעלם מפרמטר ביחיד ומחזיר הכל</a:t>
             </a:r>
           </a:p>
         </p:txBody>
@@ -10744,14 +9573,14 @@
         </p:nvSpPr>
         <p:spPr>
           <a:xfrm>
-            <a:off x="8138160" y="1371600"/>
-            <a:ext cx="3566160" cy="1920240"/>
+            <a:off x="274320" y="2505456"/>
+            <a:ext cx="11430000" cy="594360"/>
           </a:xfrm>
           <a:prstGeom prst="roundRect">
             <a:avLst/>
           </a:prstGeom>
           <a:solidFill>
-            <a:srgbClr val="F5F5F5"/>
+            <a:srgbClr val="E0F7FA"/>
           </a:solidFill>
           <a:ln w="12700">
             <a:solidFill>
@@ -10789,8 +9618,8 @@
         </p:nvSpPr>
         <p:spPr>
           <a:xfrm>
-            <a:off x="8275320" y="1463040"/>
-            <a:ext cx="548640" cy="457200"/>
+            <a:off x="365760" y="2551176"/>
+            <a:ext cx="457200" cy="320040"/>
           </a:xfrm>
           <a:prstGeom prst="rect">
             <a:avLst/>
@@ -10804,7 +9633,7 @@
           <a:lstStyle/>
           <a:p>
             <a:pPr algn="ctr">
-              <a:defRPr sz="2800" b="0">
+              <a:defRPr sz="1600" b="0">
                 <a:solidFill>
                   <a:srgbClr val="009BA4"/>
                 </a:solidFill>
@@ -10812,7 +9641,7 @@
               </a:defRPr>
             </a:pPr>
             <a:r>
-              <a:t>📈</a:t>
+              <a:t>📉</a:t>
             </a:r>
           </a:p>
         </p:txBody>
@@ -10825,30 +9654,30 @@
         </p:nvSpPr>
         <p:spPr>
           <a:xfrm>
-            <a:off x="8275320" y="1874520"/>
-            <a:ext cx="3291840" cy="365760"/>
-          </a:xfrm>
-          <a:prstGeom prst="rect">
-            <a:avLst/>
-          </a:prstGeom>
-          <a:noFill/>
-        </p:spPr>
-        <p:txBody>
-          <a:bodyPr wrap="square">
-            <a:spAutoFit/>
-          </a:bodyPr>
-          <a:lstStyle/>
-          <a:p>
-            <a:pPr algn="r">
-              <a:defRPr sz="1400" b="1">
-                <a:solidFill>
-                  <a:srgbClr val="007B83"/>
-                </a:solidFill>
-                <a:latin typeface="Arial"/>
-              </a:defRPr>
-            </a:pPr>
-            <a:r>
-              <a:t>Redshift / BigQuery</a:t>
+            <a:off x="822960" y="2532888"/>
+            <a:ext cx="3657600" cy="274320"/>
+          </a:xfrm>
+          <a:prstGeom prst="rect">
+            <a:avLst/>
+          </a:prstGeom>
+          <a:noFill/>
+        </p:spPr>
+        <p:txBody>
+          <a:bodyPr wrap="square">
+            <a:spAutoFit/>
+          </a:bodyPr>
+          <a:lstStyle/>
+          <a:p>
+            <a:pPr algn="l">
+              <a:defRPr sz="1200" b="1">
+                <a:solidFill>
+                  <a:srgbClr val="333333"/>
+                </a:solidFill>
+                <a:latin typeface="Arial"/>
+              </a:defRPr>
+            </a:pPr>
+            <a:r>
+              <a:t>Elasticsearch OOM ב-VM מוגבל</a:t>
             </a:r>
           </a:p>
         </p:txBody>
@@ -10861,22 +9690,22 @@
         </p:nvSpPr>
         <p:spPr>
           <a:xfrm>
-            <a:off x="8275320" y="2240280"/>
-            <a:ext cx="3291840" cy="914400"/>
-          </a:xfrm>
-          <a:prstGeom prst="rect">
-            <a:avLst/>
-          </a:prstGeom>
-          <a:noFill/>
-        </p:spPr>
-        <p:txBody>
-          <a:bodyPr wrap="square">
-            <a:spAutoFit/>
-          </a:bodyPr>
-          <a:lstStyle/>
-          <a:p>
-            <a:pPr algn="r">
-              <a:defRPr sz="1100" b="0">
+            <a:off x="822960" y="2807208"/>
+            <a:ext cx="10515600" cy="274320"/>
+          </a:xfrm>
+          <a:prstGeom prst="rect">
+            <a:avLst/>
+          </a:prstGeom>
+          <a:noFill/>
+        </p:spPr>
+        <p:txBody>
+          <a:bodyPr wrap="square">
+            <a:spAutoFit/>
+          </a:bodyPr>
+          <a:lstStyle/>
+          <a:p>
+            <a:pPr algn="l">
+              <a:defRPr sz="1000" b="0">
                 <a:solidFill>
                   <a:srgbClr val="666666"/>
                 </a:solidFill>
@@ -10884,7 +9713,7 @@
               </a:defRPr>
             </a:pPr>
             <a:r>
-              <a:t>מחסן נתונים בענן לניתוחים ארוכי טווח ודוחות BI</a:t>
+              <a:t>פתרון: הגירה ל-Elastic Cloud — 7M+ רשומות, אפס עומס על ה-VM</a:t>
             </a:r>
           </a:p>
         </p:txBody>
@@ -10897,14 +9726,14 @@
         </p:nvSpPr>
         <p:spPr>
           <a:xfrm>
-            <a:off x="274320" y="3657600"/>
-            <a:ext cx="3566160" cy="1920240"/>
+            <a:off x="274320" y="3163824"/>
+            <a:ext cx="11430000" cy="594360"/>
           </a:xfrm>
           <a:prstGeom prst="roundRect">
             <a:avLst/>
           </a:prstGeom>
           <a:solidFill>
-            <a:srgbClr val="F5F5F5"/>
+            <a:srgbClr val="FFFFFF"/>
           </a:solidFill>
           <a:ln w="12700">
             <a:solidFill>
@@ -10942,8 +9771,8 @@
         </p:nvSpPr>
         <p:spPr>
           <a:xfrm>
-            <a:off x="411480" y="3749040"/>
-            <a:ext cx="548640" cy="457200"/>
+            <a:off x="365760" y="3209544"/>
+            <a:ext cx="457200" cy="320040"/>
           </a:xfrm>
           <a:prstGeom prst="rect">
             <a:avLst/>
@@ -10957,7 +9786,7 @@
           <a:lstStyle/>
           <a:p>
             <a:pPr algn="ctr">
-              <a:defRPr sz="2800" b="0">
+              <a:defRPr sz="1600" b="0">
                 <a:solidFill>
                   <a:srgbClr val="009BA4"/>
                 </a:solidFill>
@@ -10965,7 +9794,7 @@
               </a:defRPr>
             </a:pPr>
             <a:r>
-              <a:t>🌍</a:t>
+              <a:t>💤</a:t>
             </a:r>
           </a:p>
         </p:txBody>
@@ -10978,30 +9807,30 @@
         </p:nvSpPr>
         <p:spPr>
           <a:xfrm>
-            <a:off x="411480" y="4160520"/>
-            <a:ext cx="3291840" cy="365760"/>
-          </a:xfrm>
-          <a:prstGeom prst="rect">
-            <a:avLst/>
-          </a:prstGeom>
-          <a:noFill/>
-        </p:spPr>
-        <p:txBody>
-          <a:bodyPr wrap="square">
-            <a:spAutoFit/>
-          </a:bodyPr>
-          <a:lstStyle/>
-          <a:p>
-            <a:pPr algn="r">
-              <a:defRPr sz="1400" b="1">
-                <a:solidFill>
-                  <a:srgbClr val="007B83"/>
-                </a:solidFill>
-                <a:latin typeface="Arial"/>
-              </a:defRPr>
-            </a:pPr>
-            <a:r>
-              <a:t>כיסוי ארצי</a:t>
+            <a:off x="822960" y="3191256"/>
+            <a:ext cx="3657600" cy="274320"/>
+          </a:xfrm>
+          <a:prstGeom prst="rect">
+            <a:avLst/>
+          </a:prstGeom>
+          <a:noFill/>
+        </p:spPr>
+        <p:txBody>
+          <a:bodyPr wrap="square">
+            <a:spAutoFit/>
+          </a:bodyPr>
+          <a:lstStyle/>
+          <a:p>
+            <a:pPr algn="l">
+              <a:defRPr sz="1200" b="1">
+                <a:solidFill>
+                  <a:srgbClr val="333333"/>
+                </a:solidFill>
+                <a:latin typeface="Arial"/>
+              </a:defRPr>
+            </a:pPr>
+            <a:r>
+              <a:t>מצב שינה — פערים בנתונים</a:t>
             </a:r>
           </a:p>
         </p:txBody>
@@ -11014,22 +9843,22 @@
         </p:nvSpPr>
         <p:spPr>
           <a:xfrm>
-            <a:off x="411480" y="4526280"/>
-            <a:ext cx="3291840" cy="914400"/>
-          </a:xfrm>
-          <a:prstGeom prst="rect">
-            <a:avLst/>
-          </a:prstGeom>
-          <a:noFill/>
-        </p:spPr>
-        <p:txBody>
-          <a:bodyPr wrap="square">
-            <a:spAutoFit/>
-          </a:bodyPr>
-          <a:lstStyle/>
-          <a:p>
-            <a:pPr algn="r">
-              <a:defRPr sz="1100" b="0">
+            <a:off x="822960" y="3465576"/>
+            <a:ext cx="10515600" cy="274320"/>
+          </a:xfrm>
+          <a:prstGeom prst="rect">
+            <a:avLst/>
+          </a:prstGeom>
+          <a:noFill/>
+        </p:spPr>
+        <p:txBody>
+          <a:bodyPr wrap="square">
+            <a:spAutoFit/>
+          </a:bodyPr>
+          <a:lstStyle/>
+          <a:p>
+            <a:pPr algn="l">
+              <a:defRPr sz="1000" b="0">
                 <a:solidFill>
                   <a:srgbClr val="666666"/>
                 </a:solidFill>
@@ -11037,7 +9866,7 @@
               </a:defRPr>
             </a:pPr>
             <a:r>
-              <a:t>הרחבה מגוש דן לכל הארץ — חיפה, ירושלים, באר שבע</a:t>
+              <a:t>@reboot לא עובד ב-resume! תוקן ל-*/15 cron + סריקה שעה-שעה</a:t>
             </a:r>
           </a:p>
         </p:txBody>
@@ -11050,14 +9879,14 @@
         </p:nvSpPr>
         <p:spPr>
           <a:xfrm>
-            <a:off x="4206240" y="3657600"/>
-            <a:ext cx="3566160" cy="1920240"/>
+            <a:off x="274320" y="3822192"/>
+            <a:ext cx="11430000" cy="594360"/>
           </a:xfrm>
           <a:prstGeom prst="roundRect">
             <a:avLst/>
           </a:prstGeom>
           <a:solidFill>
-            <a:srgbClr val="F5F5F5"/>
+            <a:srgbClr val="E0F7FA"/>
           </a:solidFill>
           <a:ln w="12700">
             <a:solidFill>
@@ -11095,8 +9924,8 @@
         </p:nvSpPr>
         <p:spPr>
           <a:xfrm>
-            <a:off x="4343400" y="3749040"/>
-            <a:ext cx="548640" cy="457200"/>
+            <a:off x="365760" y="3867912"/>
+            <a:ext cx="457200" cy="320040"/>
           </a:xfrm>
           <a:prstGeom prst="rect">
             <a:avLst/>
@@ -11110,7 +9939,7 @@
           <a:lstStyle/>
           <a:p>
             <a:pPr algn="ctr">
-              <a:defRPr sz="2800" b="0">
+              <a:defRPr sz="1600" b="0">
                 <a:solidFill>
                   <a:srgbClr val="009BA4"/>
                 </a:solidFill>
@@ -11118,7 +9947,7 @@
               </a:defRPr>
             </a:pPr>
             <a:r>
-              <a:t>🎫</a:t>
+              <a:t>🐌</a:t>
             </a:r>
           </a:p>
         </p:txBody>
@@ -11131,30 +9960,30 @@
         </p:nvSpPr>
         <p:spPr>
           <a:xfrm>
-            <a:off x="4343400" y="4160520"/>
-            <a:ext cx="3291840" cy="365760"/>
-          </a:xfrm>
-          <a:prstGeom prst="rect">
-            <a:avLst/>
-          </a:prstGeom>
-          <a:noFill/>
-        </p:spPr>
-        <p:txBody>
-          <a:bodyPr wrap="square">
-            <a:spAutoFit/>
-          </a:bodyPr>
-          <a:lstStyle/>
-          <a:p>
-            <a:pPr algn="r">
-              <a:defRPr sz="1400" b="1">
-                <a:solidFill>
-                  <a:srgbClr val="007B83"/>
-                </a:solidFill>
-                <a:latin typeface="Arial"/>
-              </a:defRPr>
-            </a:pPr>
-            <a:r>
-              <a:t>אינטגרציית רב-קו</a:t>
+            <a:off x="822960" y="3849624"/>
+            <a:ext cx="3657600" cy="274320"/>
+          </a:xfrm>
+          <a:prstGeom prst="rect">
+            <a:avLst/>
+          </a:prstGeom>
+          <a:noFill/>
+        </p:spPr>
+        <p:txBody>
+          <a:bodyPr wrap="square">
+            <a:spAutoFit/>
+          </a:bodyPr>
+          <a:lstStyle/>
+          <a:p>
+            <a:pPr algn="l">
+              <a:defRPr sz="1200" b="1">
+                <a:solidFill>
+                  <a:srgbClr val="333333"/>
+                </a:solidFill>
+                <a:latin typeface="Arial"/>
+              </a:defRPr>
+            </a:pPr>
+            <a:r>
+              <a:t>/status timeout (30+ שניות)</a:t>
             </a:r>
           </a:p>
         </p:txBody>
@@ -11167,22 +9996,22 @@
         </p:nvSpPr>
         <p:spPr>
           <a:xfrm>
-            <a:off x="4343400" y="4526280"/>
-            <a:ext cx="3291840" cy="914400"/>
-          </a:xfrm>
-          <a:prstGeom prst="rect">
-            <a:avLst/>
-          </a:prstGeom>
-          <a:noFill/>
-        </p:spPr>
-        <p:txBody>
-          <a:bodyPr wrap="square">
-            <a:spAutoFit/>
-          </a:bodyPr>
-          <a:lstStyle/>
-          <a:p>
-            <a:pPr algn="r">
-              <a:defRPr sz="1100" b="0">
+            <a:off x="822960" y="4123944"/>
+            <a:ext cx="10515600" cy="274320"/>
+          </a:xfrm>
+          <a:prstGeom prst="rect">
+            <a:avLst/>
+          </a:prstGeom>
+          <a:noFill/>
+        </p:spPr>
+        <p:txBody>
+          <a:bodyPr wrap="square">
+            <a:spAutoFit/>
+          </a:bodyPr>
+          <a:lstStyle/>
+          <a:p>
+            <a:pPr algn="l">
+              <a:defRPr sz="1000" b="0">
                 <a:solidFill>
                   <a:srgbClr val="666666"/>
                 </a:solidFill>
@@ -11190,7 +10019,7 @@
               </a:defRPr>
             </a:pPr>
             <a:r>
-              <a:t>חיבור למערכת רב-קו לנתוני נוסעים ותפוסה בזמן אמת</a:t>
+              <a:t>boto3 client per-request → module-level singleton → 3 שניות</a:t>
             </a:r>
           </a:p>
         </p:txBody>
@@ -11203,14 +10032,14 @@
         </p:nvSpPr>
         <p:spPr>
           <a:xfrm>
-            <a:off x="8138160" y="3657600"/>
-            <a:ext cx="3566160" cy="1920240"/>
+            <a:off x="274320" y="4480559"/>
+            <a:ext cx="11430000" cy="594360"/>
           </a:xfrm>
           <a:prstGeom prst="roundRect">
             <a:avLst/>
           </a:prstGeom>
           <a:solidFill>
-            <a:srgbClr val="F5F5F5"/>
+            <a:srgbClr val="FFFFFF"/>
           </a:solidFill>
           <a:ln w="12700">
             <a:solidFill>
@@ -11248,8 +10077,8 @@
         </p:nvSpPr>
         <p:spPr>
           <a:xfrm>
-            <a:off x="8275320" y="3749040"/>
-            <a:ext cx="548640" cy="457200"/>
+            <a:off x="365760" y="4526279"/>
+            <a:ext cx="457200" cy="320040"/>
           </a:xfrm>
           <a:prstGeom prst="rect">
             <a:avLst/>
@@ -11263,7 +10092,7 @@
           <a:lstStyle/>
           <a:p>
             <a:pPr algn="ctr">
-              <a:defRPr sz="2800" b="0">
+              <a:defRPr sz="1600" b="0">
                 <a:solidFill>
                   <a:srgbClr val="009BA4"/>
                 </a:solidFill>
@@ -11271,7 +10100,7 @@
               </a:defRPr>
             </a:pPr>
             <a:r>
-              <a:t>📊</a:t>
+              <a:t>🗃️</a:t>
             </a:r>
           </a:p>
         </p:txBody>
@@ -11284,30 +10113,30 @@
         </p:nvSpPr>
         <p:spPr>
           <a:xfrm>
-            <a:off x="8275320" y="4160520"/>
-            <a:ext cx="3291840" cy="365760"/>
-          </a:xfrm>
-          <a:prstGeom prst="rect">
-            <a:avLst/>
-          </a:prstGeom>
-          <a:noFill/>
-        </p:spPr>
-        <p:txBody>
-          <a:bodyPr wrap="square">
-            <a:spAutoFit/>
-          </a:bodyPr>
-          <a:lstStyle/>
-          <a:p>
-            <a:pPr algn="r">
-              <a:defRPr sz="1400" b="1">
-                <a:solidFill>
-                  <a:srgbClr val="007B83"/>
-                </a:solidFill>
-                <a:latin typeface="Arial"/>
-              </a:defRPr>
-            </a:pPr>
-            <a:r>
-              <a:t>דוחות אוטומטיים</a:t>
+            <a:off x="822960" y="4507991"/>
+            <a:ext cx="3657600" cy="274320"/>
+          </a:xfrm>
+          <a:prstGeom prst="rect">
+            <a:avLst/>
+          </a:prstGeom>
+          <a:noFill/>
+        </p:spPr>
+        <p:txBody>
+          <a:bodyPr wrap="square">
+            <a:spAutoFit/>
+          </a:bodyPr>
+          <a:lstStyle/>
+          <a:p>
+            <a:pPr algn="l">
+              <a:defRPr sz="1200" b="1">
+                <a:solidFill>
+                  <a:srgbClr val="333333"/>
+                </a:solidFill>
+                <a:latin typeface="Arial"/>
+              </a:defRPr>
+            </a:pPr>
+            <a:r>
+              <a:t>MinIO endpoint: localhost vs minio:9000</a:t>
             </a:r>
           </a:p>
         </p:txBody>
@@ -11320,22 +10149,22 @@
         </p:nvSpPr>
         <p:spPr>
           <a:xfrm>
-            <a:off x="8275320" y="4526280"/>
-            <a:ext cx="3291840" cy="914400"/>
-          </a:xfrm>
-          <a:prstGeom prst="rect">
-            <a:avLst/>
-          </a:prstGeom>
-          <a:noFill/>
-        </p:spPr>
-        <p:txBody>
-          <a:bodyPr wrap="square">
-            <a:spAutoFit/>
-          </a:bodyPr>
-          <a:lstStyle/>
-          <a:p>
-            <a:pPr algn="r">
-              <a:defRPr sz="1100" b="0">
+            <a:off x="822960" y="4782311"/>
+            <a:ext cx="10515600" cy="274320"/>
+          </a:xfrm>
+          <a:prstGeom prst="rect">
+            <a:avLst/>
+          </a:prstGeom>
+          <a:noFill/>
+        </p:spPr>
+        <p:txBody>
+          <a:bodyPr wrap="square">
+            <a:spAutoFit/>
+          </a:bodyPr>
+          <a:lstStyle/>
+          <a:p>
+            <a:pPr algn="l">
+              <a:defRPr sz="1000" b="0">
                 <a:solidFill>
                   <a:srgbClr val="666666"/>
                 </a:solidFill>
@@ -11343,7 +10172,313 @@
               </a:defRPr>
             </a:pPr>
             <a:r>
-              <a:t>דוח PDF/HTML יומי עם KPIs — אחוז דיוק, קווים בעייתיים, מגמות</a:t>
+              <a:t>סקריפטים על host חייבים localhost, Docker משתמש ב-minio</a:t>
+            </a:r>
+          </a:p>
+        </p:txBody>
+      </p:sp>
+      <p:sp>
+        <p:nvSpPr>
+          <p:cNvPr id="30" name="Rounded Rectangle 29"/>
+          <p:cNvSpPr/>
+          <p:nvPr/>
+        </p:nvSpPr>
+        <p:spPr>
+          <a:xfrm>
+            <a:off x="274320" y="5138928"/>
+            <a:ext cx="11430000" cy="594360"/>
+          </a:xfrm>
+          <a:prstGeom prst="roundRect">
+            <a:avLst/>
+          </a:prstGeom>
+          <a:solidFill>
+            <a:srgbClr val="E0F7FA"/>
+          </a:solidFill>
+          <a:ln w="12700">
+            <a:solidFill>
+              <a:srgbClr val="4DD0E1"/>
+            </a:solidFill>
+          </a:ln>
+        </p:spPr>
+        <p:style>
+          <a:lnRef idx="1">
+            <a:schemeClr val="accent1"/>
+          </a:lnRef>
+          <a:fillRef idx="3">
+            <a:schemeClr val="accent1"/>
+          </a:fillRef>
+          <a:effectRef idx="2">
+            <a:schemeClr val="accent1"/>
+          </a:effectRef>
+          <a:fontRef idx="minor">
+            <a:schemeClr val="lt1"/>
+          </a:fontRef>
+        </p:style>
+        <p:txBody>
+          <a:bodyPr rtlCol="0" anchor="ctr"/>
+          <a:lstStyle/>
+          <a:p>
+            <a:pPr algn="ctr"/>
+          </a:p>
+        </p:txBody>
+      </p:sp>
+      <p:sp>
+        <p:nvSpPr>
+          <p:cNvPr id="31" name="TextBox 30"/>
+          <p:cNvSpPr txBox="1"/>
+          <p:nvPr/>
+        </p:nvSpPr>
+        <p:spPr>
+          <a:xfrm>
+            <a:off x="365760" y="5184648"/>
+            <a:ext cx="457200" cy="320040"/>
+          </a:xfrm>
+          <a:prstGeom prst="rect">
+            <a:avLst/>
+          </a:prstGeom>
+          <a:noFill/>
+        </p:spPr>
+        <p:txBody>
+          <a:bodyPr wrap="square">
+            <a:spAutoFit/>
+          </a:bodyPr>
+          <a:lstStyle/>
+          <a:p>
+            <a:pPr algn="ctr">
+              <a:defRPr sz="1600" b="0">
+                <a:solidFill>
+                  <a:srgbClr val="009BA4"/>
+                </a:solidFill>
+                <a:latin typeface="Arial"/>
+              </a:defRPr>
+            </a:pPr>
+            <a:r>
+              <a:t>🔄</a:t>
+            </a:r>
+          </a:p>
+        </p:txBody>
+      </p:sp>
+      <p:sp>
+        <p:nvSpPr>
+          <p:cNvPr id="32" name="TextBox 31"/>
+          <p:cNvSpPr txBox="1"/>
+          <p:nvPr/>
+        </p:nvSpPr>
+        <p:spPr>
+          <a:xfrm>
+            <a:off x="822960" y="5166360"/>
+            <a:ext cx="3657600" cy="274320"/>
+          </a:xfrm>
+          <a:prstGeom prst="rect">
+            <a:avLst/>
+          </a:prstGeom>
+          <a:noFill/>
+        </p:spPr>
+        <p:txBody>
+          <a:bodyPr wrap="square">
+            <a:spAutoFit/>
+          </a:bodyPr>
+          <a:lstStyle/>
+          <a:p>
+            <a:pPr algn="l">
+              <a:defRPr sz="1200" b="1">
+                <a:solidFill>
+                  <a:srgbClr val="333333"/>
+                </a:solidFill>
+                <a:latin typeface="Arial"/>
+              </a:defRPr>
+            </a:pPr>
+            <a:r>
+              <a:t>Kafka InconsistentClusterIdException</a:t>
+            </a:r>
+          </a:p>
+        </p:txBody>
+      </p:sp>
+      <p:sp>
+        <p:nvSpPr>
+          <p:cNvPr id="33" name="TextBox 32"/>
+          <p:cNvSpPr txBox="1"/>
+          <p:nvPr/>
+        </p:nvSpPr>
+        <p:spPr>
+          <a:xfrm>
+            <a:off x="822960" y="5440680"/>
+            <a:ext cx="10515600" cy="274320"/>
+          </a:xfrm>
+          <a:prstGeom prst="rect">
+            <a:avLst/>
+          </a:prstGeom>
+          <a:noFill/>
+        </p:spPr>
+        <p:txBody>
+          <a:bodyPr wrap="square">
+            <a:spAutoFit/>
+          </a:bodyPr>
+          <a:lstStyle/>
+          <a:p>
+            <a:pPr algn="l">
+              <a:defRPr sz="1000" b="0">
+                <a:solidFill>
+                  <a:srgbClr val="666666"/>
+                </a:solidFill>
+                <a:latin typeface="Arial"/>
+              </a:defRPr>
+            </a:pPr>
+            <a:r>
+              <a:t>ניקוי volume דרך container זמני — בלי sudo</a:t>
+            </a:r>
+          </a:p>
+        </p:txBody>
+      </p:sp>
+      <p:sp>
+        <p:nvSpPr>
+          <p:cNvPr id="34" name="Rounded Rectangle 33"/>
+          <p:cNvSpPr/>
+          <p:nvPr/>
+        </p:nvSpPr>
+        <p:spPr>
+          <a:xfrm>
+            <a:off x="274320" y="5797296"/>
+            <a:ext cx="11430000" cy="594360"/>
+          </a:xfrm>
+          <a:prstGeom prst="roundRect">
+            <a:avLst/>
+          </a:prstGeom>
+          <a:solidFill>
+            <a:srgbClr val="FFFFFF"/>
+          </a:solidFill>
+          <a:ln w="12700">
+            <a:solidFill>
+              <a:srgbClr val="4DD0E1"/>
+            </a:solidFill>
+          </a:ln>
+        </p:spPr>
+        <p:style>
+          <a:lnRef idx="1">
+            <a:schemeClr val="accent1"/>
+          </a:lnRef>
+          <a:fillRef idx="3">
+            <a:schemeClr val="accent1"/>
+          </a:fillRef>
+          <a:effectRef idx="2">
+            <a:schemeClr val="accent1"/>
+          </a:effectRef>
+          <a:fontRef idx="minor">
+            <a:schemeClr val="lt1"/>
+          </a:fontRef>
+        </p:style>
+        <p:txBody>
+          <a:bodyPr rtlCol="0" anchor="ctr"/>
+          <a:lstStyle/>
+          <a:p>
+            <a:pPr algn="ctr"/>
+          </a:p>
+        </p:txBody>
+      </p:sp>
+      <p:sp>
+        <p:nvSpPr>
+          <p:cNvPr id="35" name="TextBox 34"/>
+          <p:cNvSpPr txBox="1"/>
+          <p:nvPr/>
+        </p:nvSpPr>
+        <p:spPr>
+          <a:xfrm>
+            <a:off x="365760" y="5843016"/>
+            <a:ext cx="457200" cy="320040"/>
+          </a:xfrm>
+          <a:prstGeom prst="rect">
+            <a:avLst/>
+          </a:prstGeom>
+          <a:noFill/>
+        </p:spPr>
+        <p:txBody>
+          <a:bodyPr wrap="square">
+            <a:spAutoFit/>
+          </a:bodyPr>
+          <a:lstStyle/>
+          <a:p>
+            <a:pPr algn="ctr">
+              <a:defRPr sz="1600" b="0">
+                <a:solidFill>
+                  <a:srgbClr val="009BA4"/>
+                </a:solidFill>
+                <a:latin typeface="Arial"/>
+              </a:defRPr>
+            </a:pPr>
+            <a:r>
+              <a:t>💻</a:t>
+            </a:r>
+          </a:p>
+        </p:txBody>
+      </p:sp>
+      <p:sp>
+        <p:nvSpPr>
+          <p:cNvPr id="36" name="TextBox 35"/>
+          <p:cNvSpPr txBox="1"/>
+          <p:nvPr/>
+        </p:nvSpPr>
+        <p:spPr>
+          <a:xfrm>
+            <a:off x="822960" y="5824728"/>
+            <a:ext cx="3657600" cy="274320"/>
+          </a:xfrm>
+          <a:prstGeom prst="rect">
+            <a:avLst/>
+          </a:prstGeom>
+          <a:noFill/>
+        </p:spPr>
+        <p:txBody>
+          <a:bodyPr wrap="square">
+            <a:spAutoFit/>
+          </a:bodyPr>
+          <a:lstStyle/>
+          <a:p>
+            <a:pPr algn="l">
+              <a:defRPr sz="1200" b="1">
+                <a:solidFill>
+                  <a:srgbClr val="333333"/>
+                </a:solidFill>
+                <a:latin typeface="Arial"/>
+              </a:defRPr>
+            </a:pPr>
+            <a:r>
+              <a:t>Docker stop — permission denied</a:t>
+            </a:r>
+          </a:p>
+        </p:txBody>
+      </p:sp>
+      <p:sp>
+        <p:nvSpPr>
+          <p:cNvPr id="37" name="TextBox 36"/>
+          <p:cNvSpPr txBox="1"/>
+          <p:nvPr/>
+        </p:nvSpPr>
+        <p:spPr>
+          <a:xfrm>
+            <a:off x="822960" y="6099048"/>
+            <a:ext cx="10515600" cy="274320"/>
+          </a:xfrm>
+          <a:prstGeom prst="rect">
+            <a:avLst/>
+          </a:prstGeom>
+          <a:noFill/>
+        </p:spPr>
+        <p:txBody>
+          <a:bodyPr wrap="square">
+            <a:spAutoFit/>
+          </a:bodyPr>
+          <a:lstStyle/>
+          <a:p>
+            <a:pPr algn="l">
+              <a:defRPr sz="1000" b="0">
+                <a:solidFill>
+                  <a:srgbClr val="666666"/>
+                </a:solidFill>
+                <a:latin typeface="Arial"/>
+              </a:defRPr>
+            </a:pPr>
+            <a:r>
+              <a:t>containers שהורצו ע״י root: פתרון docker exec kill</a:t>
             </a:r>
           </a:p>
         </p:txBody>
@@ -11357,6 +10492,1101 @@
 </file>
 
 <file path=ppt/slides/slide18.xml><?xml version="1.0" encoding="utf-8"?>
+<p:sld xmlns:a="http://schemas.openxmlformats.org/drawingml/2006/main" xmlns:p="http://schemas.openxmlformats.org/presentationml/2006/main" xmlns:r="http://schemas.openxmlformats.org/officeDocument/2006/relationships">
+  <p:cSld>
+    <p:bg>
+      <p:bgPr>
+        <a:solidFill>
+          <a:srgbClr val="FFFFFF"/>
+        </a:solidFill>
+        <a:effectLst/>
+      </p:bgPr>
+    </p:bg>
+    <p:spTree>
+      <p:nvGrpSpPr>
+        <p:cNvPr id="1" name=""/>
+        <p:cNvGrpSpPr/>
+        <p:nvPr/>
+      </p:nvGrpSpPr>
+      <p:grpSpPr/>
+      <p:sp>
+        <p:nvSpPr>
+          <p:cNvPr id="2" name="Rectangle 1"/>
+          <p:cNvSpPr/>
+          <p:nvPr/>
+        </p:nvSpPr>
+        <p:spPr>
+          <a:xfrm>
+            <a:off x="0" y="0"/>
+            <a:ext cx="12191695" cy="1005840"/>
+          </a:xfrm>
+          <a:prstGeom prst="rect">
+            <a:avLst/>
+          </a:prstGeom>
+          <a:solidFill>
+            <a:srgbClr val="007B83"/>
+          </a:solidFill>
+          <a:ln>
+            <a:noFill/>
+          </a:ln>
+        </p:spPr>
+        <p:style>
+          <a:lnRef idx="1">
+            <a:schemeClr val="accent1"/>
+          </a:lnRef>
+          <a:fillRef idx="3">
+            <a:schemeClr val="accent1"/>
+          </a:fillRef>
+          <a:effectRef idx="2">
+            <a:schemeClr val="accent1"/>
+          </a:effectRef>
+          <a:fontRef idx="minor">
+            <a:schemeClr val="lt1"/>
+          </a:fontRef>
+        </p:style>
+        <p:txBody>
+          <a:bodyPr rtlCol="0" anchor="ctr"/>
+          <a:lstStyle/>
+          <a:p>
+            <a:pPr algn="ctr"/>
+          </a:p>
+        </p:txBody>
+      </p:sp>
+      <p:sp>
+        <p:nvSpPr>
+          <p:cNvPr id="3" name="TextBox 2"/>
+          <p:cNvSpPr txBox="1"/>
+          <p:nvPr/>
+        </p:nvSpPr>
+        <p:spPr>
+          <a:xfrm>
+            <a:off x="457200" y="137160"/>
+            <a:ext cx="9144000" cy="502920"/>
+          </a:xfrm>
+          <a:prstGeom prst="rect">
+            <a:avLst/>
+          </a:prstGeom>
+          <a:noFill/>
+        </p:spPr>
+        <p:txBody>
+          <a:bodyPr wrap="square">
+            <a:spAutoFit/>
+          </a:bodyPr>
+          <a:lstStyle/>
+          <a:p>
+            <a:pPr algn="r">
+              <a:defRPr sz="2800" b="1">
+                <a:solidFill>
+                  <a:srgbClr val="FFFFFF"/>
+                </a:solidFill>
+                <a:latin typeface="Arial"/>
+              </a:defRPr>
+            </a:pPr>
+            <a:r>
+              <a:t>המשך פיתוח  🚀</a:t>
+            </a:r>
+          </a:p>
+        </p:txBody>
+      </p:sp>
+      <p:sp>
+        <p:nvSpPr>
+          <p:cNvPr id="4" name="TextBox 3"/>
+          <p:cNvSpPr txBox="1"/>
+          <p:nvPr/>
+        </p:nvSpPr>
+        <p:spPr>
+          <a:xfrm>
+            <a:off x="457200" y="594360"/>
+            <a:ext cx="9144000" cy="320040"/>
+          </a:xfrm>
+          <a:prstGeom prst="rect">
+            <a:avLst/>
+          </a:prstGeom>
+          <a:noFill/>
+        </p:spPr>
+        <p:txBody>
+          <a:bodyPr wrap="square">
+            <a:spAutoFit/>
+          </a:bodyPr>
+          <a:lstStyle/>
+          <a:p>
+            <a:pPr algn="r">
+              <a:defRPr sz="1400" b="0">
+                <a:solidFill>
+                  <a:srgbClr val="E0F7FA"/>
+                </a:solidFill>
+                <a:latin typeface="Arial"/>
+              </a:defRPr>
+            </a:pPr>
+            <a:r>
+              <a:t>מה אפשר להוסיף בעתיד</a:t>
+            </a:r>
+          </a:p>
+        </p:txBody>
+      </p:sp>
+      <p:sp>
+        <p:nvSpPr>
+          <p:cNvPr id="5" name="TextBox 4"/>
+          <p:cNvSpPr txBox="1"/>
+          <p:nvPr/>
+        </p:nvSpPr>
+        <p:spPr>
+          <a:xfrm>
+            <a:off x="10515600" y="274320"/>
+            <a:ext cx="1371600" cy="457200"/>
+          </a:xfrm>
+          <a:prstGeom prst="rect">
+            <a:avLst/>
+          </a:prstGeom>
+          <a:noFill/>
+        </p:spPr>
+        <p:txBody>
+          <a:bodyPr wrap="square">
+            <a:spAutoFit/>
+          </a:bodyPr>
+          <a:lstStyle/>
+          <a:p>
+            <a:pPr algn="ctr">
+              <a:defRPr sz="1200" b="0">
+                <a:solidFill>
+                  <a:srgbClr val="E0F7FA"/>
+                </a:solidFill>
+                <a:latin typeface="Arial"/>
+              </a:defRPr>
+            </a:pPr>
+            <a:r>
+              <a:t>14 / 15</a:t>
+            </a:r>
+          </a:p>
+        </p:txBody>
+      </p:sp>
+      <p:sp>
+        <p:nvSpPr>
+          <p:cNvPr id="6" name="Rounded Rectangle 5"/>
+          <p:cNvSpPr/>
+          <p:nvPr/>
+        </p:nvSpPr>
+        <p:spPr>
+          <a:xfrm>
+            <a:off x="274320" y="1371600"/>
+            <a:ext cx="3566160" cy="1920240"/>
+          </a:xfrm>
+          <a:prstGeom prst="roundRect">
+            <a:avLst/>
+          </a:prstGeom>
+          <a:solidFill>
+            <a:srgbClr val="F5F5F5"/>
+          </a:solidFill>
+          <a:ln w="12700">
+            <a:solidFill>
+              <a:srgbClr val="4DD0E1"/>
+            </a:solidFill>
+          </a:ln>
+        </p:spPr>
+        <p:style>
+          <a:lnRef idx="1">
+            <a:schemeClr val="accent1"/>
+          </a:lnRef>
+          <a:fillRef idx="3">
+            <a:schemeClr val="accent1"/>
+          </a:fillRef>
+          <a:effectRef idx="2">
+            <a:schemeClr val="accent1"/>
+          </a:effectRef>
+          <a:fontRef idx="minor">
+            <a:schemeClr val="lt1"/>
+          </a:fontRef>
+        </p:style>
+        <p:txBody>
+          <a:bodyPr rtlCol="0" anchor="ctr"/>
+          <a:lstStyle/>
+          <a:p>
+            <a:pPr algn="ctr"/>
+          </a:p>
+        </p:txBody>
+      </p:sp>
+      <p:sp>
+        <p:nvSpPr>
+          <p:cNvPr id="7" name="TextBox 6"/>
+          <p:cNvSpPr txBox="1"/>
+          <p:nvPr/>
+        </p:nvSpPr>
+        <p:spPr>
+          <a:xfrm>
+            <a:off x="411480" y="1463040"/>
+            <a:ext cx="548640" cy="457200"/>
+          </a:xfrm>
+          <a:prstGeom prst="rect">
+            <a:avLst/>
+          </a:prstGeom>
+          <a:noFill/>
+        </p:spPr>
+        <p:txBody>
+          <a:bodyPr wrap="square">
+            <a:spAutoFit/>
+          </a:bodyPr>
+          <a:lstStyle/>
+          <a:p>
+            <a:pPr algn="ctr">
+              <a:defRPr sz="2800" b="0">
+                <a:solidFill>
+                  <a:srgbClr val="009BA4"/>
+                </a:solidFill>
+                <a:latin typeface="Arial"/>
+              </a:defRPr>
+            </a:pPr>
+            <a:r>
+              <a:t>🗺️</a:t>
+            </a:r>
+          </a:p>
+        </p:txBody>
+      </p:sp>
+      <p:sp>
+        <p:nvSpPr>
+          <p:cNvPr id="8" name="TextBox 7"/>
+          <p:cNvSpPr txBox="1"/>
+          <p:nvPr/>
+        </p:nvSpPr>
+        <p:spPr>
+          <a:xfrm>
+            <a:off x="411480" y="1874520"/>
+            <a:ext cx="3291840" cy="365760"/>
+          </a:xfrm>
+          <a:prstGeom prst="rect">
+            <a:avLst/>
+          </a:prstGeom>
+          <a:noFill/>
+        </p:spPr>
+        <p:txBody>
+          <a:bodyPr wrap="square">
+            <a:spAutoFit/>
+          </a:bodyPr>
+          <a:lstStyle/>
+          <a:p>
+            <a:pPr algn="r">
+              <a:defRPr sz="1400" b="1">
+                <a:solidFill>
+                  <a:srgbClr val="007B83"/>
+                </a:solidFill>
+                <a:latin typeface="Arial"/>
+              </a:defRPr>
+            </a:pPr>
+            <a:r>
+              <a:t>Heat Maps</a:t>
+            </a:r>
+          </a:p>
+        </p:txBody>
+      </p:sp>
+      <p:sp>
+        <p:nvSpPr>
+          <p:cNvPr id="9" name="TextBox 8"/>
+          <p:cNvSpPr txBox="1"/>
+          <p:nvPr/>
+        </p:nvSpPr>
+        <p:spPr>
+          <a:xfrm>
+            <a:off x="411480" y="2240280"/>
+            <a:ext cx="3291840" cy="914400"/>
+          </a:xfrm>
+          <a:prstGeom prst="rect">
+            <a:avLst/>
+          </a:prstGeom>
+          <a:noFill/>
+        </p:spPr>
+        <p:txBody>
+          <a:bodyPr wrap="square">
+            <a:spAutoFit/>
+          </a:bodyPr>
+          <a:lstStyle/>
+          <a:p>
+            <a:pPr algn="r">
+              <a:defRPr sz="1100" b="0">
+                <a:solidFill>
+                  <a:srgbClr val="666666"/>
+                </a:solidFill>
+                <a:latin typeface="Arial"/>
+              </a:defRPr>
+            </a:pPr>
+            <a:r>
+              <a:t>מפת חום של עומסי תנועה לפי שעה ויום בשבוע — זיהוי צווארי בקבוק</a:t>
+            </a:r>
+          </a:p>
+        </p:txBody>
+      </p:sp>
+      <p:sp>
+        <p:nvSpPr>
+          <p:cNvPr id="10" name="Rounded Rectangle 9"/>
+          <p:cNvSpPr/>
+          <p:nvPr/>
+        </p:nvSpPr>
+        <p:spPr>
+          <a:xfrm>
+            <a:off x="4206240" y="1371600"/>
+            <a:ext cx="3566160" cy="1920240"/>
+          </a:xfrm>
+          <a:prstGeom prst="roundRect">
+            <a:avLst/>
+          </a:prstGeom>
+          <a:solidFill>
+            <a:srgbClr val="F5F5F5"/>
+          </a:solidFill>
+          <a:ln w="12700">
+            <a:solidFill>
+              <a:srgbClr val="4DD0E1"/>
+            </a:solidFill>
+          </a:ln>
+        </p:spPr>
+        <p:style>
+          <a:lnRef idx="1">
+            <a:schemeClr val="accent1"/>
+          </a:lnRef>
+          <a:fillRef idx="3">
+            <a:schemeClr val="accent1"/>
+          </a:fillRef>
+          <a:effectRef idx="2">
+            <a:schemeClr val="accent1"/>
+          </a:effectRef>
+          <a:fontRef idx="minor">
+            <a:schemeClr val="lt1"/>
+          </a:fontRef>
+        </p:style>
+        <p:txBody>
+          <a:bodyPr rtlCol="0" anchor="ctr"/>
+          <a:lstStyle/>
+          <a:p>
+            <a:pPr algn="ctr"/>
+          </a:p>
+        </p:txBody>
+      </p:sp>
+      <p:sp>
+        <p:nvSpPr>
+          <p:cNvPr id="11" name="TextBox 10"/>
+          <p:cNvSpPr txBox="1"/>
+          <p:nvPr/>
+        </p:nvSpPr>
+        <p:spPr>
+          <a:xfrm>
+            <a:off x="4343400" y="1463040"/>
+            <a:ext cx="548640" cy="457200"/>
+          </a:xfrm>
+          <a:prstGeom prst="rect">
+            <a:avLst/>
+          </a:prstGeom>
+          <a:noFill/>
+        </p:spPr>
+        <p:txBody>
+          <a:bodyPr wrap="square">
+            <a:spAutoFit/>
+          </a:bodyPr>
+          <a:lstStyle/>
+          <a:p>
+            <a:pPr algn="ctr">
+              <a:defRPr sz="2800" b="0">
+                <a:solidFill>
+                  <a:srgbClr val="009BA4"/>
+                </a:solidFill>
+                <a:latin typeface="Arial"/>
+              </a:defRPr>
+            </a:pPr>
+            <a:r>
+              <a:t>🔔</a:t>
+            </a:r>
+          </a:p>
+        </p:txBody>
+      </p:sp>
+      <p:sp>
+        <p:nvSpPr>
+          <p:cNvPr id="12" name="TextBox 11"/>
+          <p:cNvSpPr txBox="1"/>
+          <p:nvPr/>
+        </p:nvSpPr>
+        <p:spPr>
+          <a:xfrm>
+            <a:off x="4343400" y="1874520"/>
+            <a:ext cx="3291840" cy="365760"/>
+          </a:xfrm>
+          <a:prstGeom prst="rect">
+            <a:avLst/>
+          </a:prstGeom>
+          <a:noFill/>
+        </p:spPr>
+        <p:txBody>
+          <a:bodyPr wrap="square">
+            <a:spAutoFit/>
+          </a:bodyPr>
+          <a:lstStyle/>
+          <a:p>
+            <a:pPr algn="r">
+              <a:defRPr sz="1400" b="1">
+                <a:solidFill>
+                  <a:srgbClr val="007B83"/>
+                </a:solidFill>
+                <a:latin typeface="Arial"/>
+              </a:defRPr>
+            </a:pPr>
+            <a:r>
+              <a:t>Real-time Push Alerts</a:t>
+            </a:r>
+          </a:p>
+        </p:txBody>
+      </p:sp>
+      <p:sp>
+        <p:nvSpPr>
+          <p:cNvPr id="13" name="TextBox 12"/>
+          <p:cNvSpPr txBox="1"/>
+          <p:nvPr/>
+        </p:nvSpPr>
+        <p:spPr>
+          <a:xfrm>
+            <a:off x="4343400" y="2240280"/>
+            <a:ext cx="3291840" cy="914400"/>
+          </a:xfrm>
+          <a:prstGeom prst="rect">
+            <a:avLst/>
+          </a:prstGeom>
+          <a:noFill/>
+        </p:spPr>
+        <p:txBody>
+          <a:bodyPr wrap="square">
+            <a:spAutoFit/>
+          </a:bodyPr>
+          <a:lstStyle/>
+          <a:p>
+            <a:pPr algn="r">
+              <a:defRPr sz="1100" b="0">
+                <a:solidFill>
+                  <a:srgbClr val="666666"/>
+                </a:solidFill>
+                <a:latin typeface="Arial"/>
+              </a:defRPr>
+            </a:pPr>
+            <a:r>
+              <a:t>התראות Push למשתמשים על שיבושים וביטולים בקווים שלהם</a:t>
+            </a:r>
+          </a:p>
+        </p:txBody>
+      </p:sp>
+      <p:sp>
+        <p:nvSpPr>
+          <p:cNvPr id="14" name="Rounded Rectangle 13"/>
+          <p:cNvSpPr/>
+          <p:nvPr/>
+        </p:nvSpPr>
+        <p:spPr>
+          <a:xfrm>
+            <a:off x="8138160" y="1371600"/>
+            <a:ext cx="3566160" cy="1920240"/>
+          </a:xfrm>
+          <a:prstGeom prst="roundRect">
+            <a:avLst/>
+          </a:prstGeom>
+          <a:solidFill>
+            <a:srgbClr val="F5F5F5"/>
+          </a:solidFill>
+          <a:ln w="12700">
+            <a:solidFill>
+              <a:srgbClr val="4DD0E1"/>
+            </a:solidFill>
+          </a:ln>
+        </p:spPr>
+        <p:style>
+          <a:lnRef idx="1">
+            <a:schemeClr val="accent1"/>
+          </a:lnRef>
+          <a:fillRef idx="3">
+            <a:schemeClr val="accent1"/>
+          </a:fillRef>
+          <a:effectRef idx="2">
+            <a:schemeClr val="accent1"/>
+          </a:effectRef>
+          <a:fontRef idx="minor">
+            <a:schemeClr val="lt1"/>
+          </a:fontRef>
+        </p:style>
+        <p:txBody>
+          <a:bodyPr rtlCol="0" anchor="ctr"/>
+          <a:lstStyle/>
+          <a:p>
+            <a:pPr algn="ctr"/>
+          </a:p>
+        </p:txBody>
+      </p:sp>
+      <p:sp>
+        <p:nvSpPr>
+          <p:cNvPr id="15" name="TextBox 14"/>
+          <p:cNvSpPr txBox="1"/>
+          <p:nvPr/>
+        </p:nvSpPr>
+        <p:spPr>
+          <a:xfrm>
+            <a:off x="8275320" y="1463040"/>
+            <a:ext cx="548640" cy="457200"/>
+          </a:xfrm>
+          <a:prstGeom prst="rect">
+            <a:avLst/>
+          </a:prstGeom>
+          <a:noFill/>
+        </p:spPr>
+        <p:txBody>
+          <a:bodyPr wrap="square">
+            <a:spAutoFit/>
+          </a:bodyPr>
+          <a:lstStyle/>
+          <a:p>
+            <a:pPr algn="ctr">
+              <a:defRPr sz="2800" b="0">
+                <a:solidFill>
+                  <a:srgbClr val="009BA4"/>
+                </a:solidFill>
+                <a:latin typeface="Arial"/>
+              </a:defRPr>
+            </a:pPr>
+            <a:r>
+              <a:t>📈</a:t>
+            </a:r>
+          </a:p>
+        </p:txBody>
+      </p:sp>
+      <p:sp>
+        <p:nvSpPr>
+          <p:cNvPr id="16" name="TextBox 15"/>
+          <p:cNvSpPr txBox="1"/>
+          <p:nvPr/>
+        </p:nvSpPr>
+        <p:spPr>
+          <a:xfrm>
+            <a:off x="8275320" y="1874520"/>
+            <a:ext cx="3291840" cy="365760"/>
+          </a:xfrm>
+          <a:prstGeom prst="rect">
+            <a:avLst/>
+          </a:prstGeom>
+          <a:noFill/>
+        </p:spPr>
+        <p:txBody>
+          <a:bodyPr wrap="square">
+            <a:spAutoFit/>
+          </a:bodyPr>
+          <a:lstStyle/>
+          <a:p>
+            <a:pPr algn="r">
+              <a:defRPr sz="1400" b="1">
+                <a:solidFill>
+                  <a:srgbClr val="007B83"/>
+                </a:solidFill>
+                <a:latin typeface="Arial"/>
+              </a:defRPr>
+            </a:pPr>
+            <a:r>
+              <a:t>Redshift / BigQuery</a:t>
+            </a:r>
+          </a:p>
+        </p:txBody>
+      </p:sp>
+      <p:sp>
+        <p:nvSpPr>
+          <p:cNvPr id="17" name="TextBox 16"/>
+          <p:cNvSpPr txBox="1"/>
+          <p:nvPr/>
+        </p:nvSpPr>
+        <p:spPr>
+          <a:xfrm>
+            <a:off x="8275320" y="2240280"/>
+            <a:ext cx="3291840" cy="914400"/>
+          </a:xfrm>
+          <a:prstGeom prst="rect">
+            <a:avLst/>
+          </a:prstGeom>
+          <a:noFill/>
+        </p:spPr>
+        <p:txBody>
+          <a:bodyPr wrap="square">
+            <a:spAutoFit/>
+          </a:bodyPr>
+          <a:lstStyle/>
+          <a:p>
+            <a:pPr algn="r">
+              <a:defRPr sz="1100" b="0">
+                <a:solidFill>
+                  <a:srgbClr val="666666"/>
+                </a:solidFill>
+                <a:latin typeface="Arial"/>
+              </a:defRPr>
+            </a:pPr>
+            <a:r>
+              <a:t>מחסן נתונים בענן לניתוחים ארוכי טווח ודוחות BI</a:t>
+            </a:r>
+          </a:p>
+        </p:txBody>
+      </p:sp>
+      <p:sp>
+        <p:nvSpPr>
+          <p:cNvPr id="18" name="Rounded Rectangle 17"/>
+          <p:cNvSpPr/>
+          <p:nvPr/>
+        </p:nvSpPr>
+        <p:spPr>
+          <a:xfrm>
+            <a:off x="274320" y="3657600"/>
+            <a:ext cx="3566160" cy="1920240"/>
+          </a:xfrm>
+          <a:prstGeom prst="roundRect">
+            <a:avLst/>
+          </a:prstGeom>
+          <a:solidFill>
+            <a:srgbClr val="F5F5F5"/>
+          </a:solidFill>
+          <a:ln w="12700">
+            <a:solidFill>
+              <a:srgbClr val="4DD0E1"/>
+            </a:solidFill>
+          </a:ln>
+        </p:spPr>
+        <p:style>
+          <a:lnRef idx="1">
+            <a:schemeClr val="accent1"/>
+          </a:lnRef>
+          <a:fillRef idx="3">
+            <a:schemeClr val="accent1"/>
+          </a:fillRef>
+          <a:effectRef idx="2">
+            <a:schemeClr val="accent1"/>
+          </a:effectRef>
+          <a:fontRef idx="minor">
+            <a:schemeClr val="lt1"/>
+          </a:fontRef>
+        </p:style>
+        <p:txBody>
+          <a:bodyPr rtlCol="0" anchor="ctr"/>
+          <a:lstStyle/>
+          <a:p>
+            <a:pPr algn="ctr"/>
+          </a:p>
+        </p:txBody>
+      </p:sp>
+      <p:sp>
+        <p:nvSpPr>
+          <p:cNvPr id="19" name="TextBox 18"/>
+          <p:cNvSpPr txBox="1"/>
+          <p:nvPr/>
+        </p:nvSpPr>
+        <p:spPr>
+          <a:xfrm>
+            <a:off x="411480" y="3749040"/>
+            <a:ext cx="548640" cy="457200"/>
+          </a:xfrm>
+          <a:prstGeom prst="rect">
+            <a:avLst/>
+          </a:prstGeom>
+          <a:noFill/>
+        </p:spPr>
+        <p:txBody>
+          <a:bodyPr wrap="square">
+            <a:spAutoFit/>
+          </a:bodyPr>
+          <a:lstStyle/>
+          <a:p>
+            <a:pPr algn="ctr">
+              <a:defRPr sz="2800" b="0">
+                <a:solidFill>
+                  <a:srgbClr val="009BA4"/>
+                </a:solidFill>
+                <a:latin typeface="Arial"/>
+              </a:defRPr>
+            </a:pPr>
+            <a:r>
+              <a:t>🌍</a:t>
+            </a:r>
+          </a:p>
+        </p:txBody>
+      </p:sp>
+      <p:sp>
+        <p:nvSpPr>
+          <p:cNvPr id="20" name="TextBox 19"/>
+          <p:cNvSpPr txBox="1"/>
+          <p:nvPr/>
+        </p:nvSpPr>
+        <p:spPr>
+          <a:xfrm>
+            <a:off x="411480" y="4160520"/>
+            <a:ext cx="3291840" cy="365760"/>
+          </a:xfrm>
+          <a:prstGeom prst="rect">
+            <a:avLst/>
+          </a:prstGeom>
+          <a:noFill/>
+        </p:spPr>
+        <p:txBody>
+          <a:bodyPr wrap="square">
+            <a:spAutoFit/>
+          </a:bodyPr>
+          <a:lstStyle/>
+          <a:p>
+            <a:pPr algn="r">
+              <a:defRPr sz="1400" b="1">
+                <a:solidFill>
+                  <a:srgbClr val="007B83"/>
+                </a:solidFill>
+                <a:latin typeface="Arial"/>
+              </a:defRPr>
+            </a:pPr>
+            <a:r>
+              <a:t>כיסוי ארצי</a:t>
+            </a:r>
+          </a:p>
+        </p:txBody>
+      </p:sp>
+      <p:sp>
+        <p:nvSpPr>
+          <p:cNvPr id="21" name="TextBox 20"/>
+          <p:cNvSpPr txBox="1"/>
+          <p:nvPr/>
+        </p:nvSpPr>
+        <p:spPr>
+          <a:xfrm>
+            <a:off x="411480" y="4526280"/>
+            <a:ext cx="3291840" cy="914400"/>
+          </a:xfrm>
+          <a:prstGeom prst="rect">
+            <a:avLst/>
+          </a:prstGeom>
+          <a:noFill/>
+        </p:spPr>
+        <p:txBody>
+          <a:bodyPr wrap="square">
+            <a:spAutoFit/>
+          </a:bodyPr>
+          <a:lstStyle/>
+          <a:p>
+            <a:pPr algn="r">
+              <a:defRPr sz="1100" b="0">
+                <a:solidFill>
+                  <a:srgbClr val="666666"/>
+                </a:solidFill>
+                <a:latin typeface="Arial"/>
+              </a:defRPr>
+            </a:pPr>
+            <a:r>
+              <a:t>הרחבה מגוש דן לכל הארץ — חיפה, ירושלים, באר שבע</a:t>
+            </a:r>
+          </a:p>
+        </p:txBody>
+      </p:sp>
+      <p:sp>
+        <p:nvSpPr>
+          <p:cNvPr id="22" name="Rounded Rectangle 21"/>
+          <p:cNvSpPr/>
+          <p:nvPr/>
+        </p:nvSpPr>
+        <p:spPr>
+          <a:xfrm>
+            <a:off x="4206240" y="3657600"/>
+            <a:ext cx="3566160" cy="1920240"/>
+          </a:xfrm>
+          <a:prstGeom prst="roundRect">
+            <a:avLst/>
+          </a:prstGeom>
+          <a:solidFill>
+            <a:srgbClr val="F5F5F5"/>
+          </a:solidFill>
+          <a:ln w="12700">
+            <a:solidFill>
+              <a:srgbClr val="4DD0E1"/>
+            </a:solidFill>
+          </a:ln>
+        </p:spPr>
+        <p:style>
+          <a:lnRef idx="1">
+            <a:schemeClr val="accent1"/>
+          </a:lnRef>
+          <a:fillRef idx="3">
+            <a:schemeClr val="accent1"/>
+          </a:fillRef>
+          <a:effectRef idx="2">
+            <a:schemeClr val="accent1"/>
+          </a:effectRef>
+          <a:fontRef idx="minor">
+            <a:schemeClr val="lt1"/>
+          </a:fontRef>
+        </p:style>
+        <p:txBody>
+          <a:bodyPr rtlCol="0" anchor="ctr"/>
+          <a:lstStyle/>
+          <a:p>
+            <a:pPr algn="ctr"/>
+          </a:p>
+        </p:txBody>
+      </p:sp>
+      <p:sp>
+        <p:nvSpPr>
+          <p:cNvPr id="23" name="TextBox 22"/>
+          <p:cNvSpPr txBox="1"/>
+          <p:nvPr/>
+        </p:nvSpPr>
+        <p:spPr>
+          <a:xfrm>
+            <a:off x="4343400" y="3749040"/>
+            <a:ext cx="548640" cy="457200"/>
+          </a:xfrm>
+          <a:prstGeom prst="rect">
+            <a:avLst/>
+          </a:prstGeom>
+          <a:noFill/>
+        </p:spPr>
+        <p:txBody>
+          <a:bodyPr wrap="square">
+            <a:spAutoFit/>
+          </a:bodyPr>
+          <a:lstStyle/>
+          <a:p>
+            <a:pPr algn="ctr">
+              <a:defRPr sz="2800" b="0">
+                <a:solidFill>
+                  <a:srgbClr val="009BA4"/>
+                </a:solidFill>
+                <a:latin typeface="Arial"/>
+              </a:defRPr>
+            </a:pPr>
+            <a:r>
+              <a:t>🎫</a:t>
+            </a:r>
+          </a:p>
+        </p:txBody>
+      </p:sp>
+      <p:sp>
+        <p:nvSpPr>
+          <p:cNvPr id="24" name="TextBox 23"/>
+          <p:cNvSpPr txBox="1"/>
+          <p:nvPr/>
+        </p:nvSpPr>
+        <p:spPr>
+          <a:xfrm>
+            <a:off x="4343400" y="4160520"/>
+            <a:ext cx="3291840" cy="365760"/>
+          </a:xfrm>
+          <a:prstGeom prst="rect">
+            <a:avLst/>
+          </a:prstGeom>
+          <a:noFill/>
+        </p:spPr>
+        <p:txBody>
+          <a:bodyPr wrap="square">
+            <a:spAutoFit/>
+          </a:bodyPr>
+          <a:lstStyle/>
+          <a:p>
+            <a:pPr algn="r">
+              <a:defRPr sz="1400" b="1">
+                <a:solidFill>
+                  <a:srgbClr val="007B83"/>
+                </a:solidFill>
+                <a:latin typeface="Arial"/>
+              </a:defRPr>
+            </a:pPr>
+            <a:r>
+              <a:t>אינטגרציית רב-קו</a:t>
+            </a:r>
+          </a:p>
+        </p:txBody>
+      </p:sp>
+      <p:sp>
+        <p:nvSpPr>
+          <p:cNvPr id="25" name="TextBox 24"/>
+          <p:cNvSpPr txBox="1"/>
+          <p:nvPr/>
+        </p:nvSpPr>
+        <p:spPr>
+          <a:xfrm>
+            <a:off x="4343400" y="4526280"/>
+            <a:ext cx="3291840" cy="914400"/>
+          </a:xfrm>
+          <a:prstGeom prst="rect">
+            <a:avLst/>
+          </a:prstGeom>
+          <a:noFill/>
+        </p:spPr>
+        <p:txBody>
+          <a:bodyPr wrap="square">
+            <a:spAutoFit/>
+          </a:bodyPr>
+          <a:lstStyle/>
+          <a:p>
+            <a:pPr algn="r">
+              <a:defRPr sz="1100" b="0">
+                <a:solidFill>
+                  <a:srgbClr val="666666"/>
+                </a:solidFill>
+                <a:latin typeface="Arial"/>
+              </a:defRPr>
+            </a:pPr>
+            <a:r>
+              <a:t>חיבור למערכת רב-קו לנתוני נוסעים ותפוסה בזמן אמת</a:t>
+            </a:r>
+          </a:p>
+        </p:txBody>
+      </p:sp>
+      <p:sp>
+        <p:nvSpPr>
+          <p:cNvPr id="26" name="Rounded Rectangle 25"/>
+          <p:cNvSpPr/>
+          <p:nvPr/>
+        </p:nvSpPr>
+        <p:spPr>
+          <a:xfrm>
+            <a:off x="8138160" y="3657600"/>
+            <a:ext cx="3566160" cy="1920240"/>
+          </a:xfrm>
+          <a:prstGeom prst="roundRect">
+            <a:avLst/>
+          </a:prstGeom>
+          <a:solidFill>
+            <a:srgbClr val="F5F5F5"/>
+          </a:solidFill>
+          <a:ln w="12700">
+            <a:solidFill>
+              <a:srgbClr val="4DD0E1"/>
+            </a:solidFill>
+          </a:ln>
+        </p:spPr>
+        <p:style>
+          <a:lnRef idx="1">
+            <a:schemeClr val="accent1"/>
+          </a:lnRef>
+          <a:fillRef idx="3">
+            <a:schemeClr val="accent1"/>
+          </a:fillRef>
+          <a:effectRef idx="2">
+            <a:schemeClr val="accent1"/>
+          </a:effectRef>
+          <a:fontRef idx="minor">
+            <a:schemeClr val="lt1"/>
+          </a:fontRef>
+        </p:style>
+        <p:txBody>
+          <a:bodyPr rtlCol="0" anchor="ctr"/>
+          <a:lstStyle/>
+          <a:p>
+            <a:pPr algn="ctr"/>
+          </a:p>
+        </p:txBody>
+      </p:sp>
+      <p:sp>
+        <p:nvSpPr>
+          <p:cNvPr id="27" name="TextBox 26"/>
+          <p:cNvSpPr txBox="1"/>
+          <p:nvPr/>
+        </p:nvSpPr>
+        <p:spPr>
+          <a:xfrm>
+            <a:off x="8275320" y="3749040"/>
+            <a:ext cx="548640" cy="457200"/>
+          </a:xfrm>
+          <a:prstGeom prst="rect">
+            <a:avLst/>
+          </a:prstGeom>
+          <a:noFill/>
+        </p:spPr>
+        <p:txBody>
+          <a:bodyPr wrap="square">
+            <a:spAutoFit/>
+          </a:bodyPr>
+          <a:lstStyle/>
+          <a:p>
+            <a:pPr algn="ctr">
+              <a:defRPr sz="2800" b="0">
+                <a:solidFill>
+                  <a:srgbClr val="009BA4"/>
+                </a:solidFill>
+                <a:latin typeface="Arial"/>
+              </a:defRPr>
+            </a:pPr>
+            <a:r>
+              <a:t>📊</a:t>
+            </a:r>
+          </a:p>
+        </p:txBody>
+      </p:sp>
+      <p:sp>
+        <p:nvSpPr>
+          <p:cNvPr id="28" name="TextBox 27"/>
+          <p:cNvSpPr txBox="1"/>
+          <p:nvPr/>
+        </p:nvSpPr>
+        <p:spPr>
+          <a:xfrm>
+            <a:off x="8275320" y="4160520"/>
+            <a:ext cx="3291840" cy="365760"/>
+          </a:xfrm>
+          <a:prstGeom prst="rect">
+            <a:avLst/>
+          </a:prstGeom>
+          <a:noFill/>
+        </p:spPr>
+        <p:txBody>
+          <a:bodyPr wrap="square">
+            <a:spAutoFit/>
+          </a:bodyPr>
+          <a:lstStyle/>
+          <a:p>
+            <a:pPr algn="r">
+              <a:defRPr sz="1400" b="1">
+                <a:solidFill>
+                  <a:srgbClr val="007B83"/>
+                </a:solidFill>
+                <a:latin typeface="Arial"/>
+              </a:defRPr>
+            </a:pPr>
+            <a:r>
+              <a:t>דוחות אוטומטיים</a:t>
+            </a:r>
+          </a:p>
+        </p:txBody>
+      </p:sp>
+      <p:sp>
+        <p:nvSpPr>
+          <p:cNvPr id="29" name="TextBox 28"/>
+          <p:cNvSpPr txBox="1"/>
+          <p:nvPr/>
+        </p:nvSpPr>
+        <p:spPr>
+          <a:xfrm>
+            <a:off x="8275320" y="4526280"/>
+            <a:ext cx="3291840" cy="914400"/>
+          </a:xfrm>
+          <a:prstGeom prst="rect">
+            <a:avLst/>
+          </a:prstGeom>
+          <a:noFill/>
+        </p:spPr>
+        <p:txBody>
+          <a:bodyPr wrap="square">
+            <a:spAutoFit/>
+          </a:bodyPr>
+          <a:lstStyle/>
+          <a:p>
+            <a:pPr algn="r">
+              <a:defRPr sz="1100" b="0">
+                <a:solidFill>
+                  <a:srgbClr val="666666"/>
+                </a:solidFill>
+                <a:latin typeface="Arial"/>
+              </a:defRPr>
+            </a:pPr>
+            <a:r>
+              <a:t>דוח PDF/HTML יומי עם KPIs — אחוז דיוק, קווים בעייתיים, מגמות</a:t>
+            </a:r>
+          </a:p>
+        </p:txBody>
+      </p:sp>
+    </p:spTree>
+  </p:cSld>
+  <p:clrMapOvr>
+    <a:masterClrMapping/>
+  </p:clrMapOvr>
+</p:sld>
+</file>
+
+<file path=ppt/slides/slide19.xml><?xml version="1.0" encoding="utf-8"?>
 <p:sld xmlns:a="http://schemas.openxmlformats.org/drawingml/2006/main" xmlns:p="http://schemas.openxmlformats.org/presentationml/2006/main" xmlns:r="http://schemas.openxmlformats.org/officeDocument/2006/relationships">
   <p:cSld>
     <p:bg>
